--- a/docs/BOON_ACADEMY_OVERVIEW.pptx
+++ b/docs/BOON_ACADEMY_OVERVIEW.pptx
@@ -5,27 +5,27 @@
     <p:sldMasterId id="2147483648" r:id="rId1"/>
   </p:sldMasterIdLst>
   <p:sldIdLst>
-    <p:sldId id="256" r:id="rId7"/>
-    <p:sldId id="257" r:id="rId8"/>
-    <p:sldId id="258" r:id="rId9"/>
-    <p:sldId id="259" r:id="rId10"/>
-    <p:sldId id="260" r:id="rId11"/>
-    <p:sldId id="261" r:id="rId12"/>
-    <p:sldId id="262" r:id="rId13"/>
-    <p:sldId id="263" r:id="rId14"/>
-    <p:sldId id="264" r:id="rId15"/>
-    <p:sldId id="265" r:id="rId16"/>
-    <p:sldId id="266" r:id="rId17"/>
-    <p:sldId id="267" r:id="rId18"/>
-    <p:sldId id="268" r:id="rId19"/>
-    <p:sldId id="269" r:id="rId20"/>
-    <p:sldId id="270" r:id="rId21"/>
-    <p:sldId id="271" r:id="rId22"/>
-    <p:sldId id="272" r:id="rId23"/>
-    <p:sldId id="273" r:id="rId24"/>
-    <p:sldId id="274" r:id="rId25"/>
+    <p:sldId id="256" r:id="rId2"/>
+    <p:sldId id="257" r:id="rId3"/>
+    <p:sldId id="258" r:id="rId4"/>
+    <p:sldId id="259" r:id="rId5"/>
+    <p:sldId id="260" r:id="rId6"/>
+    <p:sldId id="261" r:id="rId7"/>
+    <p:sldId id="262" r:id="rId8"/>
+    <p:sldId id="263" r:id="rId9"/>
+    <p:sldId id="264" r:id="rId10"/>
+    <p:sldId id="265" r:id="rId11"/>
+    <p:sldId id="266" r:id="rId12"/>
+    <p:sldId id="267" r:id="rId13"/>
+    <p:sldId id="268" r:id="rId14"/>
+    <p:sldId id="269" r:id="rId15"/>
+    <p:sldId id="270" r:id="rId16"/>
+    <p:sldId id="271" r:id="rId17"/>
+    <p:sldId id="272" r:id="rId18"/>
+    <p:sldId id="273" r:id="rId19"/>
+    <p:sldId id="274" r:id="rId20"/>
   </p:sldIdLst>
-  <p:sldSz cx="12191695" cy="6858000" type="screen4x3"/>
+  <p:sldSz cx="12192000" cy="6858000"/>
   <p:notesSz cx="6858000" cy="9144000"/>
   <p:defaultTextStyle>
     <a:defPPr>
@@ -122,6 +122,22 @@
       </a:defRPr>
     </a:lvl9pPr>
   </p:defaultTextStyle>
+  <p:extLst>
+    <p:ext uri="{EFAFB233-063F-42B5-8137-9DF3F51BA10A}">
+      <p15:sldGuideLst xmlns:p15="http://schemas.microsoft.com/office/powerpoint/2012/main">
+        <p15:guide id="1" orient="horz" pos="2160">
+          <p15:clr>
+            <a:srgbClr val="A4A3A4"/>
+          </p15:clr>
+        </p15:guide>
+        <p15:guide id="2" pos="2880">
+          <p15:clr>
+            <a:srgbClr val="A4A3A4"/>
+          </p15:clr>
+        </p15:guide>
+      </p15:sldGuideLst>
+    </p:ext>
+  </p:extLst>
 </p:presentation>
 </file>
 
@@ -163,10 +179,9 @@
           <a:lstStyle/>
           <a:p>
             <a:r>
-              <a:rPr lang="en-US" smtClean="0"/>
+              <a:rPr lang="en-US"/>
               <a:t>Click to edit Master title style</a:t>
             </a:r>
-            <a:endParaRPr lang="en-US"/>
           </a:p>
         </p:txBody>
       </p:sp>
@@ -282,10 +297,9 @@
           </a:lstStyle>
           <a:p>
             <a:r>
-              <a:rPr lang="en-US" smtClean="0"/>
+              <a:rPr lang="en-US"/>
               <a:t>Click to edit Master subtitle style</a:t>
             </a:r>
-            <a:endParaRPr lang="en-US"/>
           </a:p>
         </p:txBody>
       </p:sp>
@@ -306,7 +320,7 @@
           <a:p>
             <a:fld id="{5BCAD085-E8A6-8845-BD4E-CB4CCA059FC4}" type="datetimeFigureOut">
               <a:rPr lang="en-US" smtClean="0"/>
-              <a:t>1/27/13</a:t>
+              <a:t>7/8/26</a:t>
             </a:fld>
             <a:endParaRPr lang="en-US"/>
           </a:p>
@@ -400,10 +414,9 @@
           <a:lstStyle/>
           <a:p>
             <a:r>
-              <a:rPr lang="en-US" smtClean="0"/>
+              <a:rPr lang="en-US"/>
               <a:t>Click to edit Master title style</a:t>
             </a:r>
-            <a:endParaRPr lang="en-US"/>
           </a:p>
         </p:txBody>
       </p:sp>
@@ -424,38 +437,37 @@
           <a:p>
             <a:pPr lvl="0"/>
             <a:r>
-              <a:rPr lang="en-US" smtClean="0"/>
+              <a:rPr lang="en-US"/>
               <a:t>Click to edit Master text styles</a:t>
             </a:r>
           </a:p>
           <a:p>
             <a:pPr lvl="1"/>
             <a:r>
-              <a:rPr lang="en-US" smtClean="0"/>
+              <a:rPr lang="en-US"/>
               <a:t>Second level</a:t>
             </a:r>
           </a:p>
           <a:p>
             <a:pPr lvl="2"/>
             <a:r>
-              <a:rPr lang="en-US" smtClean="0"/>
+              <a:rPr lang="en-US"/>
               <a:t>Third level</a:t>
             </a:r>
           </a:p>
           <a:p>
             <a:pPr lvl="3"/>
             <a:r>
-              <a:rPr lang="en-US" smtClean="0"/>
+              <a:rPr lang="en-US"/>
               <a:t>Fourth level</a:t>
             </a:r>
           </a:p>
           <a:p>
             <a:pPr lvl="4"/>
             <a:r>
-              <a:rPr lang="en-US" smtClean="0"/>
+              <a:rPr lang="en-US"/>
               <a:t>Fifth level</a:t>
             </a:r>
-            <a:endParaRPr lang="en-US"/>
           </a:p>
         </p:txBody>
       </p:sp>
@@ -476,7 +488,7 @@
           <a:p>
             <a:fld id="{5BCAD085-E8A6-8845-BD4E-CB4CCA059FC4}" type="datetimeFigureOut">
               <a:rPr lang="en-US" smtClean="0"/>
-              <a:t>1/27/13</a:t>
+              <a:t>7/8/26</a:t>
             </a:fld>
             <a:endParaRPr lang="en-US"/>
           </a:p>
@@ -575,10 +587,9 @@
           <a:lstStyle/>
           <a:p>
             <a:r>
-              <a:rPr lang="en-US" smtClean="0"/>
+              <a:rPr lang="en-US"/>
               <a:t>Click to edit Master title style</a:t>
             </a:r>
-            <a:endParaRPr lang="en-US"/>
           </a:p>
         </p:txBody>
       </p:sp>
@@ -604,38 +615,37 @@
           <a:p>
             <a:pPr lvl="0"/>
             <a:r>
-              <a:rPr lang="en-US" smtClean="0"/>
+              <a:rPr lang="en-US"/>
               <a:t>Click to edit Master text styles</a:t>
             </a:r>
           </a:p>
           <a:p>
             <a:pPr lvl="1"/>
             <a:r>
-              <a:rPr lang="en-US" smtClean="0"/>
+              <a:rPr lang="en-US"/>
               <a:t>Second level</a:t>
             </a:r>
           </a:p>
           <a:p>
             <a:pPr lvl="2"/>
             <a:r>
-              <a:rPr lang="en-US" smtClean="0"/>
+              <a:rPr lang="en-US"/>
               <a:t>Third level</a:t>
             </a:r>
           </a:p>
           <a:p>
             <a:pPr lvl="3"/>
             <a:r>
-              <a:rPr lang="en-US" smtClean="0"/>
+              <a:rPr lang="en-US"/>
               <a:t>Fourth level</a:t>
             </a:r>
           </a:p>
           <a:p>
             <a:pPr lvl="4"/>
             <a:r>
-              <a:rPr lang="en-US" smtClean="0"/>
+              <a:rPr lang="en-US"/>
               <a:t>Fifth level</a:t>
             </a:r>
-            <a:endParaRPr lang="en-US"/>
           </a:p>
         </p:txBody>
       </p:sp>
@@ -656,7 +666,7 @@
           <a:p>
             <a:fld id="{5BCAD085-E8A6-8845-BD4E-CB4CCA059FC4}" type="datetimeFigureOut">
               <a:rPr lang="en-US" smtClean="0"/>
-              <a:t>1/27/13</a:t>
+              <a:t>7/8/26</a:t>
             </a:fld>
             <a:endParaRPr lang="en-US"/>
           </a:p>
@@ -750,10 +760,9 @@
           <a:lstStyle/>
           <a:p>
             <a:r>
-              <a:rPr lang="en-US" smtClean="0"/>
+              <a:rPr lang="en-US"/>
               <a:t>Click to edit Master title style</a:t>
             </a:r>
-            <a:endParaRPr lang="en-US"/>
           </a:p>
         </p:txBody>
       </p:sp>
@@ -774,38 +783,37 @@
           <a:p>
             <a:pPr lvl="0"/>
             <a:r>
-              <a:rPr lang="en-US" smtClean="0"/>
+              <a:rPr lang="en-US"/>
               <a:t>Click to edit Master text styles</a:t>
             </a:r>
           </a:p>
           <a:p>
             <a:pPr lvl="1"/>
             <a:r>
-              <a:rPr lang="en-US" smtClean="0"/>
+              <a:rPr lang="en-US"/>
               <a:t>Second level</a:t>
             </a:r>
           </a:p>
           <a:p>
             <a:pPr lvl="2"/>
             <a:r>
-              <a:rPr lang="en-US" smtClean="0"/>
+              <a:rPr lang="en-US"/>
               <a:t>Third level</a:t>
             </a:r>
           </a:p>
           <a:p>
             <a:pPr lvl="3"/>
             <a:r>
-              <a:rPr lang="en-US" smtClean="0"/>
+              <a:rPr lang="en-US"/>
               <a:t>Fourth level</a:t>
             </a:r>
           </a:p>
           <a:p>
             <a:pPr lvl="4"/>
             <a:r>
-              <a:rPr lang="en-US" smtClean="0"/>
+              <a:rPr lang="en-US"/>
               <a:t>Fifth level</a:t>
             </a:r>
-            <a:endParaRPr lang="en-US"/>
           </a:p>
         </p:txBody>
       </p:sp>
@@ -826,7 +834,7 @@
           <a:p>
             <a:fld id="{5BCAD085-E8A6-8845-BD4E-CB4CCA059FC4}" type="datetimeFigureOut">
               <a:rPr lang="en-US" smtClean="0"/>
-              <a:t>1/27/13</a:t>
+              <a:t>7/8/26</a:t>
             </a:fld>
             <a:endParaRPr lang="en-US"/>
           </a:p>
@@ -929,10 +937,9 @@
           </a:lstStyle>
           <a:p>
             <a:r>
-              <a:rPr lang="en-US" smtClean="0"/>
+              <a:rPr lang="en-US"/>
               <a:t>Click to edit Master title style</a:t>
             </a:r>
-            <a:endParaRPr lang="en-US"/>
           </a:p>
         </p:txBody>
       </p:sp>
@@ -1049,7 +1056,7 @@
           <a:p>
             <a:pPr lvl="0"/>
             <a:r>
-              <a:rPr lang="en-US" smtClean="0"/>
+              <a:rPr lang="en-US"/>
               <a:t>Click to edit Master text styles</a:t>
             </a:r>
           </a:p>
@@ -1072,7 +1079,7 @@
           <a:p>
             <a:fld id="{5BCAD085-E8A6-8845-BD4E-CB4CCA059FC4}" type="datetimeFigureOut">
               <a:rPr lang="en-US" smtClean="0"/>
-              <a:t>1/27/13</a:t>
+              <a:t>7/8/26</a:t>
             </a:fld>
             <a:endParaRPr lang="en-US"/>
           </a:p>
@@ -1166,10 +1173,9 @@
           <a:lstStyle/>
           <a:p>
             <a:r>
-              <a:rPr lang="en-US" smtClean="0"/>
+              <a:rPr lang="en-US"/>
               <a:t>Click to edit Master title style</a:t>
             </a:r>
-            <a:endParaRPr lang="en-US"/>
           </a:p>
         </p:txBody>
       </p:sp>
@@ -1223,38 +1229,37 @@
           <a:p>
             <a:pPr lvl="0"/>
             <a:r>
-              <a:rPr lang="en-US" smtClean="0"/>
+              <a:rPr lang="en-US"/>
               <a:t>Click to edit Master text styles</a:t>
             </a:r>
           </a:p>
           <a:p>
             <a:pPr lvl="1"/>
             <a:r>
-              <a:rPr lang="en-US" smtClean="0"/>
+              <a:rPr lang="en-US"/>
               <a:t>Second level</a:t>
             </a:r>
           </a:p>
           <a:p>
             <a:pPr lvl="2"/>
             <a:r>
-              <a:rPr lang="en-US" smtClean="0"/>
+              <a:rPr lang="en-US"/>
               <a:t>Third level</a:t>
             </a:r>
           </a:p>
           <a:p>
             <a:pPr lvl="3"/>
             <a:r>
-              <a:rPr lang="en-US" smtClean="0"/>
+              <a:rPr lang="en-US"/>
               <a:t>Fourth level</a:t>
             </a:r>
           </a:p>
           <a:p>
             <a:pPr lvl="4"/>
             <a:r>
-              <a:rPr lang="en-US" smtClean="0"/>
+              <a:rPr lang="en-US"/>
               <a:t>Fifth level</a:t>
             </a:r>
-            <a:endParaRPr lang="en-US"/>
           </a:p>
         </p:txBody>
       </p:sp>
@@ -1308,38 +1313,37 @@
           <a:p>
             <a:pPr lvl="0"/>
             <a:r>
-              <a:rPr lang="en-US" smtClean="0"/>
+              <a:rPr lang="en-US"/>
               <a:t>Click to edit Master text styles</a:t>
             </a:r>
           </a:p>
           <a:p>
             <a:pPr lvl="1"/>
             <a:r>
-              <a:rPr lang="en-US" smtClean="0"/>
+              <a:rPr lang="en-US"/>
               <a:t>Second level</a:t>
             </a:r>
           </a:p>
           <a:p>
             <a:pPr lvl="2"/>
             <a:r>
-              <a:rPr lang="en-US" smtClean="0"/>
+              <a:rPr lang="en-US"/>
               <a:t>Third level</a:t>
             </a:r>
           </a:p>
           <a:p>
             <a:pPr lvl="3"/>
             <a:r>
-              <a:rPr lang="en-US" smtClean="0"/>
+              <a:rPr lang="en-US"/>
               <a:t>Fourth level</a:t>
             </a:r>
           </a:p>
           <a:p>
             <a:pPr lvl="4"/>
             <a:r>
-              <a:rPr lang="en-US" smtClean="0"/>
+              <a:rPr lang="en-US"/>
               <a:t>Fifth level</a:t>
             </a:r>
-            <a:endParaRPr lang="en-US"/>
           </a:p>
         </p:txBody>
       </p:sp>
@@ -1360,7 +1364,7 @@
           <a:p>
             <a:fld id="{5BCAD085-E8A6-8845-BD4E-CB4CCA059FC4}" type="datetimeFigureOut">
               <a:rPr lang="en-US" smtClean="0"/>
-              <a:t>1/27/13</a:t>
+              <a:t>7/8/26</a:t>
             </a:fld>
             <a:endParaRPr lang="en-US"/>
           </a:p>
@@ -1458,10 +1462,9 @@
           </a:lstStyle>
           <a:p>
             <a:r>
-              <a:rPr lang="en-US" smtClean="0"/>
+              <a:rPr lang="en-US"/>
               <a:t>Click to edit Master title style</a:t>
             </a:r>
-            <a:endParaRPr lang="en-US"/>
           </a:p>
         </p:txBody>
       </p:sp>
@@ -1524,7 +1527,7 @@
           <a:p>
             <a:pPr lvl="0"/>
             <a:r>
-              <a:rPr lang="en-US" smtClean="0"/>
+              <a:rPr lang="en-US"/>
               <a:t>Click to edit Master text styles</a:t>
             </a:r>
           </a:p>
@@ -1580,38 +1583,37 @@
           <a:p>
             <a:pPr lvl="0"/>
             <a:r>
-              <a:rPr lang="en-US" smtClean="0"/>
+              <a:rPr lang="en-US"/>
               <a:t>Click to edit Master text styles</a:t>
             </a:r>
           </a:p>
           <a:p>
             <a:pPr lvl="1"/>
             <a:r>
-              <a:rPr lang="en-US" smtClean="0"/>
+              <a:rPr lang="en-US"/>
               <a:t>Second level</a:t>
             </a:r>
           </a:p>
           <a:p>
             <a:pPr lvl="2"/>
             <a:r>
-              <a:rPr lang="en-US" smtClean="0"/>
+              <a:rPr lang="en-US"/>
               <a:t>Third level</a:t>
             </a:r>
           </a:p>
           <a:p>
             <a:pPr lvl="3"/>
             <a:r>
-              <a:rPr lang="en-US" smtClean="0"/>
+              <a:rPr lang="en-US"/>
               <a:t>Fourth level</a:t>
             </a:r>
           </a:p>
           <a:p>
             <a:pPr lvl="4"/>
             <a:r>
-              <a:rPr lang="en-US" smtClean="0"/>
+              <a:rPr lang="en-US"/>
               <a:t>Fifth level</a:t>
             </a:r>
-            <a:endParaRPr lang="en-US"/>
           </a:p>
         </p:txBody>
       </p:sp>
@@ -1674,7 +1676,7 @@
           <a:p>
             <a:pPr lvl="0"/>
             <a:r>
-              <a:rPr lang="en-US" smtClean="0"/>
+              <a:rPr lang="en-US"/>
               <a:t>Click to edit Master text styles</a:t>
             </a:r>
           </a:p>
@@ -1730,38 +1732,37 @@
           <a:p>
             <a:pPr lvl="0"/>
             <a:r>
-              <a:rPr lang="en-US" smtClean="0"/>
+              <a:rPr lang="en-US"/>
               <a:t>Click to edit Master text styles</a:t>
             </a:r>
           </a:p>
           <a:p>
             <a:pPr lvl="1"/>
             <a:r>
-              <a:rPr lang="en-US" smtClean="0"/>
+              <a:rPr lang="en-US"/>
               <a:t>Second level</a:t>
             </a:r>
           </a:p>
           <a:p>
             <a:pPr lvl="2"/>
             <a:r>
-              <a:rPr lang="en-US" smtClean="0"/>
+              <a:rPr lang="en-US"/>
               <a:t>Third level</a:t>
             </a:r>
           </a:p>
           <a:p>
             <a:pPr lvl="3"/>
             <a:r>
-              <a:rPr lang="en-US" smtClean="0"/>
+              <a:rPr lang="en-US"/>
               <a:t>Fourth level</a:t>
             </a:r>
           </a:p>
           <a:p>
             <a:pPr lvl="4"/>
             <a:r>
-              <a:rPr lang="en-US" smtClean="0"/>
+              <a:rPr lang="en-US"/>
               <a:t>Fifth level</a:t>
             </a:r>
-            <a:endParaRPr lang="en-US"/>
           </a:p>
         </p:txBody>
       </p:sp>
@@ -1782,7 +1783,7 @@
           <a:p>
             <a:fld id="{5BCAD085-E8A6-8845-BD4E-CB4CCA059FC4}" type="datetimeFigureOut">
               <a:rPr lang="en-US" smtClean="0"/>
-              <a:t>1/27/13</a:t>
+              <a:t>7/8/26</a:t>
             </a:fld>
             <a:endParaRPr lang="en-US"/>
           </a:p>
@@ -1876,10 +1877,9 @@
           <a:lstStyle/>
           <a:p>
             <a:r>
-              <a:rPr lang="en-US" smtClean="0"/>
+              <a:rPr lang="en-US"/>
               <a:t>Click to edit Master title style</a:t>
             </a:r>
-            <a:endParaRPr lang="en-US"/>
           </a:p>
         </p:txBody>
       </p:sp>
@@ -1900,7 +1900,7 @@
           <a:p>
             <a:fld id="{5BCAD085-E8A6-8845-BD4E-CB4CCA059FC4}" type="datetimeFigureOut">
               <a:rPr lang="en-US" smtClean="0"/>
-              <a:t>1/27/13</a:t>
+              <a:t>7/8/26</a:t>
             </a:fld>
             <a:endParaRPr lang="en-US"/>
           </a:p>
@@ -1995,7 +1995,7 @@
           <a:p>
             <a:fld id="{5BCAD085-E8A6-8845-BD4E-CB4CCA059FC4}" type="datetimeFigureOut">
               <a:rPr lang="en-US" smtClean="0"/>
-              <a:t>1/27/13</a:t>
+              <a:t>7/8/26</a:t>
             </a:fld>
             <a:endParaRPr lang="en-US"/>
           </a:p>
@@ -2098,10 +2098,9 @@
           </a:lstStyle>
           <a:p>
             <a:r>
-              <a:rPr lang="en-US" smtClean="0"/>
+              <a:rPr lang="en-US"/>
               <a:t>Click to edit Master title style</a:t>
             </a:r>
-            <a:endParaRPr lang="en-US"/>
           </a:p>
         </p:txBody>
       </p:sp>
@@ -2155,38 +2154,37 @@
           <a:p>
             <a:pPr lvl="0"/>
             <a:r>
-              <a:rPr lang="en-US" smtClean="0"/>
+              <a:rPr lang="en-US"/>
               <a:t>Click to edit Master text styles</a:t>
             </a:r>
           </a:p>
           <a:p>
             <a:pPr lvl="1"/>
             <a:r>
-              <a:rPr lang="en-US" smtClean="0"/>
+              <a:rPr lang="en-US"/>
               <a:t>Second level</a:t>
             </a:r>
           </a:p>
           <a:p>
             <a:pPr lvl="2"/>
             <a:r>
-              <a:rPr lang="en-US" smtClean="0"/>
+              <a:rPr lang="en-US"/>
               <a:t>Third level</a:t>
             </a:r>
           </a:p>
           <a:p>
             <a:pPr lvl="3"/>
             <a:r>
-              <a:rPr lang="en-US" smtClean="0"/>
+              <a:rPr lang="en-US"/>
               <a:t>Fourth level</a:t>
             </a:r>
           </a:p>
           <a:p>
             <a:pPr lvl="4"/>
             <a:r>
-              <a:rPr lang="en-US" smtClean="0"/>
+              <a:rPr lang="en-US"/>
               <a:t>Fifth level</a:t>
             </a:r>
-            <a:endParaRPr lang="en-US"/>
           </a:p>
         </p:txBody>
       </p:sp>
@@ -2249,7 +2247,7 @@
           <a:p>
             <a:pPr lvl="0"/>
             <a:r>
-              <a:rPr lang="en-US" smtClean="0"/>
+              <a:rPr lang="en-US"/>
               <a:t>Click to edit Master text styles</a:t>
             </a:r>
           </a:p>
@@ -2272,7 +2270,7 @@
           <a:p>
             <a:fld id="{5BCAD085-E8A6-8845-BD4E-CB4CCA059FC4}" type="datetimeFigureOut">
               <a:rPr lang="en-US" smtClean="0"/>
-              <a:t>1/27/13</a:t>
+              <a:t>7/8/26</a:t>
             </a:fld>
             <a:endParaRPr lang="en-US"/>
           </a:p>
@@ -2375,10 +2373,9 @@
           </a:lstStyle>
           <a:p>
             <a:r>
-              <a:rPr lang="en-US" smtClean="0"/>
+              <a:rPr lang="en-US"/>
               <a:t>Click to edit Master title style</a:t>
             </a:r>
-            <a:endParaRPr lang="en-US"/>
           </a:p>
         </p:txBody>
       </p:sp>
@@ -2502,7 +2499,7 @@
           <a:p>
             <a:pPr lvl="0"/>
             <a:r>
-              <a:rPr lang="en-US" smtClean="0"/>
+              <a:rPr lang="en-US"/>
               <a:t>Click to edit Master text styles</a:t>
             </a:r>
           </a:p>
@@ -2525,7 +2522,7 @@
           <a:p>
             <a:fld id="{5BCAD085-E8A6-8845-BD4E-CB4CCA059FC4}" type="datetimeFigureOut">
               <a:rPr lang="en-US" smtClean="0"/>
-              <a:t>1/27/13</a:t>
+              <a:t>7/8/26</a:t>
             </a:fld>
             <a:endParaRPr lang="en-US"/>
           </a:p>
@@ -2634,10 +2631,9 @@
           <a:lstStyle/>
           <a:p>
             <a:r>
-              <a:rPr lang="en-US" smtClean="0"/>
+              <a:rPr lang="en-US"/>
               <a:t>Click to edit Master title style</a:t>
             </a:r>
-            <a:endParaRPr lang="en-US"/>
           </a:p>
         </p:txBody>
       </p:sp>
@@ -2668,38 +2664,37 @@
           <a:p>
             <a:pPr lvl="0"/>
             <a:r>
-              <a:rPr lang="en-US" smtClean="0"/>
+              <a:rPr lang="en-US"/>
               <a:t>Click to edit Master text styles</a:t>
             </a:r>
           </a:p>
           <a:p>
             <a:pPr lvl="1"/>
             <a:r>
-              <a:rPr lang="en-US" smtClean="0"/>
+              <a:rPr lang="en-US"/>
               <a:t>Second level</a:t>
             </a:r>
           </a:p>
           <a:p>
             <a:pPr lvl="2"/>
             <a:r>
-              <a:rPr lang="en-US" smtClean="0"/>
+              <a:rPr lang="en-US"/>
               <a:t>Third level</a:t>
             </a:r>
           </a:p>
           <a:p>
             <a:pPr lvl="3"/>
             <a:r>
-              <a:rPr lang="en-US" smtClean="0"/>
+              <a:rPr lang="en-US"/>
               <a:t>Fourth level</a:t>
             </a:r>
           </a:p>
           <a:p>
             <a:pPr lvl="4"/>
             <a:r>
-              <a:rPr lang="en-US" smtClean="0"/>
+              <a:rPr lang="en-US"/>
               <a:t>Fifth level</a:t>
             </a:r>
-            <a:endParaRPr lang="en-US"/>
           </a:p>
         </p:txBody>
       </p:sp>
@@ -2738,7 +2733,7 @@
           <a:p>
             <a:fld id="{5BCAD085-E8A6-8845-BD4E-CB4CCA059FC4}" type="datetimeFigureOut">
               <a:rPr lang="en-US" smtClean="0"/>
-              <a:t>1/27/13</a:t>
+              <a:t>7/8/26</a:t>
             </a:fld>
             <a:endParaRPr lang="en-US"/>
           </a:p>
@@ -3097,7 +3092,7 @@
 </file>
 
 <file path=ppt/slides/slide1.xml><?xml version="1.0" encoding="utf-8"?>
-<p:sld xmlns:a="http://schemas.openxmlformats.org/drawingml/2006/main" xmlns:p="http://schemas.openxmlformats.org/presentationml/2006/main" xmlns:r="http://schemas.openxmlformats.org/officeDocument/2006/relationships">
+<p:sld xmlns:a="http://schemas.openxmlformats.org/drawingml/2006/main" xmlns:r="http://schemas.openxmlformats.org/officeDocument/2006/relationships" xmlns:p="http://schemas.openxmlformats.org/presentationml/2006/main">
   <p:cSld>
     <p:spTree>
       <p:nvGrpSpPr>
@@ -3105,7 +3100,14 @@
         <p:cNvGrpSpPr/>
         <p:nvPr/>
       </p:nvGrpSpPr>
-      <p:grpSpPr/>
+      <p:grpSpPr>
+        <a:xfrm>
+          <a:off x="0" y="0"/>
+          <a:ext cx="0" cy="0"/>
+          <a:chOff x="0" y="0"/>
+          <a:chExt cx="0" cy="0"/>
+        </a:xfrm>
+      </p:grpSpPr>
       <p:sp>
         <p:nvSpPr>
           <p:cNvPr id="2" name="Rectangle 1"/>
@@ -3147,6 +3149,7 @@
           <a:lstStyle/>
           <a:p>
             <a:pPr algn="ctr"/>
+            <a:endParaRPr/>
           </a:p>
         </p:txBody>
       </p:sp>
@@ -3296,6 +3299,7 @@
           <a:lstStyle/>
           <a:p>
             <a:pPr algn="ctr"/>
+            <a:endParaRPr/>
           </a:p>
         </p:txBody>
       </p:sp>
@@ -3378,7 +3382,7 @@
 </file>
 
 <file path=ppt/slides/slide10.xml><?xml version="1.0" encoding="utf-8"?>
-<p:sld xmlns:a="http://schemas.openxmlformats.org/drawingml/2006/main" xmlns:p="http://schemas.openxmlformats.org/presentationml/2006/main" xmlns:r="http://schemas.openxmlformats.org/officeDocument/2006/relationships">
+<p:sld xmlns:a="http://schemas.openxmlformats.org/drawingml/2006/main" xmlns:r="http://schemas.openxmlformats.org/officeDocument/2006/relationships" xmlns:p="http://schemas.openxmlformats.org/presentationml/2006/main">
   <p:cSld>
     <p:spTree>
       <p:nvGrpSpPr>
@@ -3386,7 +3390,14 @@
         <p:cNvGrpSpPr/>
         <p:nvPr/>
       </p:nvGrpSpPr>
-      <p:grpSpPr/>
+      <p:grpSpPr>
+        <a:xfrm>
+          <a:off x="0" y="0"/>
+          <a:ext cx="0" cy="0"/>
+          <a:chOff x="0" y="0"/>
+          <a:chExt cx="0" cy="0"/>
+        </a:xfrm>
+      </p:grpSpPr>
       <p:sp>
         <p:nvSpPr>
           <p:cNvPr id="2" name="Rectangle 1"/>
@@ -3428,6 +3439,7 @@
           <a:lstStyle/>
           <a:p>
             <a:pPr algn="ctr"/>
+            <a:endParaRPr/>
           </a:p>
         </p:txBody>
       </p:sp>
@@ -3542,6 +3554,7 @@
           <a:lstStyle/>
           <a:p>
             <a:pPr algn="ctr"/>
+            <a:endParaRPr/>
           </a:p>
         </p:txBody>
       </p:sp>
@@ -3848,6 +3861,7 @@
           <a:lstStyle/>
           <a:p>
             <a:pPr algn="ctr"/>
+            <a:endParaRPr/>
           </a:p>
         </p:txBody>
       </p:sp>
@@ -3965,7 +3979,7 @@
 </file>
 
 <file path=ppt/slides/slide11.xml><?xml version="1.0" encoding="utf-8"?>
-<p:sld xmlns:a="http://schemas.openxmlformats.org/drawingml/2006/main" xmlns:p="http://schemas.openxmlformats.org/presentationml/2006/main" xmlns:r="http://schemas.openxmlformats.org/officeDocument/2006/relationships">
+<p:sld xmlns:a="http://schemas.openxmlformats.org/drawingml/2006/main" xmlns:r="http://schemas.openxmlformats.org/officeDocument/2006/relationships" xmlns:p="http://schemas.openxmlformats.org/presentationml/2006/main">
   <p:cSld>
     <p:spTree>
       <p:nvGrpSpPr>
@@ -3973,7 +3987,14 @@
         <p:cNvGrpSpPr/>
         <p:nvPr/>
       </p:nvGrpSpPr>
-      <p:grpSpPr/>
+      <p:grpSpPr>
+        <a:xfrm>
+          <a:off x="0" y="0"/>
+          <a:ext cx="0" cy="0"/>
+          <a:chOff x="0" y="0"/>
+          <a:chExt cx="0" cy="0"/>
+        </a:xfrm>
+      </p:grpSpPr>
       <p:sp>
         <p:nvSpPr>
           <p:cNvPr id="2" name="Rectangle 1"/>
@@ -4015,6 +4036,7 @@
           <a:lstStyle/>
           <a:p>
             <a:pPr algn="ctr"/>
+            <a:endParaRPr/>
           </a:p>
         </p:txBody>
       </p:sp>
@@ -4129,6 +4151,7 @@
           <a:lstStyle/>
           <a:p>
             <a:pPr algn="ctr"/>
+            <a:endParaRPr/>
           </a:p>
         </p:txBody>
       </p:sp>
@@ -4322,7 +4345,7 @@
 </file>
 
 <file path=ppt/slides/slide12.xml><?xml version="1.0" encoding="utf-8"?>
-<p:sld xmlns:a="http://schemas.openxmlformats.org/drawingml/2006/main" xmlns:p="http://schemas.openxmlformats.org/presentationml/2006/main" xmlns:r="http://schemas.openxmlformats.org/officeDocument/2006/relationships">
+<p:sld xmlns:a="http://schemas.openxmlformats.org/drawingml/2006/main" xmlns:r="http://schemas.openxmlformats.org/officeDocument/2006/relationships" xmlns:p="http://schemas.openxmlformats.org/presentationml/2006/main">
   <p:cSld>
     <p:spTree>
       <p:nvGrpSpPr>
@@ -4330,7 +4353,14 @@
         <p:cNvGrpSpPr/>
         <p:nvPr/>
       </p:nvGrpSpPr>
-      <p:grpSpPr/>
+      <p:grpSpPr>
+        <a:xfrm>
+          <a:off x="0" y="0"/>
+          <a:ext cx="0" cy="0"/>
+          <a:chOff x="0" y="0"/>
+          <a:chExt cx="0" cy="0"/>
+        </a:xfrm>
+      </p:grpSpPr>
       <p:sp>
         <p:nvSpPr>
           <p:cNvPr id="2" name="Rectangle 1"/>
@@ -4372,6 +4402,7 @@
           <a:lstStyle/>
           <a:p>
             <a:pPr algn="ctr"/>
+            <a:endParaRPr/>
           </a:p>
         </p:txBody>
       </p:sp>
@@ -4486,6 +4517,7 @@
           <a:lstStyle/>
           <a:p>
             <a:pPr algn="ctr"/>
+            <a:endParaRPr/>
           </a:p>
         </p:txBody>
       </p:sp>
@@ -4679,7 +4711,7 @@
 </file>
 
 <file path=ppt/slides/slide13.xml><?xml version="1.0" encoding="utf-8"?>
-<p:sld xmlns:a="http://schemas.openxmlformats.org/drawingml/2006/main" xmlns:p="http://schemas.openxmlformats.org/presentationml/2006/main" xmlns:r="http://schemas.openxmlformats.org/officeDocument/2006/relationships">
+<p:sld xmlns:a="http://schemas.openxmlformats.org/drawingml/2006/main" xmlns:r="http://schemas.openxmlformats.org/officeDocument/2006/relationships" xmlns:p="http://schemas.openxmlformats.org/presentationml/2006/main">
   <p:cSld>
     <p:spTree>
       <p:nvGrpSpPr>
@@ -4687,7 +4719,14 @@
         <p:cNvGrpSpPr/>
         <p:nvPr/>
       </p:nvGrpSpPr>
-      <p:grpSpPr/>
+      <p:grpSpPr>
+        <a:xfrm>
+          <a:off x="0" y="0"/>
+          <a:ext cx="0" cy="0"/>
+          <a:chOff x="0" y="0"/>
+          <a:chExt cx="0" cy="0"/>
+        </a:xfrm>
+      </p:grpSpPr>
       <p:sp>
         <p:nvSpPr>
           <p:cNvPr id="2" name="Rectangle 1"/>
@@ -4729,6 +4768,7 @@
           <a:lstStyle/>
           <a:p>
             <a:pPr algn="ctr"/>
+            <a:endParaRPr/>
           </a:p>
         </p:txBody>
       </p:sp>
@@ -4843,6 +4883,7 @@
           <a:lstStyle/>
           <a:p>
             <a:pPr algn="ctr"/>
+            <a:endParaRPr/>
           </a:p>
         </p:txBody>
       </p:sp>
@@ -4922,6 +4963,7 @@
           <a:lstStyle/>
           <a:p>
             <a:pPr algn="ctr"/>
+            <a:endParaRPr/>
           </a:p>
         </p:txBody>
       </p:sp>
@@ -5036,6 +5078,7 @@
           <a:lstStyle/>
           <a:p>
             <a:pPr algn="ctr"/>
+            <a:endParaRPr/>
           </a:p>
         </p:txBody>
       </p:sp>
@@ -5150,6 +5193,7 @@
           <a:lstStyle/>
           <a:p>
             <a:pPr algn="ctr"/>
+            <a:endParaRPr/>
           </a:p>
         </p:txBody>
       </p:sp>
@@ -5264,6 +5308,7 @@
           <a:lstStyle/>
           <a:p>
             <a:pPr algn="ctr"/>
+            <a:endParaRPr/>
           </a:p>
         </p:txBody>
       </p:sp>
@@ -5452,7 +5497,7 @@
 </file>
 
 <file path=ppt/slides/slide14.xml><?xml version="1.0" encoding="utf-8"?>
-<p:sld xmlns:a="http://schemas.openxmlformats.org/drawingml/2006/main" xmlns:p="http://schemas.openxmlformats.org/presentationml/2006/main" xmlns:r="http://schemas.openxmlformats.org/officeDocument/2006/relationships">
+<p:sld xmlns:a="http://schemas.openxmlformats.org/drawingml/2006/main" xmlns:r="http://schemas.openxmlformats.org/officeDocument/2006/relationships" xmlns:p="http://schemas.openxmlformats.org/presentationml/2006/main">
   <p:cSld>
     <p:spTree>
       <p:nvGrpSpPr>
@@ -5460,7 +5505,14 @@
         <p:cNvGrpSpPr/>
         <p:nvPr/>
       </p:nvGrpSpPr>
-      <p:grpSpPr/>
+      <p:grpSpPr>
+        <a:xfrm>
+          <a:off x="0" y="0"/>
+          <a:ext cx="0" cy="0"/>
+          <a:chOff x="0" y="0"/>
+          <a:chExt cx="0" cy="0"/>
+        </a:xfrm>
+      </p:grpSpPr>
       <p:sp>
         <p:nvSpPr>
           <p:cNvPr id="2" name="Rectangle 1"/>
@@ -5502,6 +5554,7 @@
           <a:lstStyle/>
           <a:p>
             <a:pPr algn="ctr"/>
+            <a:endParaRPr/>
           </a:p>
         </p:txBody>
       </p:sp>
@@ -5616,6 +5669,7 @@
           <a:lstStyle/>
           <a:p>
             <a:pPr algn="ctr"/>
+            <a:endParaRPr/>
           </a:p>
         </p:txBody>
       </p:sp>
@@ -5809,7 +5863,7 @@
 </file>
 
 <file path=ppt/slides/slide15.xml><?xml version="1.0" encoding="utf-8"?>
-<p:sld xmlns:a="http://schemas.openxmlformats.org/drawingml/2006/main" xmlns:p="http://schemas.openxmlformats.org/presentationml/2006/main" xmlns:r="http://schemas.openxmlformats.org/officeDocument/2006/relationships">
+<p:sld xmlns:a="http://schemas.openxmlformats.org/drawingml/2006/main" xmlns:r="http://schemas.openxmlformats.org/officeDocument/2006/relationships" xmlns:p="http://schemas.openxmlformats.org/presentationml/2006/main">
   <p:cSld>
     <p:spTree>
       <p:nvGrpSpPr>
@@ -5817,7 +5871,14 @@
         <p:cNvGrpSpPr/>
         <p:nvPr/>
       </p:nvGrpSpPr>
-      <p:grpSpPr/>
+      <p:grpSpPr>
+        <a:xfrm>
+          <a:off x="0" y="0"/>
+          <a:ext cx="0" cy="0"/>
+          <a:chOff x="0" y="0"/>
+          <a:chExt cx="0" cy="0"/>
+        </a:xfrm>
+      </p:grpSpPr>
       <p:sp>
         <p:nvSpPr>
           <p:cNvPr id="2" name="Rectangle 1"/>
@@ -5859,6 +5920,7 @@
           <a:lstStyle/>
           <a:p>
             <a:pPr algn="ctr"/>
+            <a:endParaRPr/>
           </a:p>
         </p:txBody>
       </p:sp>
@@ -5973,6 +6035,7 @@
           <a:lstStyle/>
           <a:p>
             <a:pPr algn="ctr"/>
+            <a:endParaRPr/>
           </a:p>
         </p:txBody>
       </p:sp>
@@ -6122,6 +6185,7 @@
           <a:lstStyle/>
           <a:p>
             <a:pPr algn="ctr"/>
+            <a:endParaRPr/>
           </a:p>
         </p:txBody>
       </p:sp>
@@ -6201,6 +6265,7 @@
           <a:lstStyle/>
           <a:p>
             <a:pPr algn="ctr"/>
+            <a:endParaRPr/>
           </a:p>
         </p:txBody>
       </p:sp>
@@ -6280,6 +6345,7 @@
           <a:lstStyle/>
           <a:p>
             <a:pPr algn="ctr"/>
+            <a:endParaRPr/>
           </a:p>
         </p:txBody>
       </p:sp>
@@ -6359,6 +6425,7 @@
           <a:lstStyle/>
           <a:p>
             <a:pPr algn="ctr"/>
+            <a:endParaRPr/>
           </a:p>
         </p:txBody>
       </p:sp>
@@ -6438,6 +6505,7 @@
           <a:lstStyle/>
           <a:p>
             <a:pPr algn="ctr"/>
+            <a:endParaRPr/>
           </a:p>
         </p:txBody>
       </p:sp>
@@ -6555,7 +6623,7 @@
 </file>
 
 <file path=ppt/slides/slide16.xml><?xml version="1.0" encoding="utf-8"?>
-<p:sld xmlns:a="http://schemas.openxmlformats.org/drawingml/2006/main" xmlns:p="http://schemas.openxmlformats.org/presentationml/2006/main" xmlns:r="http://schemas.openxmlformats.org/officeDocument/2006/relationships">
+<p:sld xmlns:a="http://schemas.openxmlformats.org/drawingml/2006/main" xmlns:r="http://schemas.openxmlformats.org/officeDocument/2006/relationships" xmlns:p="http://schemas.openxmlformats.org/presentationml/2006/main">
   <p:cSld>
     <p:spTree>
       <p:nvGrpSpPr>
@@ -6563,7 +6631,14 @@
         <p:cNvGrpSpPr/>
         <p:nvPr/>
       </p:nvGrpSpPr>
-      <p:grpSpPr/>
+      <p:grpSpPr>
+        <a:xfrm>
+          <a:off x="0" y="0"/>
+          <a:ext cx="0" cy="0"/>
+          <a:chOff x="0" y="0"/>
+          <a:chExt cx="0" cy="0"/>
+        </a:xfrm>
+      </p:grpSpPr>
       <p:sp>
         <p:nvSpPr>
           <p:cNvPr id="2" name="Rectangle 1"/>
@@ -6605,6 +6680,7 @@
           <a:lstStyle/>
           <a:p>
             <a:pPr algn="ctr"/>
+            <a:endParaRPr/>
           </a:p>
         </p:txBody>
       </p:sp>
@@ -6719,6 +6795,7 @@
           <a:lstStyle/>
           <a:p>
             <a:pPr algn="ctr"/>
+            <a:endParaRPr/>
           </a:p>
         </p:txBody>
       </p:sp>
@@ -6974,7 +7051,7 @@
 </file>
 
 <file path=ppt/slides/slide17.xml><?xml version="1.0" encoding="utf-8"?>
-<p:sld xmlns:a="http://schemas.openxmlformats.org/drawingml/2006/main" xmlns:p="http://schemas.openxmlformats.org/presentationml/2006/main" xmlns:r="http://schemas.openxmlformats.org/officeDocument/2006/relationships">
+<p:sld xmlns:a="http://schemas.openxmlformats.org/drawingml/2006/main" xmlns:r="http://schemas.openxmlformats.org/officeDocument/2006/relationships" xmlns:p="http://schemas.openxmlformats.org/presentationml/2006/main">
   <p:cSld>
     <p:spTree>
       <p:nvGrpSpPr>
@@ -6982,7 +7059,14 @@
         <p:cNvGrpSpPr/>
         <p:nvPr/>
       </p:nvGrpSpPr>
-      <p:grpSpPr/>
+      <p:grpSpPr>
+        <a:xfrm>
+          <a:off x="0" y="0"/>
+          <a:ext cx="0" cy="0"/>
+          <a:chOff x="0" y="0"/>
+          <a:chExt cx="0" cy="0"/>
+        </a:xfrm>
+      </p:grpSpPr>
       <p:sp>
         <p:nvSpPr>
           <p:cNvPr id="2" name="Rectangle 1"/>
@@ -7024,6 +7108,7 @@
           <a:lstStyle/>
           <a:p>
             <a:pPr algn="ctr"/>
+            <a:endParaRPr/>
           </a:p>
         </p:txBody>
       </p:sp>
@@ -7138,6 +7223,7 @@
           <a:lstStyle/>
           <a:p>
             <a:pPr algn="ctr"/>
+            <a:endParaRPr/>
           </a:p>
         </p:txBody>
       </p:sp>
@@ -7184,6 +7270,7 @@
           <a:lstStyle/>
           <a:p>
             <a:pPr algn="ctr"/>
+            <a:endParaRPr/>
           </a:p>
         </p:txBody>
       </p:sp>
@@ -7300,6 +7387,7 @@
           <a:lstStyle/>
           <a:p>
             <a:pPr algn="ctr"/>
+            <a:endParaRPr/>
           </a:p>
         </p:txBody>
       </p:sp>
@@ -7452,7 +7540,7 @@
 </file>
 
 <file path=ppt/slides/slide18.xml><?xml version="1.0" encoding="utf-8"?>
-<p:sld xmlns:a="http://schemas.openxmlformats.org/drawingml/2006/main" xmlns:p="http://schemas.openxmlformats.org/presentationml/2006/main" xmlns:r="http://schemas.openxmlformats.org/officeDocument/2006/relationships">
+<p:sld xmlns:a="http://schemas.openxmlformats.org/drawingml/2006/main" xmlns:r="http://schemas.openxmlformats.org/officeDocument/2006/relationships" xmlns:p="http://schemas.openxmlformats.org/presentationml/2006/main">
   <p:cSld>
     <p:spTree>
       <p:nvGrpSpPr>
@@ -7460,7 +7548,14 @@
         <p:cNvGrpSpPr/>
         <p:nvPr/>
       </p:nvGrpSpPr>
-      <p:grpSpPr/>
+      <p:grpSpPr>
+        <a:xfrm>
+          <a:off x="0" y="0"/>
+          <a:ext cx="0" cy="0"/>
+          <a:chOff x="0" y="0"/>
+          <a:chExt cx="0" cy="0"/>
+        </a:xfrm>
+      </p:grpSpPr>
       <p:sp>
         <p:nvSpPr>
           <p:cNvPr id="2" name="Rectangle 1"/>
@@ -7502,6 +7597,7 @@
           <a:lstStyle/>
           <a:p>
             <a:pPr algn="ctr"/>
+            <a:endParaRPr/>
           </a:p>
         </p:txBody>
       </p:sp>
@@ -7616,6 +7712,7 @@
           <a:lstStyle/>
           <a:p>
             <a:pPr algn="ctr"/>
+            <a:endParaRPr/>
           </a:p>
         </p:txBody>
       </p:sp>
@@ -7662,6 +7759,7 @@
           <a:lstStyle/>
           <a:p>
             <a:pPr algn="ctr"/>
+            <a:endParaRPr/>
           </a:p>
         </p:txBody>
       </p:sp>
@@ -7790,6 +7888,7 @@
           <a:lstStyle/>
           <a:p>
             <a:pPr algn="ctr"/>
+            <a:endParaRPr/>
           </a:p>
         </p:txBody>
       </p:sp>
@@ -7918,6 +8017,7 @@
           <a:lstStyle/>
           <a:p>
             <a:pPr algn="ctr"/>
+            <a:endParaRPr/>
           </a:p>
         </p:txBody>
       </p:sp>
@@ -8034,6 +8134,7 @@
           <a:lstStyle/>
           <a:p>
             <a:pPr algn="ctr"/>
+            <a:endParaRPr/>
           </a:p>
         </p:txBody>
       </p:sp>
@@ -8162,6 +8263,7 @@
           <a:lstStyle/>
           <a:p>
             <a:pPr algn="ctr"/>
+            <a:endParaRPr/>
           </a:p>
         </p:txBody>
       </p:sp>
@@ -8371,7 +8473,7 @@
 </file>
 
 <file path=ppt/slides/slide19.xml><?xml version="1.0" encoding="utf-8"?>
-<p:sld xmlns:a="http://schemas.openxmlformats.org/drawingml/2006/main" xmlns:p="http://schemas.openxmlformats.org/presentationml/2006/main" xmlns:r="http://schemas.openxmlformats.org/officeDocument/2006/relationships">
+<p:sld xmlns:a="http://schemas.openxmlformats.org/drawingml/2006/main" xmlns:r="http://schemas.openxmlformats.org/officeDocument/2006/relationships" xmlns:p="http://schemas.openxmlformats.org/presentationml/2006/main">
   <p:cSld>
     <p:spTree>
       <p:nvGrpSpPr>
@@ -8379,7 +8481,14 @@
         <p:cNvGrpSpPr/>
         <p:nvPr/>
       </p:nvGrpSpPr>
-      <p:grpSpPr/>
+      <p:grpSpPr>
+        <a:xfrm>
+          <a:off x="0" y="0"/>
+          <a:ext cx="0" cy="0"/>
+          <a:chOff x="0" y="0"/>
+          <a:chExt cx="0" cy="0"/>
+        </a:xfrm>
+      </p:grpSpPr>
       <p:sp>
         <p:nvSpPr>
           <p:cNvPr id="2" name="Rectangle 1"/>
@@ -8421,6 +8530,7 @@
           <a:lstStyle/>
           <a:p>
             <a:pPr algn="ctr"/>
+            <a:endParaRPr/>
           </a:p>
         </p:txBody>
       </p:sp>
@@ -8490,85 +8600,6 @@
                 <a:latin typeface="Calibri"/>
               </a:rPr>
               <a:t>Boon Academy Intervention Command Center</a:t>
-            </a:r>
-          </a:p>
-        </p:txBody>
-      </p:sp>
-      <p:sp>
-        <p:nvSpPr>
-          <p:cNvPr id="5" name="Rectangle 4"/>
-          <p:cNvSpPr/>
-          <p:nvPr/>
-        </p:nvSpPr>
-        <p:spPr>
-          <a:xfrm>
-            <a:off x="502920" y="4023360"/>
-            <a:ext cx="640080" cy="50800"/>
-          </a:xfrm>
-          <a:prstGeom prst="rect">
-            <a:avLst/>
-          </a:prstGeom>
-          <a:solidFill>
-            <a:srgbClr val="3987E5"/>
-          </a:solidFill>
-          <a:ln>
-            <a:noFill/>
-          </a:ln>
-          <a:effectLst/>
-        </p:spPr>
-        <p:style>
-          <a:lnRef idx="1">
-            <a:schemeClr val="accent1"/>
-          </a:lnRef>
-          <a:fillRef idx="3">
-            <a:schemeClr val="accent1"/>
-          </a:fillRef>
-          <a:effectRef idx="2">
-            <a:schemeClr val="accent1"/>
-          </a:effectRef>
-          <a:fontRef idx="minor">
-            <a:schemeClr val="lt1"/>
-          </a:fontRef>
-        </p:style>
-        <p:txBody>
-          <a:bodyPr rtlCol="0" anchor="ctr"/>
-          <a:lstStyle/>
-          <a:p>
-            <a:pPr algn="ctr"/>
-          </a:p>
-        </p:txBody>
-      </p:sp>
-      <p:sp>
-        <p:nvSpPr>
-          <p:cNvPr id="6" name="TextBox 5"/>
-          <p:cNvSpPr txBox="1"/>
-          <p:nvPr/>
-        </p:nvSpPr>
-        <p:spPr>
-          <a:xfrm>
-            <a:off x="502920" y="4206240"/>
-            <a:ext cx="9144000" cy="457200"/>
-          </a:xfrm>
-          <a:prstGeom prst="rect">
-            <a:avLst/>
-          </a:prstGeom>
-          <a:noFill/>
-        </p:spPr>
-        <p:txBody>
-          <a:bodyPr wrap="square" anchor="t">
-            <a:spAutoFit/>
-          </a:bodyPr>
-          <a:lstStyle/>
-          <a:p>
-            <a:pPr algn="l"/>
-            <a:r>
-              <a:rPr sz="1300" b="0" i="0">
-                <a:solidFill>
-                  <a:srgbClr val="7C8E86"/>
-                </a:solidFill>
-                <a:latin typeface="Consolas"/>
-              </a:rPr>
-              <a:t>docs/USER_MANUAL.docx  ·  docs/CODE_DOCUMENTATION.docx  ·  docs/ARCHITECTURE_DIAGRAM.docx</a:t>
             </a:r>
           </a:p>
         </p:txBody>
@@ -8582,7 +8613,7 @@
 </file>
 
 <file path=ppt/slides/slide2.xml><?xml version="1.0" encoding="utf-8"?>
-<p:sld xmlns:a="http://schemas.openxmlformats.org/drawingml/2006/main" xmlns:p="http://schemas.openxmlformats.org/presentationml/2006/main" xmlns:r="http://schemas.openxmlformats.org/officeDocument/2006/relationships">
+<p:sld xmlns:a="http://schemas.openxmlformats.org/drawingml/2006/main" xmlns:r="http://schemas.openxmlformats.org/officeDocument/2006/relationships" xmlns:p="http://schemas.openxmlformats.org/presentationml/2006/main">
   <p:cSld>
     <p:spTree>
       <p:nvGrpSpPr>
@@ -8590,7 +8621,14 @@
         <p:cNvGrpSpPr/>
         <p:nvPr/>
       </p:nvGrpSpPr>
-      <p:grpSpPr/>
+      <p:grpSpPr>
+        <a:xfrm>
+          <a:off x="0" y="0"/>
+          <a:ext cx="0" cy="0"/>
+          <a:chOff x="0" y="0"/>
+          <a:chExt cx="0" cy="0"/>
+        </a:xfrm>
+      </p:grpSpPr>
       <p:sp>
         <p:nvSpPr>
           <p:cNvPr id="2" name="Rectangle 1"/>
@@ -8632,6 +8670,7 @@
           <a:lstStyle/>
           <a:p>
             <a:pPr algn="ctr"/>
+            <a:endParaRPr/>
           </a:p>
         </p:txBody>
       </p:sp>
@@ -8746,6 +8785,7 @@
           <a:lstStyle/>
           <a:p>
             <a:pPr algn="ctr"/>
+            <a:endParaRPr/>
           </a:p>
         </p:txBody>
       </p:sp>
@@ -8897,6 +8937,7 @@
           <a:lstStyle/>
           <a:p>
             <a:pPr algn="ctr"/>
+            <a:endParaRPr/>
           </a:p>
         </p:txBody>
       </p:sp>
@@ -8941,6 +8982,7 @@
           <a:lstStyle/>
           <a:p>
             <a:pPr algn="ctr"/>
+            <a:endParaRPr/>
           </a:p>
         </p:txBody>
       </p:sp>
@@ -9057,6 +9099,7 @@
           <a:lstStyle/>
           <a:p>
             <a:pPr algn="ctr"/>
+            <a:endParaRPr/>
           </a:p>
         </p:txBody>
       </p:sp>
@@ -9101,6 +9144,7 @@
           <a:lstStyle/>
           <a:p>
             <a:pPr algn="ctr"/>
+            <a:endParaRPr/>
           </a:p>
         </p:txBody>
       </p:sp>
@@ -9217,6 +9261,7 @@
           <a:lstStyle/>
           <a:p>
             <a:pPr algn="ctr"/>
+            <a:endParaRPr/>
           </a:p>
         </p:txBody>
       </p:sp>
@@ -9261,6 +9306,7 @@
           <a:lstStyle/>
           <a:p>
             <a:pPr algn="ctr"/>
+            <a:endParaRPr/>
           </a:p>
         </p:txBody>
       </p:sp>
@@ -9413,7 +9459,7 @@
 </file>
 
 <file path=ppt/slides/slide3.xml><?xml version="1.0" encoding="utf-8"?>
-<p:sld xmlns:a="http://schemas.openxmlformats.org/drawingml/2006/main" xmlns:p="http://schemas.openxmlformats.org/presentationml/2006/main" xmlns:r="http://schemas.openxmlformats.org/officeDocument/2006/relationships">
+<p:sld xmlns:a="http://schemas.openxmlformats.org/drawingml/2006/main" xmlns:r="http://schemas.openxmlformats.org/officeDocument/2006/relationships" xmlns:p="http://schemas.openxmlformats.org/presentationml/2006/main">
   <p:cSld>
     <p:spTree>
       <p:nvGrpSpPr>
@@ -9421,7 +9467,14 @@
         <p:cNvGrpSpPr/>
         <p:nvPr/>
       </p:nvGrpSpPr>
-      <p:grpSpPr/>
+      <p:grpSpPr>
+        <a:xfrm>
+          <a:off x="0" y="0"/>
+          <a:ext cx="0" cy="0"/>
+          <a:chOff x="0" y="0"/>
+          <a:chExt cx="0" cy="0"/>
+        </a:xfrm>
+      </p:grpSpPr>
       <p:sp>
         <p:nvSpPr>
           <p:cNvPr id="2" name="Rectangle 1"/>
@@ -9463,6 +9516,7 @@
           <a:lstStyle/>
           <a:p>
             <a:pPr algn="ctr"/>
+            <a:endParaRPr/>
           </a:p>
         </p:txBody>
       </p:sp>
@@ -9577,6 +9631,7 @@
           <a:lstStyle/>
           <a:p>
             <a:pPr algn="ctr"/>
+            <a:endParaRPr/>
           </a:p>
         </p:txBody>
       </p:sp>
@@ -9623,6 +9678,7 @@
           <a:lstStyle/>
           <a:p>
             <a:pPr algn="ctr"/>
+            <a:endParaRPr/>
           </a:p>
         </p:txBody>
       </p:sp>
@@ -9667,6 +9723,7 @@
           <a:lstStyle/>
           <a:p>
             <a:pPr algn="ctr"/>
+            <a:endParaRPr/>
           </a:p>
         </p:txBody>
       </p:sp>
@@ -9783,6 +9840,7 @@
           <a:lstStyle/>
           <a:p>
             <a:pPr algn="ctr"/>
+            <a:endParaRPr/>
           </a:p>
         </p:txBody>
       </p:sp>
@@ -9827,6 +9885,7 @@
           <a:lstStyle/>
           <a:p>
             <a:pPr algn="ctr"/>
+            <a:endParaRPr/>
           </a:p>
         </p:txBody>
       </p:sp>
@@ -9943,6 +10002,7 @@
           <a:lstStyle/>
           <a:p>
             <a:pPr algn="ctr"/>
+            <a:endParaRPr/>
           </a:p>
         </p:txBody>
       </p:sp>
@@ -9987,6 +10047,7 @@
           <a:lstStyle/>
           <a:p>
             <a:pPr algn="ctr"/>
+            <a:endParaRPr/>
           </a:p>
         </p:txBody>
       </p:sp>
@@ -10103,6 +10164,7 @@
           <a:lstStyle/>
           <a:p>
             <a:pPr algn="ctr"/>
+            <a:endParaRPr/>
           </a:p>
         </p:txBody>
       </p:sp>
@@ -10147,6 +10209,7 @@
           <a:lstStyle/>
           <a:p>
             <a:pPr algn="ctr"/>
+            <a:endParaRPr/>
           </a:p>
         </p:txBody>
       </p:sp>
@@ -10263,6 +10326,7 @@
           <a:lstStyle/>
           <a:p>
             <a:pPr algn="ctr"/>
+            <a:endParaRPr/>
           </a:p>
         </p:txBody>
       </p:sp>
@@ -10307,6 +10371,7 @@
           <a:lstStyle/>
           <a:p>
             <a:pPr algn="ctr"/>
+            <a:endParaRPr/>
           </a:p>
         </p:txBody>
       </p:sp>
@@ -10435,6 +10500,7 @@
           <a:lstStyle/>
           <a:p>
             <a:pPr algn="ctr"/>
+            <a:endParaRPr/>
           </a:p>
         </p:txBody>
       </p:sp>
@@ -10479,6 +10545,7 @@
           <a:lstStyle/>
           <a:p>
             <a:pPr algn="ctr"/>
+            <a:endParaRPr/>
           </a:p>
         </p:txBody>
       </p:sp>
@@ -10678,7 +10745,7 @@
 </file>
 
 <file path=ppt/slides/slide4.xml><?xml version="1.0" encoding="utf-8"?>
-<p:sld xmlns:a="http://schemas.openxmlformats.org/drawingml/2006/main" xmlns:p="http://schemas.openxmlformats.org/presentationml/2006/main" xmlns:r="http://schemas.openxmlformats.org/officeDocument/2006/relationships">
+<p:sld xmlns:a="http://schemas.openxmlformats.org/drawingml/2006/main" xmlns:r="http://schemas.openxmlformats.org/officeDocument/2006/relationships" xmlns:p="http://schemas.openxmlformats.org/presentationml/2006/main">
   <p:cSld>
     <p:spTree>
       <p:nvGrpSpPr>
@@ -10686,7 +10753,14 @@
         <p:cNvGrpSpPr/>
         <p:nvPr/>
       </p:nvGrpSpPr>
-      <p:grpSpPr/>
+      <p:grpSpPr>
+        <a:xfrm>
+          <a:off x="0" y="0"/>
+          <a:ext cx="0" cy="0"/>
+          <a:chOff x="0" y="0"/>
+          <a:chExt cx="0" cy="0"/>
+        </a:xfrm>
+      </p:grpSpPr>
       <p:sp>
         <p:nvSpPr>
           <p:cNvPr id="2" name="Rectangle 1"/>
@@ -10728,6 +10802,7 @@
           <a:lstStyle/>
           <a:p>
             <a:pPr algn="ctr"/>
+            <a:endParaRPr/>
           </a:p>
         </p:txBody>
       </p:sp>
@@ -10842,6 +10917,7 @@
           <a:lstStyle/>
           <a:p>
             <a:pPr algn="ctr"/>
+            <a:endParaRPr/>
           </a:p>
         </p:txBody>
       </p:sp>
@@ -10888,6 +10964,7 @@
           <a:lstStyle/>
           <a:p>
             <a:pPr algn="ctr"/>
+            <a:endParaRPr/>
           </a:p>
         </p:txBody>
       </p:sp>
@@ -11004,6 +11081,7 @@
           <a:lstStyle/>
           <a:p>
             <a:pPr algn="ctr"/>
+            <a:endParaRPr/>
           </a:p>
         </p:txBody>
       </p:sp>
@@ -11120,6 +11198,7 @@
           <a:lstStyle/>
           <a:p>
             <a:pPr algn="ctr"/>
+            <a:endParaRPr/>
           </a:p>
         </p:txBody>
       </p:sp>
@@ -11236,6 +11315,7 @@
           <a:lstStyle/>
           <a:p>
             <a:pPr algn="ctr"/>
+            <a:endParaRPr/>
           </a:p>
         </p:txBody>
       </p:sp>
@@ -11352,6 +11432,7 @@
           <a:lstStyle/>
           <a:p>
             <a:pPr algn="ctr"/>
+            <a:endParaRPr/>
           </a:p>
         </p:txBody>
       </p:sp>
@@ -11480,6 +11561,7 @@
           <a:lstStyle/>
           <a:p>
             <a:pPr algn="ctr"/>
+            <a:endParaRPr/>
           </a:p>
         </p:txBody>
       </p:sp>
@@ -11608,6 +11690,7 @@
           <a:lstStyle/>
           <a:p>
             <a:pPr algn="ctr"/>
+            <a:endParaRPr/>
           </a:p>
         </p:txBody>
       </p:sp>
@@ -11808,7 +11891,7 @@
 </file>
 
 <file path=ppt/slides/slide5.xml><?xml version="1.0" encoding="utf-8"?>
-<p:sld xmlns:a="http://schemas.openxmlformats.org/drawingml/2006/main" xmlns:p="http://schemas.openxmlformats.org/presentationml/2006/main" xmlns:r="http://schemas.openxmlformats.org/officeDocument/2006/relationships">
+<p:sld xmlns:a="http://schemas.openxmlformats.org/drawingml/2006/main" xmlns:r="http://schemas.openxmlformats.org/officeDocument/2006/relationships" xmlns:p="http://schemas.openxmlformats.org/presentationml/2006/main">
   <p:cSld>
     <p:spTree>
       <p:nvGrpSpPr>
@@ -11816,7 +11899,14 @@
         <p:cNvGrpSpPr/>
         <p:nvPr/>
       </p:nvGrpSpPr>
-      <p:grpSpPr/>
+      <p:grpSpPr>
+        <a:xfrm>
+          <a:off x="0" y="0"/>
+          <a:ext cx="0" cy="0"/>
+          <a:chOff x="0" y="0"/>
+          <a:chExt cx="0" cy="0"/>
+        </a:xfrm>
+      </p:grpSpPr>
       <p:sp>
         <p:nvSpPr>
           <p:cNvPr id="2" name="Rectangle 1"/>
@@ -11858,6 +11948,7 @@
           <a:lstStyle/>
           <a:p>
             <a:pPr algn="ctr"/>
+            <a:endParaRPr/>
           </a:p>
         </p:txBody>
       </p:sp>
@@ -11972,6 +12063,7 @@
           <a:lstStyle/>
           <a:p>
             <a:pPr algn="ctr"/>
+            <a:endParaRPr/>
           </a:p>
         </p:txBody>
       </p:sp>
@@ -12078,7 +12170,7 @@
 </file>
 
 <file path=ppt/slides/slide6.xml><?xml version="1.0" encoding="utf-8"?>
-<p:sld xmlns:a="http://schemas.openxmlformats.org/drawingml/2006/main" xmlns:p="http://schemas.openxmlformats.org/presentationml/2006/main" xmlns:r="http://schemas.openxmlformats.org/officeDocument/2006/relationships">
+<p:sld xmlns:a="http://schemas.openxmlformats.org/drawingml/2006/main" xmlns:r="http://schemas.openxmlformats.org/officeDocument/2006/relationships" xmlns:p="http://schemas.openxmlformats.org/presentationml/2006/main">
   <p:cSld>
     <p:spTree>
       <p:nvGrpSpPr>
@@ -12086,7 +12178,14 @@
         <p:cNvGrpSpPr/>
         <p:nvPr/>
       </p:nvGrpSpPr>
-      <p:grpSpPr/>
+      <p:grpSpPr>
+        <a:xfrm>
+          <a:off x="0" y="0"/>
+          <a:ext cx="0" cy="0"/>
+          <a:chOff x="0" y="0"/>
+          <a:chExt cx="0" cy="0"/>
+        </a:xfrm>
+      </p:grpSpPr>
       <p:sp>
         <p:nvSpPr>
           <p:cNvPr id="2" name="Rectangle 1"/>
@@ -12128,6 +12227,7 @@
           <a:lstStyle/>
           <a:p>
             <a:pPr algn="ctr"/>
+            <a:endParaRPr/>
           </a:p>
         </p:txBody>
       </p:sp>
@@ -12242,6 +12342,7 @@
           <a:lstStyle/>
           <a:p>
             <a:pPr algn="ctr"/>
+            <a:endParaRPr/>
           </a:p>
         </p:txBody>
       </p:sp>
@@ -12632,7 +12733,7 @@
 </file>
 
 <file path=ppt/slides/slide7.xml><?xml version="1.0" encoding="utf-8"?>
-<p:sld xmlns:a="http://schemas.openxmlformats.org/drawingml/2006/main" xmlns:p="http://schemas.openxmlformats.org/presentationml/2006/main" xmlns:r="http://schemas.openxmlformats.org/officeDocument/2006/relationships">
+<p:sld xmlns:a="http://schemas.openxmlformats.org/drawingml/2006/main" xmlns:r="http://schemas.openxmlformats.org/officeDocument/2006/relationships" xmlns:p="http://schemas.openxmlformats.org/presentationml/2006/main">
   <p:cSld>
     <p:spTree>
       <p:nvGrpSpPr>
@@ -12640,7 +12741,14 @@
         <p:cNvGrpSpPr/>
         <p:nvPr/>
       </p:nvGrpSpPr>
-      <p:grpSpPr/>
+      <p:grpSpPr>
+        <a:xfrm>
+          <a:off x="0" y="0"/>
+          <a:ext cx="0" cy="0"/>
+          <a:chOff x="0" y="0"/>
+          <a:chExt cx="0" cy="0"/>
+        </a:xfrm>
+      </p:grpSpPr>
       <p:sp>
         <p:nvSpPr>
           <p:cNvPr id="2" name="Rectangle 1"/>
@@ -12682,6 +12790,7 @@
           <a:lstStyle/>
           <a:p>
             <a:pPr algn="ctr"/>
+            <a:endParaRPr/>
           </a:p>
         </p:txBody>
       </p:sp>
@@ -12796,6 +12905,7 @@
           <a:lstStyle/>
           <a:p>
             <a:pPr algn="ctr"/>
+            <a:endParaRPr/>
           </a:p>
         </p:txBody>
       </p:sp>
@@ -12875,6 +12985,7 @@
           <a:lstStyle/>
           <a:p>
             <a:pPr algn="ctr"/>
+            <a:endParaRPr/>
           </a:p>
         </p:txBody>
       </p:sp>
@@ -13024,6 +13135,7 @@
           <a:lstStyle/>
           <a:p>
             <a:pPr algn="ctr"/>
+            <a:endParaRPr/>
           </a:p>
         </p:txBody>
       </p:sp>
@@ -13173,6 +13285,7 @@
           <a:lstStyle/>
           <a:p>
             <a:pPr algn="ctr"/>
+            <a:endParaRPr/>
           </a:p>
         </p:txBody>
       </p:sp>
@@ -13322,6 +13435,7 @@
           <a:lstStyle/>
           <a:p>
             <a:pPr algn="ctr"/>
+            <a:endParaRPr/>
           </a:p>
         </p:txBody>
       </p:sp>
@@ -13471,6 +13585,7 @@
           <a:lstStyle/>
           <a:p>
             <a:pPr algn="ctr"/>
+            <a:endParaRPr/>
           </a:p>
         </p:txBody>
       </p:sp>
@@ -13620,6 +13735,7 @@
           <a:lstStyle/>
           <a:p>
             <a:pPr algn="ctr"/>
+            <a:endParaRPr/>
           </a:p>
         </p:txBody>
       </p:sp>
@@ -13699,6 +13815,7 @@
           <a:lstStyle/>
           <a:p>
             <a:pPr algn="ctr"/>
+            <a:endParaRPr/>
           </a:p>
         </p:txBody>
       </p:sp>
@@ -13778,6 +13895,7 @@
           <a:lstStyle/>
           <a:p>
             <a:pPr algn="ctr"/>
+            <a:endParaRPr/>
           </a:p>
         </p:txBody>
       </p:sp>
@@ -13857,6 +13975,7 @@
           <a:lstStyle/>
           <a:p>
             <a:pPr algn="ctr"/>
+            <a:endParaRPr/>
           </a:p>
         </p:txBody>
       </p:sp>
@@ -13974,7 +14093,7 @@
 </file>
 
 <file path=ppt/slides/slide8.xml><?xml version="1.0" encoding="utf-8"?>
-<p:sld xmlns:a="http://schemas.openxmlformats.org/drawingml/2006/main" xmlns:p="http://schemas.openxmlformats.org/presentationml/2006/main" xmlns:r="http://schemas.openxmlformats.org/officeDocument/2006/relationships">
+<p:sld xmlns:a="http://schemas.openxmlformats.org/drawingml/2006/main" xmlns:r="http://schemas.openxmlformats.org/officeDocument/2006/relationships" xmlns:p="http://schemas.openxmlformats.org/presentationml/2006/main">
   <p:cSld>
     <p:spTree>
       <p:nvGrpSpPr>
@@ -13982,7 +14101,14 @@
         <p:cNvGrpSpPr/>
         <p:nvPr/>
       </p:nvGrpSpPr>
-      <p:grpSpPr/>
+      <p:grpSpPr>
+        <a:xfrm>
+          <a:off x="0" y="0"/>
+          <a:ext cx="0" cy="0"/>
+          <a:chOff x="0" y="0"/>
+          <a:chExt cx="0" cy="0"/>
+        </a:xfrm>
+      </p:grpSpPr>
       <p:sp>
         <p:nvSpPr>
           <p:cNvPr id="2" name="Rectangle 1"/>
@@ -14024,6 +14150,7 @@
           <a:lstStyle/>
           <a:p>
             <a:pPr algn="ctr"/>
+            <a:endParaRPr/>
           </a:p>
         </p:txBody>
       </p:sp>
@@ -14138,6 +14265,7 @@
           <a:lstStyle/>
           <a:p>
             <a:pPr algn="ctr"/>
+            <a:endParaRPr/>
           </a:p>
         </p:txBody>
       </p:sp>
@@ -14184,6 +14312,7 @@
           <a:lstStyle/>
           <a:p>
             <a:pPr algn="ctr"/>
+            <a:endParaRPr/>
           </a:p>
         </p:txBody>
       </p:sp>
@@ -14228,6 +14357,7 @@
           <a:lstStyle/>
           <a:p>
             <a:pPr algn="ctr"/>
+            <a:endParaRPr/>
           </a:p>
         </p:txBody>
       </p:sp>
@@ -14309,6 +14439,7 @@
           <a:lstStyle/>
           <a:p>
             <a:pPr algn="ctr"/>
+            <a:endParaRPr/>
           </a:p>
         </p:txBody>
       </p:sp>
@@ -14353,6 +14484,7 @@
           <a:lstStyle/>
           <a:p>
             <a:pPr algn="ctr"/>
+            <a:endParaRPr/>
           </a:p>
         </p:txBody>
       </p:sp>
@@ -14434,6 +14566,7 @@
           <a:lstStyle/>
           <a:p>
             <a:pPr algn="ctr"/>
+            <a:endParaRPr/>
           </a:p>
         </p:txBody>
       </p:sp>
@@ -14478,6 +14611,7 @@
           <a:lstStyle/>
           <a:p>
             <a:pPr algn="ctr"/>
+            <a:endParaRPr/>
           </a:p>
         </p:txBody>
       </p:sp>
@@ -14559,6 +14693,7 @@
           <a:lstStyle/>
           <a:p>
             <a:pPr algn="ctr"/>
+            <a:endParaRPr/>
           </a:p>
         </p:txBody>
       </p:sp>
@@ -14603,6 +14738,7 @@
           <a:lstStyle/>
           <a:p>
             <a:pPr algn="ctr"/>
+            <a:endParaRPr/>
           </a:p>
         </p:txBody>
       </p:sp>
@@ -14684,6 +14820,7 @@
           <a:lstStyle/>
           <a:p>
             <a:pPr algn="ctr"/>
+            <a:endParaRPr/>
           </a:p>
         </p:txBody>
       </p:sp>
@@ -14728,6 +14865,7 @@
           <a:lstStyle/>
           <a:p>
             <a:pPr algn="ctr"/>
+            <a:endParaRPr/>
           </a:p>
         </p:txBody>
       </p:sp>
@@ -14809,6 +14947,7 @@
           <a:lstStyle/>
           <a:p>
             <a:pPr algn="ctr"/>
+            <a:endParaRPr/>
           </a:p>
         </p:txBody>
       </p:sp>
@@ -14853,6 +14992,7 @@
           <a:lstStyle/>
           <a:p>
             <a:pPr algn="ctr"/>
+            <a:endParaRPr/>
           </a:p>
         </p:txBody>
       </p:sp>
@@ -14934,6 +15074,7 @@
           <a:lstStyle/>
           <a:p>
             <a:pPr algn="ctr"/>
+            <a:endParaRPr/>
           </a:p>
         </p:txBody>
       </p:sp>
@@ -14978,6 +15119,7 @@
           <a:lstStyle/>
           <a:p>
             <a:pPr algn="ctr"/>
+            <a:endParaRPr/>
           </a:p>
         </p:txBody>
       </p:sp>
@@ -15059,6 +15201,7 @@
           <a:lstStyle/>
           <a:p>
             <a:pPr algn="ctr"/>
+            <a:endParaRPr/>
           </a:p>
         </p:txBody>
       </p:sp>
@@ -15103,6 +15246,7 @@
           <a:lstStyle/>
           <a:p>
             <a:pPr algn="ctr"/>
+            <a:endParaRPr/>
           </a:p>
         </p:txBody>
       </p:sp>
@@ -15184,6 +15328,7 @@
           <a:lstStyle/>
           <a:p>
             <a:pPr algn="ctr"/>
+            <a:endParaRPr/>
           </a:p>
         </p:txBody>
       </p:sp>
@@ -15228,6 +15373,7 @@
           <a:lstStyle/>
           <a:p>
             <a:pPr algn="ctr"/>
+            <a:endParaRPr/>
           </a:p>
         </p:txBody>
       </p:sp>
@@ -15309,6 +15455,7 @@
           <a:lstStyle/>
           <a:p>
             <a:pPr algn="ctr"/>
+            <a:endParaRPr/>
           </a:p>
         </p:txBody>
       </p:sp>
@@ -15353,6 +15500,7 @@
           <a:lstStyle/>
           <a:p>
             <a:pPr algn="ctr"/>
+            <a:endParaRPr/>
           </a:p>
         </p:txBody>
       </p:sp>
@@ -15434,6 +15582,7 @@
           <a:lstStyle/>
           <a:p>
             <a:pPr algn="ctr"/>
+            <a:endParaRPr/>
           </a:p>
         </p:txBody>
       </p:sp>
@@ -15478,6 +15627,7 @@
           <a:lstStyle/>
           <a:p>
             <a:pPr algn="ctr"/>
+            <a:endParaRPr/>
           </a:p>
         </p:txBody>
       </p:sp>
@@ -15559,6 +15709,7 @@
           <a:lstStyle/>
           <a:p>
             <a:pPr algn="ctr"/>
+            <a:endParaRPr/>
           </a:p>
         </p:txBody>
       </p:sp>
@@ -15603,6 +15754,7 @@
           <a:lstStyle/>
           <a:p>
             <a:pPr algn="ctr"/>
+            <a:endParaRPr/>
           </a:p>
         </p:txBody>
       </p:sp>
@@ -15684,6 +15836,7 @@
           <a:lstStyle/>
           <a:p>
             <a:pPr algn="ctr"/>
+            <a:endParaRPr/>
           </a:p>
         </p:txBody>
       </p:sp>
@@ -15728,6 +15881,7 @@
           <a:lstStyle/>
           <a:p>
             <a:pPr algn="ctr"/>
+            <a:endParaRPr/>
           </a:p>
         </p:txBody>
       </p:sp>
@@ -15880,7 +16034,7 @@
 </file>
 
 <file path=ppt/slides/slide9.xml><?xml version="1.0" encoding="utf-8"?>
-<p:sld xmlns:a="http://schemas.openxmlformats.org/drawingml/2006/main" xmlns:p="http://schemas.openxmlformats.org/presentationml/2006/main" xmlns:r="http://schemas.openxmlformats.org/officeDocument/2006/relationships">
+<p:sld xmlns:a="http://schemas.openxmlformats.org/drawingml/2006/main" xmlns:r="http://schemas.openxmlformats.org/officeDocument/2006/relationships" xmlns:p="http://schemas.openxmlformats.org/presentationml/2006/main">
   <p:cSld>
     <p:spTree>
       <p:nvGrpSpPr>
@@ -15888,7 +16042,14 @@
         <p:cNvGrpSpPr/>
         <p:nvPr/>
       </p:nvGrpSpPr>
-      <p:grpSpPr/>
+      <p:grpSpPr>
+        <a:xfrm>
+          <a:off x="0" y="0"/>
+          <a:ext cx="0" cy="0"/>
+          <a:chOff x="0" y="0"/>
+          <a:chExt cx="0" cy="0"/>
+        </a:xfrm>
+      </p:grpSpPr>
       <p:sp>
         <p:nvSpPr>
           <p:cNvPr id="2" name="Rectangle 1"/>
@@ -15930,6 +16091,7 @@
           <a:lstStyle/>
           <a:p>
             <a:pPr algn="ctr"/>
+            <a:endParaRPr/>
           </a:p>
         </p:txBody>
       </p:sp>
@@ -16044,6 +16206,7 @@
           <a:lstStyle/>
           <a:p>
             <a:pPr algn="ctr"/>
+            <a:endParaRPr/>
           </a:p>
         </p:txBody>
       </p:sp>

--- a/docs/BOON_ACADEMY_OVERVIEW.pptx
+++ b/docs/BOON_ACADEMY_OVERVIEW.pptx
@@ -19,6 +19,9 @@
     <p:sldId id="267" r:id="rId13"/>
     <p:sldId id="268" r:id="rId14"/>
     <p:sldId id="269" r:id="rId15"/>
+    <p:sldId id="275" r:id="rId25"/>
+    <p:sldId id="276" r:id="rId26"/>
+    <p:sldId id="277" r:id="rId27"/>
     <p:sldId id="270" r:id="rId16"/>
     <p:sldId id="271" r:id="rId17"/>
     <p:sldId id="272" r:id="rId18"/>
@@ -320,7 +323,7 @@
           <a:p>
             <a:fld id="{5BCAD085-E8A6-8845-BD4E-CB4CCA059FC4}" type="datetimeFigureOut">
               <a:rPr lang="en-US" smtClean="0"/>
-              <a:t>7/8/26</a:t>
+              <a:t>7/9/26</a:t>
             </a:fld>
             <a:endParaRPr lang="en-US"/>
           </a:p>
@@ -488,7 +491,7 @@
           <a:p>
             <a:fld id="{5BCAD085-E8A6-8845-BD4E-CB4CCA059FC4}" type="datetimeFigureOut">
               <a:rPr lang="en-US" smtClean="0"/>
-              <a:t>7/8/26</a:t>
+              <a:t>7/9/26</a:t>
             </a:fld>
             <a:endParaRPr lang="en-US"/>
           </a:p>
@@ -666,7 +669,7 @@
           <a:p>
             <a:fld id="{5BCAD085-E8A6-8845-BD4E-CB4CCA059FC4}" type="datetimeFigureOut">
               <a:rPr lang="en-US" smtClean="0"/>
-              <a:t>7/8/26</a:t>
+              <a:t>7/9/26</a:t>
             </a:fld>
             <a:endParaRPr lang="en-US"/>
           </a:p>
@@ -834,7 +837,7 @@
           <a:p>
             <a:fld id="{5BCAD085-E8A6-8845-BD4E-CB4CCA059FC4}" type="datetimeFigureOut">
               <a:rPr lang="en-US" smtClean="0"/>
-              <a:t>7/8/26</a:t>
+              <a:t>7/9/26</a:t>
             </a:fld>
             <a:endParaRPr lang="en-US"/>
           </a:p>
@@ -1079,7 +1082,7 @@
           <a:p>
             <a:fld id="{5BCAD085-E8A6-8845-BD4E-CB4CCA059FC4}" type="datetimeFigureOut">
               <a:rPr lang="en-US" smtClean="0"/>
-              <a:t>7/8/26</a:t>
+              <a:t>7/9/26</a:t>
             </a:fld>
             <a:endParaRPr lang="en-US"/>
           </a:p>
@@ -1364,7 +1367,7 @@
           <a:p>
             <a:fld id="{5BCAD085-E8A6-8845-BD4E-CB4CCA059FC4}" type="datetimeFigureOut">
               <a:rPr lang="en-US" smtClean="0"/>
-              <a:t>7/8/26</a:t>
+              <a:t>7/9/26</a:t>
             </a:fld>
             <a:endParaRPr lang="en-US"/>
           </a:p>
@@ -1783,7 +1786,7 @@
           <a:p>
             <a:fld id="{5BCAD085-E8A6-8845-BD4E-CB4CCA059FC4}" type="datetimeFigureOut">
               <a:rPr lang="en-US" smtClean="0"/>
-              <a:t>7/8/26</a:t>
+              <a:t>7/9/26</a:t>
             </a:fld>
             <a:endParaRPr lang="en-US"/>
           </a:p>
@@ -1900,7 +1903,7 @@
           <a:p>
             <a:fld id="{5BCAD085-E8A6-8845-BD4E-CB4CCA059FC4}" type="datetimeFigureOut">
               <a:rPr lang="en-US" smtClean="0"/>
-              <a:t>7/8/26</a:t>
+              <a:t>7/9/26</a:t>
             </a:fld>
             <a:endParaRPr lang="en-US"/>
           </a:p>
@@ -1995,7 +1998,7 @@
           <a:p>
             <a:fld id="{5BCAD085-E8A6-8845-BD4E-CB4CCA059FC4}" type="datetimeFigureOut">
               <a:rPr lang="en-US" smtClean="0"/>
-              <a:t>7/8/26</a:t>
+              <a:t>7/9/26</a:t>
             </a:fld>
             <a:endParaRPr lang="en-US"/>
           </a:p>
@@ -2270,7 +2273,7 @@
           <a:p>
             <a:fld id="{5BCAD085-E8A6-8845-BD4E-CB4CCA059FC4}" type="datetimeFigureOut">
               <a:rPr lang="en-US" smtClean="0"/>
-              <a:t>7/8/26</a:t>
+              <a:t>7/9/26</a:t>
             </a:fld>
             <a:endParaRPr lang="en-US"/>
           </a:p>
@@ -2522,7 +2525,7 @@
           <a:p>
             <a:fld id="{5BCAD085-E8A6-8845-BD4E-CB4CCA059FC4}" type="datetimeFigureOut">
               <a:rPr lang="en-US" smtClean="0"/>
-              <a:t>7/8/26</a:t>
+              <a:t>7/9/26</a:t>
             </a:fld>
             <a:endParaRPr lang="en-US"/>
           </a:p>
@@ -2733,7 +2736,7 @@
           <a:p>
             <a:fld id="{5BCAD085-E8A6-8845-BD4E-CB4CCA059FC4}" type="datetimeFigureOut">
               <a:rPr lang="en-US" smtClean="0"/>
-              <a:t>7/8/26</a:t>
+              <a:t>7/9/26</a:t>
             </a:fld>
             <a:endParaRPr lang="en-US"/>
           </a:p>
@@ -6574,7 +6577,7 @@
                 </a:solidFill>
                 <a:latin typeface="Consolas"/>
               </a:rPr>
-              <a:t>15</a:t>
+              <a:t>18</a:t>
             </a:r>
           </a:p>
         </p:txBody>
@@ -7002,7 +7005,7 @@
                 </a:solidFill>
                 <a:latin typeface="Consolas"/>
               </a:rPr>
-              <a:t>16</a:t>
+              <a:t>19</a:t>
             </a:r>
           </a:p>
         </p:txBody>
@@ -7491,7 +7494,7 @@
                 </a:solidFill>
                 <a:latin typeface="Consolas"/>
               </a:rPr>
-              <a:t>17</a:t>
+              <a:t>20</a:t>
             </a:r>
           </a:p>
         </p:txBody>
@@ -8424,7 +8427,7 @@
                 </a:solidFill>
                 <a:latin typeface="Consolas"/>
               </a:rPr>
-              <a:t>18</a:t>
+              <a:t>21</a:t>
             </a:r>
           </a:p>
         </p:txBody>
@@ -8798,7 +8801,7 @@
         <p:spPr>
           <a:xfrm>
             <a:off x="502920" y="1737360"/>
-            <a:ext cx="6949440" cy="2926080"/>
+            <a:ext cx="6949440" cy="1969770"/>
           </a:xfrm>
           <a:prstGeom prst="rect">
             <a:avLst/>
@@ -8817,22 +8820,22 @@
               </a:spcAft>
             </a:pPr>
             <a:r>
-              <a:rPr sz="1700" b="1">
+              <a:rPr sz="1700" b="1" dirty="0">
                 <a:solidFill>
                   <a:srgbClr val="0B0B0B"/>
                 </a:solidFill>
                 <a:latin typeface="Calibri"/>
               </a:rPr>
-              <a:t>›  Only about 30% of students who need help</a:t>
-            </a:r>
-            <a:r>
-              <a:rPr sz="1700">
+              <a:t>›  Facilitators can already see who is struggling — that was never the gap.</a:t>
+            </a:r>
+            <a:r>
+              <a:rPr sz="1700" dirty="0">
                 <a:solidFill>
                   <a:srgbClr val="0B0B0B"/>
                 </a:solidFill>
                 <a:latin typeface="Calibri"/>
               </a:rPr>
-              <a:t>typically receive an intervention before the next quiz.</a:t>
+              <a:t/>
             </a:r>
           </a:p>
           <a:p>
@@ -8842,22 +8845,22 @@
               </a:spcAft>
             </a:pPr>
             <a:r>
-              <a:rPr sz="1700" b="1">
+              <a:rPr sz="1700" b="1" dirty="0">
                 <a:solidFill>
                   <a:srgbClr val="0B0B0B"/>
                 </a:solidFill>
                 <a:latin typeface="Calibri"/>
               </a:rPr>
-              <a:t>›  The gap isn't detection</a:t>
-            </a:r>
-            <a:r>
-              <a:rPr sz="1700">
+              <a:t>›  The hard part is deciding who needs help first, what kind of help fits, and whether</a:t>
+            </a:r>
+            <a:r>
+              <a:rPr sz="1700" dirty="0">
                 <a:solidFill>
                   <a:srgbClr val="0B0B0B"/>
                 </a:solidFill>
                 <a:latin typeface="Calibri"/>
               </a:rPr>
-              <a:t>— facilitators can already see who's struggling.</a:t>
+              <a:t/>
             </a:r>
           </a:p>
           <a:p>
@@ -8867,29 +8870,13 @@
               </a:spcAft>
             </a:pPr>
             <a:r>
-              <a:rPr sz="1700" b="0">
+              <a:rPr sz="1700" b="0" dirty="0">
                 <a:solidFill>
                   <a:srgbClr val="0B0B0B"/>
                 </a:solidFill>
                 <a:latin typeface="Calibri"/>
               </a:rPr>
-              <a:t>›  The real problem is deciding who needs help first, what kind, and proving it actually happened</a:t>
-            </a:r>
-          </a:p>
-          <a:p>
-            <a:pPr>
-              <a:spcAft>
-                <a:spcPts val="800"/>
-              </a:spcAft>
-            </a:pPr>
-            <a:r>
-              <a:rPr sz="1700" b="0">
-                <a:solidFill>
-                  <a:srgbClr val="0B0B0B"/>
-                </a:solidFill>
-                <a:latin typeface="Calibri"/>
-              </a:rPr>
-              <a:t>›  before time runs out.</a:t>
+              <a:t>›  the planned help actually happened, before the next quiz arrives.</a:t>
             </a:r>
           </a:p>
         </p:txBody>
@@ -9440,6 +9427,996 @@
             <a:pPr algn="l"/>
             <a:r>
               <a:rPr sz="1000" b="0" i="0">
+                <a:solidFill>
+                  <a:srgbClr val="898781"/>
+                </a:solidFill>
+                <a:latin typeface="Consolas"/>
+              </a:rPr>
+              <a:t>BOON ACADEMY</a:t>
+            </a:r>
+          </a:p>
+        </p:txBody>
+      </p:sp>
+    </p:spTree>
+  </p:cSld>
+  <p:clrMapOvr>
+    <a:masterClrMapping/>
+  </p:clrMapOvr>
+</p:sld>
+</file>
+
+<file path=ppt/slides/slide20.xml><?xml version="1.0" encoding="utf-8"?>
+<p:sld xmlns:a="http://schemas.openxmlformats.org/drawingml/2006/main" xmlns:p="http://schemas.openxmlformats.org/presentationml/2006/main" xmlns:r="http://schemas.openxmlformats.org/officeDocument/2006/relationships">
+  <p:cSld>
+    <p:spTree>
+      <p:nvGrpSpPr>
+        <p:cNvPr id="1" name=""/>
+        <p:cNvGrpSpPr/>
+        <p:nvPr/>
+      </p:nvGrpSpPr>
+      <p:grpSpPr/>
+      <p:sp>
+        <p:nvSpPr>
+          <p:cNvPr id="2" name="Rectangle 1"/>
+          <p:cNvSpPr/>
+          <p:nvPr/>
+        </p:nvSpPr>
+        <p:spPr>
+          <a:xfrm>
+            <a:off x="0" y="0"/>
+            <a:ext cx="12191695" cy="6858000"/>
+          </a:xfrm>
+          <a:prstGeom prst="rect">
+            <a:avLst/>
+          </a:prstGeom>
+          <a:solidFill>
+            <a:srgbClr val="FCFCFB"/>
+          </a:solidFill>
+          <a:ln>
+            <a:noFill/>
+          </a:ln>
+          <a:effectLst/>
+        </p:spPr>
+        <p:style>
+          <a:lnRef idx="1">
+            <a:schemeClr val="accent1"/>
+          </a:lnRef>
+          <a:fillRef idx="3">
+            <a:schemeClr val="accent1"/>
+          </a:fillRef>
+          <a:effectRef idx="2">
+            <a:schemeClr val="accent1"/>
+          </a:effectRef>
+          <a:fontRef idx="minor">
+            <a:schemeClr val="lt1"/>
+          </a:fontRef>
+        </p:style>
+        <p:txBody>
+          <a:bodyPr rtlCol="0" anchor="ctr"/>
+          <a:lstStyle/>
+          <a:p>
+            <a:pPr algn="ctr"/>
+          </a:p>
+        </p:txBody>
+      </p:sp>
+      <p:sp>
+        <p:nvSpPr>
+          <p:cNvPr id="3" name="TextBox 2"/>
+          <p:cNvSpPr txBox="1"/>
+          <p:nvPr/>
+        </p:nvSpPr>
+        <p:spPr>
+          <a:xfrm>
+            <a:off x="502920" y="365760"/>
+            <a:ext cx="8229600" cy="320040"/>
+          </a:xfrm>
+          <a:prstGeom prst="rect">
+            <a:avLst/>
+          </a:prstGeom>
+          <a:noFill/>
+        </p:spPr>
+        <p:txBody>
+          <a:bodyPr wrap="none">
+            <a:spAutoFit/>
+          </a:bodyPr>
+          <a:lstStyle/>
+          <a:p>
+            <a:r>
+              <a:rPr sz="1200" b="1">
+                <a:solidFill>
+                  <a:srgbClr val="2A78D6"/>
+                </a:solidFill>
+                <a:latin typeface="Consolas"/>
+              </a:rPr>
+              <a:t>SELF-SERVICE, NOT JUST AUTOMATION</a:t>
+            </a:r>
+          </a:p>
+        </p:txBody>
+      </p:sp>
+      <p:sp>
+        <p:nvSpPr>
+          <p:cNvPr id="4" name="TextBox 3"/>
+          <p:cNvSpPr txBox="1"/>
+          <p:nvPr/>
+        </p:nvSpPr>
+        <p:spPr>
+          <a:xfrm>
+            <a:off x="502920" y="658368"/>
+            <a:ext cx="11155680" cy="822960"/>
+          </a:xfrm>
+          <a:prstGeom prst="rect">
+            <a:avLst/>
+          </a:prstGeom>
+          <a:noFill/>
+        </p:spPr>
+        <p:txBody>
+          <a:bodyPr wrap="none">
+            <a:spAutoFit/>
+          </a:bodyPr>
+          <a:lstStyle/>
+          <a:p>
+            <a:r>
+              <a:rPr sz="2800" b="1">
+                <a:solidFill>
+                  <a:srgbClr val="0B0B0B"/>
+                </a:solidFill>
+                <a:latin typeface="Calibri"/>
+              </a:rPr>
+              <a:t>Taking Action, Your Way</a:t>
+            </a:r>
+          </a:p>
+        </p:txBody>
+      </p:sp>
+      <p:sp>
+        <p:nvSpPr>
+          <p:cNvPr id="5" name="Rectangle 4"/>
+          <p:cNvSpPr/>
+          <p:nvPr/>
+        </p:nvSpPr>
+        <p:spPr>
+          <a:xfrm>
+            <a:off x="502920" y="1371600"/>
+            <a:ext cx="502920" cy="50800"/>
+          </a:xfrm>
+          <a:prstGeom prst="rect">
+            <a:avLst/>
+          </a:prstGeom>
+          <a:solidFill>
+            <a:srgbClr val="2A78D6"/>
+          </a:solidFill>
+          <a:ln>
+            <a:noFill/>
+          </a:ln>
+          <a:effectLst/>
+        </p:spPr>
+        <p:style>
+          <a:lnRef idx="1">
+            <a:schemeClr val="accent1"/>
+          </a:lnRef>
+          <a:fillRef idx="3">
+            <a:schemeClr val="accent1"/>
+          </a:fillRef>
+          <a:effectRef idx="2">
+            <a:schemeClr val="accent1"/>
+          </a:effectRef>
+          <a:fontRef idx="minor">
+            <a:schemeClr val="lt1"/>
+          </a:fontRef>
+        </p:style>
+        <p:txBody>
+          <a:bodyPr rtlCol="0" anchor="ctr"/>
+          <a:lstStyle/>
+          <a:p>
+            <a:pPr algn="ctr"/>
+          </a:p>
+        </p:txBody>
+      </p:sp>
+      <p:sp>
+        <p:nvSpPr>
+          <p:cNvPr id="6" name="TextBox 5"/>
+          <p:cNvSpPr txBox="1"/>
+          <p:nvPr/>
+        </p:nvSpPr>
+        <p:spPr>
+          <a:xfrm>
+            <a:off x="502920" y="1828800"/>
+            <a:ext cx="10789920" cy="3600000"/>
+          </a:xfrm>
+          <a:prstGeom prst="rect">
+            <a:avLst/>
+          </a:prstGeom>
+          <a:noFill/>
+        </p:spPr>
+        <p:txBody>
+          <a:bodyPr wrap="square">
+            <a:spAutoFit/>
+          </a:bodyPr>
+          <a:lstStyle/>
+          <a:p>
+            <a:pPr>
+              <a:spcAft>
+                <a:spcPts val="1000"/>
+              </a:spcAft>
+            </a:pPr>
+            <a:r>
+              <a:rPr sz="1600">
+                <a:solidFill>
+                  <a:srgbClr val="0B0B0B"/>
+                </a:solidFill>
+                <a:latin typeface="Calibri"/>
+              </a:rPr>
+              <a:t>›  Every priority card has an ✉️ Edit button — override the recommended action, due date, and why, without ever touching the risk score itself.</a:t>
+            </a:r>
+          </a:p>
+          <a:p>
+            <a:pPr>
+              <a:spcAft>
+                <a:spcPts val="1000"/>
+              </a:spcAft>
+            </a:pPr>
+            <a:r>
+              <a:rPr sz="1600">
+                <a:solidFill>
+                  <a:srgbClr val="0B0B0B"/>
+                </a:solidFill>
+                <a:latin typeface="Calibri"/>
+              </a:rPr>
+              <a:t>›  ➕ Add a custom priority card puts any student on today's list with your own reason — even one the system hasn't flagged.</a:t>
+            </a:r>
+          </a:p>
+          <a:p>
+            <a:pPr>
+              <a:spcAft>
+                <a:spcPts val="1000"/>
+              </a:spcAft>
+            </a:pPr>
+            <a:r>
+              <a:rPr sz="1600">
+                <a:solidFill>
+                  <a:srgbClr val="0B0B0B"/>
+                </a:solidFill>
+                <a:latin typeface="Calibri"/>
+              </a:rPr>
+              <a:t>›  ➕ Log an action you took yourself records anything done outside the system's queue — an extra call, a booked session, tomorrow's work pulled forward.</a:t>
+            </a:r>
+          </a:p>
+          <a:p>
+            <a:pPr>
+              <a:spcAft>
+                <a:spcPts val="1000"/>
+              </a:spcAft>
+            </a:pPr>
+            <a:r>
+              <a:rPr sz="1600">
+                <a:solidFill>
+                  <a:srgbClr val="0B0B0B"/>
+                </a:solidFill>
+                <a:latin typeface="Calibri"/>
+              </a:rPr>
+              <a:t>›  Every action can be edited or deleted afterward — nothing the system recommends is locked in.</a:t>
+            </a:r>
+          </a:p>
+        </p:txBody>
+      </p:sp>
+      <p:sp>
+        <p:nvSpPr>
+          <p:cNvPr id="7" name="TextBox 6"/>
+          <p:cNvSpPr txBox="1"/>
+          <p:nvPr/>
+        </p:nvSpPr>
+        <p:spPr>
+          <a:xfrm>
+            <a:off x="11368735" y="6355080"/>
+            <a:ext cx="548640" cy="320040"/>
+          </a:xfrm>
+          <a:prstGeom prst="rect">
+            <a:avLst/>
+          </a:prstGeom>
+          <a:noFill/>
+        </p:spPr>
+        <p:txBody>
+          <a:bodyPr wrap="none">
+            <a:spAutoFit/>
+          </a:bodyPr>
+          <a:lstStyle/>
+          <a:p>
+            <a:pPr algn="r"/>
+            <a:r>
+              <a:rPr sz="1100">
+                <a:solidFill>
+                  <a:srgbClr val="898781"/>
+                </a:solidFill>
+                <a:latin typeface="Consolas"/>
+              </a:rPr>
+              <a:t>15</a:t>
+            </a:r>
+          </a:p>
+        </p:txBody>
+      </p:sp>
+      <p:sp>
+        <p:nvSpPr>
+          <p:cNvPr id="8" name="TextBox 7"/>
+          <p:cNvSpPr txBox="1"/>
+          <p:nvPr/>
+        </p:nvSpPr>
+        <p:spPr>
+          <a:xfrm>
+            <a:off x="502920" y="6355080"/>
+            <a:ext cx="2743200" cy="320040"/>
+          </a:xfrm>
+          <a:prstGeom prst="rect">
+            <a:avLst/>
+          </a:prstGeom>
+          <a:noFill/>
+        </p:spPr>
+        <p:txBody>
+          <a:bodyPr wrap="none">
+            <a:spAutoFit/>
+          </a:bodyPr>
+          <a:lstStyle/>
+          <a:p>
+            <a:r>
+              <a:rPr sz="1000">
+                <a:solidFill>
+                  <a:srgbClr val="898781"/>
+                </a:solidFill>
+                <a:latin typeface="Consolas"/>
+              </a:rPr>
+              <a:t>BOON ACADEMY</a:t>
+            </a:r>
+          </a:p>
+        </p:txBody>
+      </p:sp>
+    </p:spTree>
+  </p:cSld>
+  <p:clrMapOvr>
+    <a:masterClrMapping/>
+  </p:clrMapOvr>
+</p:sld>
+</file>
+
+<file path=ppt/slides/slide21.xml><?xml version="1.0" encoding="utf-8"?>
+<p:sld xmlns:a="http://schemas.openxmlformats.org/drawingml/2006/main" xmlns:p="http://schemas.openxmlformats.org/presentationml/2006/main" xmlns:r="http://schemas.openxmlformats.org/officeDocument/2006/relationships">
+  <p:cSld>
+    <p:spTree>
+      <p:nvGrpSpPr>
+        <p:cNvPr id="1" name=""/>
+        <p:cNvGrpSpPr/>
+        <p:nvPr/>
+      </p:nvGrpSpPr>
+      <p:grpSpPr/>
+      <p:sp>
+        <p:nvSpPr>
+          <p:cNvPr id="2" name="Rectangle 1"/>
+          <p:cNvSpPr/>
+          <p:nvPr/>
+        </p:nvSpPr>
+        <p:spPr>
+          <a:xfrm>
+            <a:off x="0" y="0"/>
+            <a:ext cx="12191695" cy="6858000"/>
+          </a:xfrm>
+          <a:prstGeom prst="rect">
+            <a:avLst/>
+          </a:prstGeom>
+          <a:solidFill>
+            <a:srgbClr val="FCFCFB"/>
+          </a:solidFill>
+          <a:ln>
+            <a:noFill/>
+          </a:ln>
+          <a:effectLst/>
+        </p:spPr>
+        <p:style>
+          <a:lnRef idx="1">
+            <a:schemeClr val="accent1"/>
+          </a:lnRef>
+          <a:fillRef idx="3">
+            <a:schemeClr val="accent1"/>
+          </a:fillRef>
+          <a:effectRef idx="2">
+            <a:schemeClr val="accent1"/>
+          </a:effectRef>
+          <a:fontRef idx="minor">
+            <a:schemeClr val="lt1"/>
+          </a:fontRef>
+        </p:style>
+        <p:txBody>
+          <a:bodyPr rtlCol="0" anchor="ctr"/>
+          <a:lstStyle/>
+          <a:p>
+            <a:pPr algn="ctr"/>
+          </a:p>
+        </p:txBody>
+      </p:sp>
+      <p:sp>
+        <p:nvSpPr>
+          <p:cNvPr id="3" name="TextBox 2"/>
+          <p:cNvSpPr txBox="1"/>
+          <p:nvPr/>
+        </p:nvSpPr>
+        <p:spPr>
+          <a:xfrm>
+            <a:off x="502920" y="365760"/>
+            <a:ext cx="8229600" cy="320040"/>
+          </a:xfrm>
+          <a:prstGeom prst="rect">
+            <a:avLst/>
+          </a:prstGeom>
+          <a:noFill/>
+        </p:spPr>
+        <p:txBody>
+          <a:bodyPr wrap="none">
+            <a:spAutoFit/>
+          </a:bodyPr>
+          <a:lstStyle/>
+          <a:p>
+            <a:r>
+              <a:rPr sz="1200" b="1">
+                <a:solidFill>
+                  <a:srgbClr val="2A78D6"/>
+                </a:solidFill>
+                <a:latin typeface="Consolas"/>
+              </a:rPr>
+              <a:t>BOOKING &amp; SCHEDULING</a:t>
+            </a:r>
+          </a:p>
+        </p:txBody>
+      </p:sp>
+      <p:sp>
+        <p:nvSpPr>
+          <p:cNvPr id="4" name="TextBox 3"/>
+          <p:cNvSpPr txBox="1"/>
+          <p:nvPr/>
+        </p:nvSpPr>
+        <p:spPr>
+          <a:xfrm>
+            <a:off x="502920" y="658368"/>
+            <a:ext cx="11155680" cy="822960"/>
+          </a:xfrm>
+          <a:prstGeom prst="rect">
+            <a:avLst/>
+          </a:prstGeom>
+          <a:noFill/>
+        </p:spPr>
+        <p:txBody>
+          <a:bodyPr wrap="none">
+            <a:spAutoFit/>
+          </a:bodyPr>
+          <a:lstStyle/>
+          <a:p>
+            <a:r>
+              <a:rPr sz="2800" b="1">
+                <a:solidFill>
+                  <a:srgbClr val="0B0B0B"/>
+                </a:solidFill>
+                <a:latin typeface="Calibri"/>
+              </a:rPr>
+              <a:t>A Calendar, Built Like One</a:t>
+            </a:r>
+          </a:p>
+        </p:txBody>
+      </p:sp>
+      <p:sp>
+        <p:nvSpPr>
+          <p:cNvPr id="5" name="Rectangle 4"/>
+          <p:cNvSpPr/>
+          <p:nvPr/>
+        </p:nvSpPr>
+        <p:spPr>
+          <a:xfrm>
+            <a:off x="502920" y="1371600"/>
+            <a:ext cx="502920" cy="50800"/>
+          </a:xfrm>
+          <a:prstGeom prst="rect">
+            <a:avLst/>
+          </a:prstGeom>
+          <a:solidFill>
+            <a:srgbClr val="2A78D6"/>
+          </a:solidFill>
+          <a:ln>
+            <a:noFill/>
+          </a:ln>
+          <a:effectLst/>
+        </p:spPr>
+        <p:style>
+          <a:lnRef idx="1">
+            <a:schemeClr val="accent1"/>
+          </a:lnRef>
+          <a:fillRef idx="3">
+            <a:schemeClr val="accent1"/>
+          </a:fillRef>
+          <a:effectRef idx="2">
+            <a:schemeClr val="accent1"/>
+          </a:effectRef>
+          <a:fontRef idx="minor">
+            <a:schemeClr val="lt1"/>
+          </a:fontRef>
+        </p:style>
+        <p:txBody>
+          <a:bodyPr rtlCol="0" anchor="ctr"/>
+          <a:lstStyle/>
+          <a:p>
+            <a:pPr algn="ctr"/>
+          </a:p>
+        </p:txBody>
+      </p:sp>
+      <p:sp>
+        <p:nvSpPr>
+          <p:cNvPr id="6" name="TextBox 5"/>
+          <p:cNvSpPr txBox="1"/>
+          <p:nvPr/>
+        </p:nvSpPr>
+        <p:spPr>
+          <a:xfrm>
+            <a:off x="502920" y="1828800"/>
+            <a:ext cx="10789920" cy="3600000"/>
+          </a:xfrm>
+          <a:prstGeom prst="rect">
+            <a:avLst/>
+          </a:prstGeom>
+          <a:noFill/>
+        </p:spPr>
+        <p:txBody>
+          <a:bodyPr wrap="square">
+            <a:spAutoFit/>
+          </a:bodyPr>
+          <a:lstStyle/>
+          <a:p>
+            <a:pPr>
+              <a:spcAft>
+                <a:spcPts val="1000"/>
+              </a:spcAft>
+            </a:pPr>
+            <a:r>
+              <a:rPr sz="1600">
+                <a:solidFill>
+                  <a:srgbClr val="0B0B0B"/>
+                </a:solidFill>
+                <a:latin typeface="Calibri"/>
+              </a:rPr>
+              <a:t>›  A real month grid — Prev/Next navigation, today highlighted, laid out like a familiar calendar app.</a:t>
+            </a:r>
+          </a:p>
+          <a:p>
+            <a:pPr>
+              <a:spcAft>
+                <a:spcPts val="1000"/>
+              </a:spcAft>
+            </a:pPr>
+            <a:r>
+              <a:rPr sz="1600">
+                <a:solidFill>
+                  <a:srgbClr val="0B0B0B"/>
+                </a:solidFill>
+                <a:latin typeface="Calibri"/>
+              </a:rPr>
+              <a:t>›  Shows only approved sessions: booked and completed — pending time options never clutter the view.</a:t>
+            </a:r>
+          </a:p>
+          <a:p>
+            <a:pPr>
+              <a:spcAft>
+                <a:spcPts val="1000"/>
+              </a:spcAft>
+            </a:pPr>
+            <a:r>
+              <a:rPr sz="1600">
+                <a:solidFill>
+                  <a:srgbClr val="0B0B0B"/>
+                </a:solidFill>
+                <a:latin typeface="Calibri"/>
+              </a:rPr>
+              <a:t>›  Proposing time options creates a tracked intervention immediately, before a student even confirms one.</a:t>
+            </a:r>
+          </a:p>
+          <a:p>
+            <a:pPr>
+              <a:spcAft>
+                <a:spcPts val="1000"/>
+              </a:spcAft>
+            </a:pPr>
+            <a:r>
+              <a:rPr sz="1600">
+                <a:solidFill>
+                  <a:srgbClr val="0B0B0B"/>
+                </a:solidFill>
+                <a:latin typeface="Calibri"/>
+              </a:rPr>
+              <a:t>›  Mark a session done, reschedule it, or cancel it — all from the same page.</a:t>
+            </a:r>
+          </a:p>
+        </p:txBody>
+      </p:sp>
+      <p:sp>
+        <p:nvSpPr>
+          <p:cNvPr id="7" name="TextBox 6"/>
+          <p:cNvSpPr txBox="1"/>
+          <p:nvPr/>
+        </p:nvSpPr>
+        <p:spPr>
+          <a:xfrm>
+            <a:off x="11368735" y="6355080"/>
+            <a:ext cx="548640" cy="320040"/>
+          </a:xfrm>
+          <a:prstGeom prst="rect">
+            <a:avLst/>
+          </a:prstGeom>
+          <a:noFill/>
+        </p:spPr>
+        <p:txBody>
+          <a:bodyPr wrap="none">
+            <a:spAutoFit/>
+          </a:bodyPr>
+          <a:lstStyle/>
+          <a:p>
+            <a:pPr algn="r"/>
+            <a:r>
+              <a:rPr sz="1100">
+                <a:solidFill>
+                  <a:srgbClr val="898781"/>
+                </a:solidFill>
+                <a:latin typeface="Consolas"/>
+              </a:rPr>
+              <a:t>16</a:t>
+            </a:r>
+          </a:p>
+        </p:txBody>
+      </p:sp>
+      <p:sp>
+        <p:nvSpPr>
+          <p:cNvPr id="8" name="TextBox 7"/>
+          <p:cNvSpPr txBox="1"/>
+          <p:nvPr/>
+        </p:nvSpPr>
+        <p:spPr>
+          <a:xfrm>
+            <a:off x="502920" y="6355080"/>
+            <a:ext cx="2743200" cy="320040"/>
+          </a:xfrm>
+          <a:prstGeom prst="rect">
+            <a:avLst/>
+          </a:prstGeom>
+          <a:noFill/>
+        </p:spPr>
+        <p:txBody>
+          <a:bodyPr wrap="none">
+            <a:spAutoFit/>
+          </a:bodyPr>
+          <a:lstStyle/>
+          <a:p>
+            <a:r>
+              <a:rPr sz="1000">
+                <a:solidFill>
+                  <a:srgbClr val="898781"/>
+                </a:solidFill>
+                <a:latin typeface="Consolas"/>
+              </a:rPr>
+              <a:t>BOON ACADEMY</a:t>
+            </a:r>
+          </a:p>
+        </p:txBody>
+      </p:sp>
+    </p:spTree>
+  </p:cSld>
+  <p:clrMapOvr>
+    <a:masterClrMapping/>
+  </p:clrMapOvr>
+</p:sld>
+</file>
+
+<file path=ppt/slides/slide22.xml><?xml version="1.0" encoding="utf-8"?>
+<p:sld xmlns:a="http://schemas.openxmlformats.org/drawingml/2006/main" xmlns:p="http://schemas.openxmlformats.org/presentationml/2006/main" xmlns:r="http://schemas.openxmlformats.org/officeDocument/2006/relationships">
+  <p:cSld>
+    <p:spTree>
+      <p:nvGrpSpPr>
+        <p:cNvPr id="1" name=""/>
+        <p:cNvGrpSpPr/>
+        <p:nvPr/>
+      </p:nvGrpSpPr>
+      <p:grpSpPr/>
+      <p:sp>
+        <p:nvSpPr>
+          <p:cNvPr id="2" name="Rectangle 1"/>
+          <p:cNvSpPr/>
+          <p:nvPr/>
+        </p:nvSpPr>
+        <p:spPr>
+          <a:xfrm>
+            <a:off x="0" y="0"/>
+            <a:ext cx="12191695" cy="6858000"/>
+          </a:xfrm>
+          <a:prstGeom prst="rect">
+            <a:avLst/>
+          </a:prstGeom>
+          <a:solidFill>
+            <a:srgbClr val="FCFCFB"/>
+          </a:solidFill>
+          <a:ln>
+            <a:noFill/>
+          </a:ln>
+          <a:effectLst/>
+        </p:spPr>
+        <p:style>
+          <a:lnRef idx="1">
+            <a:schemeClr val="accent1"/>
+          </a:lnRef>
+          <a:fillRef idx="3">
+            <a:schemeClr val="accent1"/>
+          </a:fillRef>
+          <a:effectRef idx="2">
+            <a:schemeClr val="accent1"/>
+          </a:effectRef>
+          <a:fontRef idx="minor">
+            <a:schemeClr val="lt1"/>
+          </a:fontRef>
+        </p:style>
+        <p:txBody>
+          <a:bodyPr rtlCol="0" anchor="ctr"/>
+          <a:lstStyle/>
+          <a:p>
+            <a:pPr algn="ctr"/>
+          </a:p>
+        </p:txBody>
+      </p:sp>
+      <p:sp>
+        <p:nvSpPr>
+          <p:cNvPr id="3" name="TextBox 2"/>
+          <p:cNvSpPr txBox="1"/>
+          <p:nvPr/>
+        </p:nvSpPr>
+        <p:spPr>
+          <a:xfrm>
+            <a:off x="502920" y="365760"/>
+            <a:ext cx="8229600" cy="320040"/>
+          </a:xfrm>
+          <a:prstGeom prst="rect">
+            <a:avLst/>
+          </a:prstGeom>
+          <a:noFill/>
+        </p:spPr>
+        <p:txBody>
+          <a:bodyPr wrap="none">
+            <a:spAutoFit/>
+          </a:bodyPr>
+          <a:lstStyle/>
+          <a:p>
+            <a:r>
+              <a:rPr sz="1200" b="1">
+                <a:solidFill>
+                  <a:srgbClr val="2A78D6"/>
+                </a:solidFill>
+                <a:latin typeface="Consolas"/>
+              </a:rPr>
+              <a:t>A CHAT ASSISTANT, GROUNDED IN YOUR DATA</a:t>
+            </a:r>
+          </a:p>
+        </p:txBody>
+      </p:sp>
+      <p:sp>
+        <p:nvSpPr>
+          <p:cNvPr id="4" name="TextBox 3"/>
+          <p:cNvSpPr txBox="1"/>
+          <p:nvPr/>
+        </p:nvSpPr>
+        <p:spPr>
+          <a:xfrm>
+            <a:off x="502920" y="658368"/>
+            <a:ext cx="11155680" cy="822960"/>
+          </a:xfrm>
+          <a:prstGeom prst="rect">
+            <a:avLst/>
+          </a:prstGeom>
+          <a:noFill/>
+        </p:spPr>
+        <p:txBody>
+          <a:bodyPr wrap="none">
+            <a:spAutoFit/>
+          </a:bodyPr>
+          <a:lstStyle/>
+          <a:p>
+            <a:r>
+              <a:rPr sz="2800" b="1">
+                <a:solidFill>
+                  <a:srgbClr val="0B0B0B"/>
+                </a:solidFill>
+                <a:latin typeface="Calibri"/>
+              </a:rPr>
+              <a:t>Ask AI</a:t>
+            </a:r>
+          </a:p>
+        </p:txBody>
+      </p:sp>
+      <p:sp>
+        <p:nvSpPr>
+          <p:cNvPr id="5" name="Rectangle 4"/>
+          <p:cNvSpPr/>
+          <p:nvPr/>
+        </p:nvSpPr>
+        <p:spPr>
+          <a:xfrm>
+            <a:off x="502920" y="1371600"/>
+            <a:ext cx="502920" cy="50800"/>
+          </a:xfrm>
+          <a:prstGeom prst="rect">
+            <a:avLst/>
+          </a:prstGeom>
+          <a:solidFill>
+            <a:srgbClr val="2A78D6"/>
+          </a:solidFill>
+          <a:ln>
+            <a:noFill/>
+          </a:ln>
+          <a:effectLst/>
+        </p:spPr>
+        <p:style>
+          <a:lnRef idx="1">
+            <a:schemeClr val="accent1"/>
+          </a:lnRef>
+          <a:fillRef idx="3">
+            <a:schemeClr val="accent1"/>
+          </a:fillRef>
+          <a:effectRef idx="2">
+            <a:schemeClr val="accent1"/>
+          </a:effectRef>
+          <a:fontRef idx="minor">
+            <a:schemeClr val="lt1"/>
+          </a:fontRef>
+        </p:style>
+        <p:txBody>
+          <a:bodyPr rtlCol="0" anchor="ctr"/>
+          <a:lstStyle/>
+          <a:p>
+            <a:pPr algn="ctr"/>
+          </a:p>
+        </p:txBody>
+      </p:sp>
+      <p:sp>
+        <p:nvSpPr>
+          <p:cNvPr id="6" name="TextBox 5"/>
+          <p:cNvSpPr txBox="1"/>
+          <p:nvPr/>
+        </p:nvSpPr>
+        <p:spPr>
+          <a:xfrm>
+            <a:off x="502920" y="1828800"/>
+            <a:ext cx="10789920" cy="3600000"/>
+          </a:xfrm>
+          <a:prstGeom prst="rect">
+            <a:avLst/>
+          </a:prstGeom>
+          <a:noFill/>
+        </p:spPr>
+        <p:txBody>
+          <a:bodyPr wrap="square">
+            <a:spAutoFit/>
+          </a:bodyPr>
+          <a:lstStyle/>
+          <a:p>
+            <a:pPr>
+              <a:spcAft>
+                <a:spcPts val="1000"/>
+              </a:spcAft>
+            </a:pPr>
+            <a:r>
+              <a:rPr sz="1600">
+                <a:solidFill>
+                  <a:srgbClr val="0B0B0B"/>
+                </a:solidFill>
+                <a:latin typeface="Calibri"/>
+              </a:rPr>
+              <a:t>›  Ask about risk levels, coverage, overdue actions, or a specific student, in plain language.</a:t>
+            </a:r>
+          </a:p>
+          <a:p>
+            <a:pPr>
+              <a:spcAft>
+                <a:spcPts val="1000"/>
+              </a:spcAft>
+            </a:pPr>
+            <a:r>
+              <a:rPr sz="1600">
+                <a:solidFill>
+                  <a:srgbClr val="0B0B0B"/>
+                </a:solidFill>
+                <a:latin typeface="Calibri"/>
+              </a:rPr>
+              <a:t>›  Every answer is built from a live digest of your own roster and intervention data — never a generic knowledge base with no connection to your students.</a:t>
+            </a:r>
+          </a:p>
+          <a:p>
+            <a:pPr>
+              <a:spcAft>
+                <a:spcPts val="1000"/>
+              </a:spcAft>
+            </a:pPr>
+            <a:r>
+              <a:rPr sz="1600">
+                <a:solidFill>
+                  <a:srgbClr val="0B0B0B"/>
+                </a:solidFill>
+                <a:latin typeface="Calibri"/>
+              </a:rPr>
+              <a:t>›  Naming a student pulls in their full record automatically; asking about something the data doesn't cover gets an honest “I don't know,” never a guess.</a:t>
+            </a:r>
+          </a:p>
+          <a:p>
+            <a:pPr>
+              <a:spcAft>
+                <a:spcPts val="1000"/>
+              </a:spcAft>
+            </a:pPr>
+            <a:r>
+              <a:rPr sz="1600">
+                <a:solidFill>
+                  <a:srgbClr val="0B0B0B"/>
+                </a:solidFill>
+                <a:latin typeface="Calibri"/>
+              </a:rPr>
+              <a:t>›  Conversations are saved, renameable, and switchable — pick up where you left off.</a:t>
+            </a:r>
+          </a:p>
+        </p:txBody>
+      </p:sp>
+      <p:sp>
+        <p:nvSpPr>
+          <p:cNvPr id="7" name="TextBox 6"/>
+          <p:cNvSpPr txBox="1"/>
+          <p:nvPr/>
+        </p:nvSpPr>
+        <p:spPr>
+          <a:xfrm>
+            <a:off x="11368735" y="6355080"/>
+            <a:ext cx="548640" cy="320040"/>
+          </a:xfrm>
+          <a:prstGeom prst="rect">
+            <a:avLst/>
+          </a:prstGeom>
+          <a:noFill/>
+        </p:spPr>
+        <p:txBody>
+          <a:bodyPr wrap="none">
+            <a:spAutoFit/>
+          </a:bodyPr>
+          <a:lstStyle/>
+          <a:p>
+            <a:pPr algn="r"/>
+            <a:r>
+              <a:rPr sz="1100">
+                <a:solidFill>
+                  <a:srgbClr val="898781"/>
+                </a:solidFill>
+                <a:latin typeface="Consolas"/>
+              </a:rPr>
+              <a:t>17</a:t>
+            </a:r>
+          </a:p>
+        </p:txBody>
+      </p:sp>
+      <p:sp>
+        <p:nvSpPr>
+          <p:cNvPr id="8" name="TextBox 7"/>
+          <p:cNvSpPr txBox="1"/>
+          <p:nvPr/>
+        </p:nvSpPr>
+        <p:spPr>
+          <a:xfrm>
+            <a:off x="502920" y="6355080"/>
+            <a:ext cx="2743200" cy="320040"/>
+          </a:xfrm>
+          <a:prstGeom prst="rect">
+            <a:avLst/>
+          </a:prstGeom>
+          <a:noFill/>
+        </p:spPr>
+        <p:txBody>
+          <a:bodyPr wrap="none">
+            <a:spAutoFit/>
+          </a:bodyPr>
+          <a:lstStyle/>
+          <a:p>
+            <a:r>
+              <a:rPr sz="1000">
                 <a:solidFill>
                   <a:srgbClr val="898781"/>
                 </a:solidFill>

--- a/docs/BOON_ACADEMY_OVERVIEW.pptx
+++ b/docs/BOON_ACADEMY_OVERVIEW.pptx
@@ -5866,7 +5866,7 @@
 </file>
 
 <file path=ppt/slides/slide15.xml><?xml version="1.0" encoding="utf-8"?>
-<p:sld xmlns:a="http://schemas.openxmlformats.org/drawingml/2006/main" xmlns:r="http://schemas.openxmlformats.org/officeDocument/2006/relationships" xmlns:p="http://schemas.openxmlformats.org/presentationml/2006/main">
+<p:sld xmlns:a="http://schemas.openxmlformats.org/drawingml/2006/main" xmlns:p="http://schemas.openxmlformats.org/presentationml/2006/main" xmlns:r="http://schemas.openxmlformats.org/officeDocument/2006/relationships">
   <p:cSld>
     <p:spTree>
       <p:nvGrpSpPr>
@@ -5874,14 +5874,7 @@
         <p:cNvGrpSpPr/>
         <p:nvPr/>
       </p:nvGrpSpPr>
-      <p:grpSpPr>
-        <a:xfrm>
-          <a:off x="0" y="0"/>
-          <a:ext cx="0" cy="0"/>
-          <a:chOff x="0" y="0"/>
-          <a:chExt cx="0" cy="0"/>
-        </a:xfrm>
-      </p:grpSpPr>
+      <p:grpSpPr/>
       <p:sp>
         <p:nvSpPr>
           <p:cNvPr id="2" name="Rectangle 1"/>
@@ -5923,7 +5916,6 @@
           <a:lstStyle/>
           <a:p>
             <a:pPr algn="ctr"/>
-            <a:endParaRPr/>
           </a:p>
         </p:txBody>
       </p:sp>
@@ -5944,20 +5936,19 @@
           <a:noFill/>
         </p:spPr>
         <p:txBody>
-          <a:bodyPr wrap="square" anchor="t">
-            <a:spAutoFit/>
-          </a:bodyPr>
-          <a:lstStyle/>
-          <a:p>
-            <a:pPr algn="l"/>
-            <a:r>
-              <a:rPr sz="1200" b="1" i="0">
+          <a:bodyPr wrap="none">
+            <a:spAutoFit/>
+          </a:bodyPr>
+          <a:lstStyle/>
+          <a:p>
+            <a:r>
+              <a:rPr sz="1200" b="1">
                 <a:solidFill>
                   <a:srgbClr val="2A78D6"/>
                 </a:solidFill>
                 <a:latin typeface="Consolas"/>
               </a:rPr>
-              <a:t>DESIGN SYSTEM</a:t>
+              <a:t>SELF-SERVICE, NOT JUST AUTOMATION</a:t>
             </a:r>
           </a:p>
         </p:txBody>
@@ -5979,20 +5970,19 @@
           <a:noFill/>
         </p:spPr>
         <p:txBody>
-          <a:bodyPr wrap="square" anchor="t">
-            <a:spAutoFit/>
-          </a:bodyPr>
-          <a:lstStyle/>
-          <a:p>
-            <a:pPr algn="l"/>
-            <a:r>
-              <a:rPr sz="3000" b="1" i="0">
+          <a:bodyPr wrap="none">
+            <a:spAutoFit/>
+          </a:bodyPr>
+          <a:lstStyle/>
+          <a:p>
+            <a:r>
+              <a:rPr sz="2800" b="1">
                 <a:solidFill>
                   <a:srgbClr val="0B0B0B"/>
                 </a:solidFill>
                 <a:latin typeface="Calibri"/>
               </a:rPr>
-              <a:t>Analyzed, adapted, not copied</a:t>
+              <a:t>Taking Action, Your Way</a:t>
             </a:r>
           </a:p>
         </p:txBody>
@@ -6038,7 +6028,6 @@
           <a:lstStyle/>
           <a:p>
             <a:pPr algn="ctr"/>
-            <a:endParaRPr/>
           </a:p>
         </p:txBody>
       </p:sp>
@@ -6050,8 +6039,8 @@
         </p:nvSpPr>
         <p:spPr>
           <a:xfrm>
-            <a:off x="502920" y="1783080"/>
-            <a:ext cx="11155680" cy="2926080"/>
+            <a:off x="7772400" y="1828800"/>
+            <a:ext cx="3931920" cy="4114800"/>
           </a:xfrm>
           <a:prstGeom prst="rect">
             <a:avLst/>
@@ -6066,490 +6055,72 @@
           <a:p>
             <a:pPr>
               <a:spcAft>
-                <a:spcPts val="800"/>
+                <a:spcPts val="1000"/>
               </a:spcAft>
             </a:pPr>
             <a:r>
-              <a:rPr sz="1600" b="1">
+              <a:rPr sz="1600">
                 <a:solidFill>
                   <a:srgbClr val="0B0B0B"/>
                 </a:solidFill>
                 <a:latin typeface="Calibri"/>
               </a:rPr>
-              <a:t>›  Real computed styles extracted from motion.dev</a:t>
-            </a:r>
-            <a:r>
-              <a:rPr sz="1600">
-                <a:solidFill>
-                  <a:srgbClr val="0B0B0B"/>
-                </a:solidFill>
-                <a:latin typeface="Calibri"/>
-              </a:rPr>
-              <a:t>— colors, fonts, spacing, not guesswork.</a:t>
+              <a:t>›  Every priority card has an ✉️ Edit button — override the recommended action, due date, and why, without ever touching the risk score itself.</a:t>
             </a:r>
           </a:p>
           <a:p>
             <a:pPr>
               <a:spcAft>
-                <a:spcPts val="800"/>
+                <a:spcPts val="1000"/>
               </a:spcAft>
             </a:pPr>
             <a:r>
-              <a:rPr sz="1600" b="0">
+              <a:rPr sz="1600">
                 <a:solidFill>
                   <a:srgbClr val="0B0B0B"/>
                 </a:solidFill>
                 <a:latin typeface="Calibri"/>
               </a:rPr>
-              <a:t>›  Warm near-black charcoal base, monospace technical labels, hairline dividers, accent-square section markers.</a:t>
+              <a:t>›  ➕ Add a custom priority card puts any student on today's list with your own reason — even one the system hasn't flagged.</a:t>
             </a:r>
           </a:p>
           <a:p>
             <a:pPr>
               <a:spcAft>
-                <a:spcPts val="800"/>
+                <a:spcPts val="1000"/>
               </a:spcAft>
             </a:pPr>
             <a:r>
-              <a:rPr sz="1600" b="1">
+              <a:rPr sz="1600">
                 <a:solidFill>
                   <a:srgbClr val="0B0B0B"/>
                 </a:solidFill>
                 <a:latin typeface="Calibri"/>
               </a:rPr>
-              <a:t>›  Kept our own validated blue accent</a:t>
-            </a:r>
-            <a:r>
-              <a:rPr sz="1600">
-                <a:solidFill>
-                  <a:srgbClr val="0B0B0B"/>
-                </a:solidFill>
-                <a:latin typeface="Calibri"/>
-              </a:rPr>
-              <a:t>— reusing their signature yellow would collide with our own "Medium risk = yellow" status color.</a:t>
+              <a:t>›  ➕ Log an action you took yourself records anything done outside the system's queue — an extra call, a booked session, tomorrow's work pulled forward.</a:t>
             </a:r>
           </a:p>
           <a:p>
             <a:pPr>
               <a:spcAft>
-                <a:spcPts val="800"/>
+                <a:spcPts val="1000"/>
               </a:spcAft>
             </a:pPr>
             <a:r>
-              <a:rPr sz="1600" b="0">
+              <a:rPr sz="1600">
                 <a:solidFill>
                   <a:srgbClr val="0B0B0B"/>
                 </a:solidFill>
                 <a:latin typeface="Calibri"/>
               </a:rPr>
-              <a:t>›  One shared token set (src/config.py) — the live app, the exported reports, and this deck all draw from it.</a:t>
-            </a:r>
-          </a:p>
-        </p:txBody>
-      </p:sp>
-      <p:sp>
-        <p:nvSpPr>
-          <p:cNvPr id="7" name="Rectangle 6"/>
-          <p:cNvSpPr/>
-          <p:nvPr/>
-        </p:nvSpPr>
-        <p:spPr>
-          <a:xfrm>
-            <a:off x="502920" y="4937760"/>
-            <a:ext cx="1828800" cy="822960"/>
-          </a:xfrm>
-          <a:prstGeom prst="rect">
-            <a:avLst/>
-          </a:prstGeom>
-          <a:solidFill>
-            <a:srgbClr val="D03B3B"/>
-          </a:solidFill>
-          <a:ln>
-            <a:noFill/>
-          </a:ln>
-          <a:effectLst/>
-        </p:spPr>
-        <p:style>
-          <a:lnRef idx="1">
-            <a:schemeClr val="accent1"/>
-          </a:lnRef>
-          <a:fillRef idx="3">
-            <a:schemeClr val="accent1"/>
-          </a:fillRef>
-          <a:effectRef idx="2">
-            <a:schemeClr val="accent1"/>
-          </a:effectRef>
-          <a:fontRef idx="minor">
-            <a:schemeClr val="lt1"/>
-          </a:fontRef>
-        </p:style>
-        <p:txBody>
-          <a:bodyPr rtlCol="0" anchor="ctr"/>
-          <a:lstStyle/>
-          <a:p>
-            <a:pPr algn="ctr"/>
-            <a:endParaRPr/>
-          </a:p>
-        </p:txBody>
-      </p:sp>
-      <p:sp>
-        <p:nvSpPr>
-          <p:cNvPr id="8" name="TextBox 7"/>
-          <p:cNvSpPr txBox="1"/>
-          <p:nvPr/>
-        </p:nvSpPr>
-        <p:spPr>
-          <a:xfrm>
-            <a:off x="502920" y="5806440"/>
-            <a:ext cx="1828800" cy="320040"/>
-          </a:xfrm>
-          <a:prstGeom prst="rect">
-            <a:avLst/>
-          </a:prstGeom>
-          <a:noFill/>
-        </p:spPr>
-        <p:txBody>
-          <a:bodyPr wrap="square" anchor="t">
-            <a:spAutoFit/>
-          </a:bodyPr>
-          <a:lstStyle/>
-          <a:p>
-            <a:pPr algn="ctr"/>
-            <a:r>
-              <a:rPr sz="1200" b="0" i="0">
-                <a:solidFill>
-                  <a:srgbClr val="52514E"/>
-                </a:solidFill>
-                <a:latin typeface="Calibri"/>
-              </a:rPr>
-              <a:t>Critical</a:t>
-            </a:r>
-          </a:p>
-        </p:txBody>
-      </p:sp>
-      <p:sp>
-        <p:nvSpPr>
-          <p:cNvPr id="9" name="Rectangle 8"/>
-          <p:cNvSpPr/>
-          <p:nvPr/>
-        </p:nvSpPr>
-        <p:spPr>
-          <a:xfrm>
-            <a:off x="2468880" y="4937760"/>
-            <a:ext cx="1828800" cy="822960"/>
-          </a:xfrm>
-          <a:prstGeom prst="rect">
-            <a:avLst/>
-          </a:prstGeom>
-          <a:solidFill>
-            <a:srgbClr val="EC835A"/>
-          </a:solidFill>
-          <a:ln>
-            <a:noFill/>
-          </a:ln>
-          <a:effectLst/>
-        </p:spPr>
-        <p:style>
-          <a:lnRef idx="1">
-            <a:schemeClr val="accent1"/>
-          </a:lnRef>
-          <a:fillRef idx="3">
-            <a:schemeClr val="accent1"/>
-          </a:fillRef>
-          <a:effectRef idx="2">
-            <a:schemeClr val="accent1"/>
-          </a:effectRef>
-          <a:fontRef idx="minor">
-            <a:schemeClr val="lt1"/>
-          </a:fontRef>
-        </p:style>
-        <p:txBody>
-          <a:bodyPr rtlCol="0" anchor="ctr"/>
-          <a:lstStyle/>
-          <a:p>
-            <a:pPr algn="ctr"/>
-            <a:endParaRPr/>
-          </a:p>
-        </p:txBody>
-      </p:sp>
-      <p:sp>
-        <p:nvSpPr>
-          <p:cNvPr id="10" name="TextBox 9"/>
-          <p:cNvSpPr txBox="1"/>
-          <p:nvPr/>
-        </p:nvSpPr>
-        <p:spPr>
-          <a:xfrm>
-            <a:off x="2468880" y="5806440"/>
-            <a:ext cx="1828800" cy="320040"/>
-          </a:xfrm>
-          <a:prstGeom prst="rect">
-            <a:avLst/>
-          </a:prstGeom>
-          <a:noFill/>
-        </p:spPr>
-        <p:txBody>
-          <a:bodyPr wrap="square" anchor="t">
-            <a:spAutoFit/>
-          </a:bodyPr>
-          <a:lstStyle/>
-          <a:p>
-            <a:pPr algn="ctr"/>
-            <a:r>
-              <a:rPr sz="1200" b="0" i="0">
-                <a:solidFill>
-                  <a:srgbClr val="52514E"/>
-                </a:solidFill>
-                <a:latin typeface="Calibri"/>
-              </a:rPr>
-              <a:t>High</a:t>
-            </a:r>
-          </a:p>
-        </p:txBody>
-      </p:sp>
-      <p:sp>
-        <p:nvSpPr>
-          <p:cNvPr id="11" name="Rectangle 10"/>
-          <p:cNvSpPr/>
-          <p:nvPr/>
-        </p:nvSpPr>
-        <p:spPr>
-          <a:xfrm>
-            <a:off x="4434840" y="4937760"/>
-            <a:ext cx="1828800" cy="822960"/>
-          </a:xfrm>
-          <a:prstGeom prst="rect">
-            <a:avLst/>
-          </a:prstGeom>
-          <a:solidFill>
-            <a:srgbClr val="FAB219"/>
-          </a:solidFill>
-          <a:ln>
-            <a:noFill/>
-          </a:ln>
-          <a:effectLst/>
-        </p:spPr>
-        <p:style>
-          <a:lnRef idx="1">
-            <a:schemeClr val="accent1"/>
-          </a:lnRef>
-          <a:fillRef idx="3">
-            <a:schemeClr val="accent1"/>
-          </a:fillRef>
-          <a:effectRef idx="2">
-            <a:schemeClr val="accent1"/>
-          </a:effectRef>
-          <a:fontRef idx="minor">
-            <a:schemeClr val="lt1"/>
-          </a:fontRef>
-        </p:style>
-        <p:txBody>
-          <a:bodyPr rtlCol="0" anchor="ctr"/>
-          <a:lstStyle/>
-          <a:p>
-            <a:pPr algn="ctr"/>
-            <a:endParaRPr/>
-          </a:p>
-        </p:txBody>
-      </p:sp>
-      <p:sp>
-        <p:nvSpPr>
-          <p:cNvPr id="12" name="TextBox 11"/>
-          <p:cNvSpPr txBox="1"/>
-          <p:nvPr/>
-        </p:nvSpPr>
-        <p:spPr>
-          <a:xfrm>
-            <a:off x="4434840" y="5806440"/>
-            <a:ext cx="1828800" cy="320040"/>
-          </a:xfrm>
-          <a:prstGeom prst="rect">
-            <a:avLst/>
-          </a:prstGeom>
-          <a:noFill/>
-        </p:spPr>
-        <p:txBody>
-          <a:bodyPr wrap="square" anchor="t">
-            <a:spAutoFit/>
-          </a:bodyPr>
-          <a:lstStyle/>
-          <a:p>
-            <a:pPr algn="ctr"/>
-            <a:r>
-              <a:rPr sz="1200" b="0" i="0">
-                <a:solidFill>
-                  <a:srgbClr val="52514E"/>
-                </a:solidFill>
-                <a:latin typeface="Calibri"/>
-              </a:rPr>
-              <a:t>Medium</a:t>
-            </a:r>
-          </a:p>
-        </p:txBody>
-      </p:sp>
-      <p:sp>
-        <p:nvSpPr>
-          <p:cNvPr id="13" name="Rectangle 12"/>
-          <p:cNvSpPr/>
-          <p:nvPr/>
-        </p:nvSpPr>
-        <p:spPr>
-          <a:xfrm>
-            <a:off x="6400800" y="4937760"/>
-            <a:ext cx="1828800" cy="822960"/>
-          </a:xfrm>
-          <a:prstGeom prst="rect">
-            <a:avLst/>
-          </a:prstGeom>
-          <a:solidFill>
-            <a:srgbClr val="0CA30C"/>
-          </a:solidFill>
-          <a:ln>
-            <a:noFill/>
-          </a:ln>
-          <a:effectLst/>
-        </p:spPr>
-        <p:style>
-          <a:lnRef idx="1">
-            <a:schemeClr val="accent1"/>
-          </a:lnRef>
-          <a:fillRef idx="3">
-            <a:schemeClr val="accent1"/>
-          </a:fillRef>
-          <a:effectRef idx="2">
-            <a:schemeClr val="accent1"/>
-          </a:effectRef>
-          <a:fontRef idx="minor">
-            <a:schemeClr val="lt1"/>
-          </a:fontRef>
-        </p:style>
-        <p:txBody>
-          <a:bodyPr rtlCol="0" anchor="ctr"/>
-          <a:lstStyle/>
-          <a:p>
-            <a:pPr algn="ctr"/>
-            <a:endParaRPr/>
-          </a:p>
-        </p:txBody>
-      </p:sp>
-      <p:sp>
-        <p:nvSpPr>
-          <p:cNvPr id="14" name="TextBox 13"/>
-          <p:cNvSpPr txBox="1"/>
-          <p:nvPr/>
-        </p:nvSpPr>
-        <p:spPr>
-          <a:xfrm>
-            <a:off x="6400800" y="5806440"/>
-            <a:ext cx="1828800" cy="320040"/>
-          </a:xfrm>
-          <a:prstGeom prst="rect">
-            <a:avLst/>
-          </a:prstGeom>
-          <a:noFill/>
-        </p:spPr>
-        <p:txBody>
-          <a:bodyPr wrap="square" anchor="t">
-            <a:spAutoFit/>
-          </a:bodyPr>
-          <a:lstStyle/>
-          <a:p>
-            <a:pPr algn="ctr"/>
-            <a:r>
-              <a:rPr sz="1200" b="0" i="0">
-                <a:solidFill>
-                  <a:srgbClr val="52514E"/>
-                </a:solidFill>
-                <a:latin typeface="Calibri"/>
-              </a:rPr>
-              <a:t>Low</a:t>
-            </a:r>
-          </a:p>
-        </p:txBody>
-      </p:sp>
-      <p:sp>
-        <p:nvSpPr>
-          <p:cNvPr id="15" name="Rectangle 14"/>
-          <p:cNvSpPr/>
-          <p:nvPr/>
-        </p:nvSpPr>
-        <p:spPr>
-          <a:xfrm>
-            <a:off x="8366760" y="4937760"/>
-            <a:ext cx="1828800" cy="822960"/>
-          </a:xfrm>
-          <a:prstGeom prst="rect">
-            <a:avLst/>
-          </a:prstGeom>
-          <a:solidFill>
-            <a:srgbClr val="2A78D6"/>
-          </a:solidFill>
-          <a:ln>
-            <a:noFill/>
-          </a:ln>
-          <a:effectLst/>
-        </p:spPr>
-        <p:style>
-          <a:lnRef idx="1">
-            <a:schemeClr val="accent1"/>
-          </a:lnRef>
-          <a:fillRef idx="3">
-            <a:schemeClr val="accent1"/>
-          </a:fillRef>
-          <a:effectRef idx="2">
-            <a:schemeClr val="accent1"/>
-          </a:effectRef>
-          <a:fontRef idx="minor">
-            <a:schemeClr val="lt1"/>
-          </a:fontRef>
-        </p:style>
-        <p:txBody>
-          <a:bodyPr rtlCol="0" anchor="ctr"/>
-          <a:lstStyle/>
-          <a:p>
-            <a:pPr algn="ctr"/>
-            <a:endParaRPr/>
-          </a:p>
-        </p:txBody>
-      </p:sp>
-      <p:sp>
-        <p:nvSpPr>
-          <p:cNvPr id="16" name="TextBox 15"/>
-          <p:cNvSpPr txBox="1"/>
-          <p:nvPr/>
-        </p:nvSpPr>
-        <p:spPr>
-          <a:xfrm>
-            <a:off x="8366760" y="5806440"/>
-            <a:ext cx="1828800" cy="320040"/>
-          </a:xfrm>
-          <a:prstGeom prst="rect">
-            <a:avLst/>
-          </a:prstGeom>
-          <a:noFill/>
-        </p:spPr>
-        <p:txBody>
-          <a:bodyPr wrap="square" anchor="t">
-            <a:spAutoFit/>
-          </a:bodyPr>
-          <a:lstStyle/>
-          <a:p>
-            <a:pPr algn="ctr"/>
-            <a:r>
-              <a:rPr sz="1200" b="0" i="0">
-                <a:solidFill>
-                  <a:srgbClr val="52514E"/>
-                </a:solidFill>
-                <a:latin typeface="Calibri"/>
-              </a:rPr>
-              <a:t>Brand</a:t>
-            </a:r>
-          </a:p>
-        </p:txBody>
-      </p:sp>
-      <p:sp>
-        <p:nvSpPr>
-          <p:cNvPr id="17" name="TextBox 16"/>
+              <a:t>›  Every action can be edited or deleted afterward — nothing the system recommends is locked in.</a:t>
+            </a:r>
+          </a:p>
+        </p:txBody>
+      </p:sp>
+      <p:sp>
+        <p:nvSpPr>
+          <p:cNvPr id="7" name="TextBox 6"/>
           <p:cNvSpPr txBox="1"/>
           <p:nvPr/>
         </p:nvSpPr>
@@ -6564,27 +6135,27 @@
           <a:noFill/>
         </p:spPr>
         <p:txBody>
-          <a:bodyPr wrap="square" anchor="t">
+          <a:bodyPr wrap="none">
             <a:spAutoFit/>
           </a:bodyPr>
           <a:lstStyle/>
           <a:p>
             <a:pPr algn="r"/>
             <a:r>
-              <a:rPr sz="1100" b="0" i="0">
+              <a:rPr sz="1100">
                 <a:solidFill>
                   <a:srgbClr val="898781"/>
                 </a:solidFill>
                 <a:latin typeface="Consolas"/>
               </a:rPr>
-              <a:t>18</a:t>
-            </a:r>
-          </a:p>
-        </p:txBody>
-      </p:sp>
-      <p:sp>
-        <p:nvSpPr>
-          <p:cNvPr id="18" name="TextBox 17"/>
+              <a:t>15</a:t>
+            </a:r>
+          </a:p>
+        </p:txBody>
+      </p:sp>
+      <p:sp>
+        <p:nvSpPr>
+          <p:cNvPr id="8" name="TextBox 7"/>
           <p:cNvSpPr txBox="1"/>
           <p:nvPr/>
         </p:nvSpPr>
@@ -6599,14 +6170,13 @@
           <a:noFill/>
         </p:spPr>
         <p:txBody>
-          <a:bodyPr wrap="square" anchor="t">
-            <a:spAutoFit/>
-          </a:bodyPr>
-          <a:lstStyle/>
-          <a:p>
-            <a:pPr algn="l"/>
-            <a:r>
-              <a:rPr sz="1000" b="0" i="0">
+          <a:bodyPr wrap="none">
+            <a:spAutoFit/>
+          </a:bodyPr>
+          <a:lstStyle/>
+          <a:p>
+            <a:r>
+              <a:rPr sz="1000">
                 <a:solidFill>
                   <a:srgbClr val="898781"/>
                 </a:solidFill>
@@ -6617,6 +6187,30 @@
           </a:p>
         </p:txBody>
       </p:sp>
+      <p:pic>
+        <p:nvPicPr>
+          <p:cNvPr id="9" name="Picture 8" descr="shot_cardedit2_cropped.png"/>
+          <p:cNvPicPr>
+            <a:picLocks noChangeAspect="1"/>
+          </p:cNvPicPr>
+          <p:nvPr/>
+        </p:nvPicPr>
+        <p:blipFill>
+          <a:blip r:embed="rId2"/>
+          <a:stretch>
+            <a:fillRect/>
+          </a:stretch>
+        </p:blipFill>
+        <p:spPr>
+          <a:xfrm>
+            <a:off x="502920" y="1760220"/>
+            <a:ext cx="6949440" cy="4343400"/>
+          </a:xfrm>
+          <a:prstGeom prst="rect">
+            <a:avLst/>
+          </a:prstGeom>
+        </p:spPr>
+      </p:pic>
     </p:spTree>
   </p:cSld>
   <p:clrMapOvr>
@@ -6626,7 +6220,7 @@
 </file>
 
 <file path=ppt/slides/slide16.xml><?xml version="1.0" encoding="utf-8"?>
-<p:sld xmlns:a="http://schemas.openxmlformats.org/drawingml/2006/main" xmlns:r="http://schemas.openxmlformats.org/officeDocument/2006/relationships" xmlns:p="http://schemas.openxmlformats.org/presentationml/2006/main">
+<p:sld xmlns:a="http://schemas.openxmlformats.org/drawingml/2006/main" xmlns:p="http://schemas.openxmlformats.org/presentationml/2006/main" xmlns:r="http://schemas.openxmlformats.org/officeDocument/2006/relationships">
   <p:cSld>
     <p:spTree>
       <p:nvGrpSpPr>
@@ -6634,14 +6228,7 @@
         <p:cNvGrpSpPr/>
         <p:nvPr/>
       </p:nvGrpSpPr>
-      <p:grpSpPr>
-        <a:xfrm>
-          <a:off x="0" y="0"/>
-          <a:ext cx="0" cy="0"/>
-          <a:chOff x="0" y="0"/>
-          <a:chExt cx="0" cy="0"/>
-        </a:xfrm>
-      </p:grpSpPr>
+      <p:grpSpPr/>
       <p:sp>
         <p:nvSpPr>
           <p:cNvPr id="2" name="Rectangle 1"/>
@@ -6683,7 +6270,6 @@
           <a:lstStyle/>
           <a:p>
             <a:pPr algn="ctr"/>
-            <a:endParaRPr/>
           </a:p>
         </p:txBody>
       </p:sp>
@@ -6704,20 +6290,19 @@
           <a:noFill/>
         </p:spPr>
         <p:txBody>
-          <a:bodyPr wrap="square" anchor="t">
-            <a:spAutoFit/>
-          </a:bodyPr>
-          <a:lstStyle/>
-          <a:p>
-            <a:pPr algn="l"/>
-            <a:r>
-              <a:rPr sz="1200" b="1" i="0">
+          <a:bodyPr wrap="none">
+            <a:spAutoFit/>
+          </a:bodyPr>
+          <a:lstStyle/>
+          <a:p>
+            <a:r>
+              <a:rPr sz="1200" b="1">
                 <a:solidFill>
                   <a:srgbClr val="2A78D6"/>
                 </a:solidFill>
                 <a:latin typeface="Consolas"/>
               </a:rPr>
-              <a:t>RELIABILITY</a:t>
+              <a:t>BOOKING &amp; SCHEDULING</a:t>
             </a:r>
           </a:p>
         </p:txBody>
@@ -6739,20 +6324,19 @@
           <a:noFill/>
         </p:spPr>
         <p:txBody>
-          <a:bodyPr wrap="square" anchor="t">
-            <a:spAutoFit/>
-          </a:bodyPr>
-          <a:lstStyle/>
-          <a:p>
-            <a:pPr algn="l"/>
-            <a:r>
-              <a:rPr sz="3000" b="1" i="0">
+          <a:bodyPr wrap="none">
+            <a:spAutoFit/>
+          </a:bodyPr>
+          <a:lstStyle/>
+          <a:p>
+            <a:r>
+              <a:rPr sz="2800" b="1">
                 <a:solidFill>
                   <a:srgbClr val="0B0B0B"/>
                 </a:solidFill>
                 <a:latin typeface="Calibri"/>
               </a:rPr>
-              <a:t>32 tests, all passing in under a second</a:t>
+              <a:t>A Calendar, Built Like One</a:t>
             </a:r>
           </a:p>
         </p:txBody>
@@ -6798,7 +6382,6 @@
           <a:lstStyle/>
           <a:p>
             <a:pPr algn="ctr"/>
-            <a:endParaRPr/>
           </a:p>
         </p:txBody>
       </p:sp>
@@ -6810,8 +6393,8 @@
         </p:nvSpPr>
         <p:spPr>
           <a:xfrm>
-            <a:off x="502920" y="1783080"/>
-            <a:ext cx="11155680" cy="4114800"/>
+            <a:off x="7772400" y="1828800"/>
+            <a:ext cx="3931920" cy="4114800"/>
           </a:xfrm>
           <a:prstGeom prst="rect">
             <a:avLst/>
@@ -6826,151 +6409,65 @@
           <a:p>
             <a:pPr>
               <a:spcAft>
-                <a:spcPts val="800"/>
+                <a:spcPts val="1000"/>
               </a:spcAft>
             </a:pPr>
             <a:r>
-              <a:rPr sz="1600" b="1">
+              <a:rPr sz="1600">
                 <a:solidFill>
                   <a:srgbClr val="0B0B0B"/>
                 </a:solidFill>
                 <a:latin typeface="Calibri"/>
               </a:rPr>
-              <a:t>›  Validation</a:t>
-            </a:r>
-            <a:r>
-              <a:rPr sz="1600">
-                <a:solidFill>
-                  <a:srgbClr val="0B0B0B"/>
-                </a:solidFill>
-                <a:latin typeface="Calibri"/>
-              </a:rPr>
-              <a:t>— missing attendance stays missing, ownership mismatches are flagged not dropped.</a:t>
+              <a:t>›  A real month grid — Prev/Next navigation, today highlighted, laid out like a familiar calendar app.</a:t>
             </a:r>
           </a:p>
           <a:p>
             <a:pPr>
               <a:spcAft>
-                <a:spcPts val="800"/>
+                <a:spcPts val="1000"/>
               </a:spcAft>
             </a:pPr>
             <a:r>
-              <a:rPr sz="1600" b="1">
+              <a:rPr sz="1600">
                 <a:solidFill>
                   <a:srgbClr val="0B0B0B"/>
                 </a:solidFill>
                 <a:latin typeface="Calibri"/>
               </a:rPr>
-              <a:t>›  Patterns</a:t>
-            </a:r>
-            <a:r>
-              <a:rPr sz="1600">
-                <a:solidFill>
-                  <a:srgbClr val="0B0B0B"/>
-                </a:solidFill>
-                <a:latin typeface="Calibri"/>
-              </a:rPr>
-              <a:t>— each rule fires (and doesn't false-fire) against hand-built scenarios.</a:t>
+              <a:t>›  Shows only approved sessions: booked and completed — pending time options never clutter the view.</a:t>
             </a:r>
           </a:p>
           <a:p>
             <a:pPr>
               <a:spcAft>
-                <a:spcPts val="800"/>
+                <a:spcPts val="1000"/>
               </a:spcAft>
             </a:pPr>
             <a:r>
-              <a:rPr sz="1600" b="1">
+              <a:rPr sz="1600">
                 <a:solidFill>
                   <a:srgbClr val="0B0B0B"/>
                 </a:solidFill>
                 <a:latin typeface="Calibri"/>
               </a:rPr>
-              <a:t>›  Risk</a:t>
-            </a:r>
-            <a:r>
-              <a:rPr sz="1600">
-                <a:solidFill>
-                  <a:srgbClr val="0B0B0B"/>
-                </a:solidFill>
-                <a:latin typeface="Calibri"/>
-              </a:rPr>
-              <a:t>— a severe dropout always outranks a stable student; score always stays in [0,100].</a:t>
+              <a:t>›  Proposing time options creates a tracked intervention immediately, before a student even confirms one.</a:t>
             </a:r>
           </a:p>
           <a:p>
             <a:pPr>
               <a:spcAft>
-                <a:spcPts val="800"/>
+                <a:spcPts val="1000"/>
               </a:spcAft>
             </a:pPr>
             <a:r>
-              <a:rPr sz="1600" b="1">
+              <a:rPr sz="1600">
                 <a:solidFill>
                   <a:srgbClr val="0B0B0B"/>
                 </a:solidFill>
                 <a:latin typeface="Calibri"/>
               </a:rPr>
-              <a:t>›  Coverage math</a:t>
-            </a:r>
-            <a:r>
-              <a:rPr sz="1600">
-                <a:solidFill>
-                  <a:srgbClr val="0B0B0B"/>
-                </a:solidFill>
-                <a:latin typeface="Calibri"/>
-              </a:rPr>
-              <a:t>— a recommendation or a no-answer call never counts as success.</a:t>
-            </a:r>
-          </a:p>
-          <a:p>
-            <a:pPr>
-              <a:spcAft>
-                <a:spcPts val="800"/>
-              </a:spcAft>
-            </a:pPr>
-            <a:r>
-              <a:rPr sz="1600" b="1">
-                <a:solidFill>
-                  <a:srgbClr val="0B0B0B"/>
-                </a:solidFill>
-                <a:latin typeface="Calibri"/>
-              </a:rPr>
-              <a:t>›  LLM</a:t>
-            </a:r>
-            <a:r>
-              <a:rPr sz="1600">
-                <a:solidFill>
-                  <a:srgbClr val="0B0B0B"/>
-                </a:solidFill>
-                <a:latin typeface="Calibri"/>
-              </a:rPr>
-              <a:t>— mocked end-to-end: valid response, retry-then-succeed, fallback-after-two-failures.</a:t>
-            </a:r>
-          </a:p>
-          <a:p>
-            <a:pPr>
-              <a:spcAft>
-                <a:spcPts val="800"/>
-              </a:spcAft>
-            </a:pPr>
-            <a:r>
-              <a:rPr sz="1600" b="1">
-                <a:solidFill>
-                  <a:srgbClr val="0B0B0B"/>
-                </a:solidFill>
-                <a:latin typeface="Calibri"/>
-              </a:rPr>
-              <a:t>›  Access control</a:t>
-            </a:r>
-            <a:r>
-              <a:rPr sz="1600">
-                <a:solidFill>
-                  <a:srgbClr val="0B0B0B"/>
-                </a:solidFill>
-                <a:latin typeface="Calibri"/>
-              </a:rPr>
-              <a:t>— a facilitator's query never returns another facilitator's students.</a:t>
+              <a:t>›  Mark a session done, reschedule it, or cancel it — all from the same page.</a:t>
             </a:r>
           </a:p>
         </p:txBody>
@@ -6992,20 +6489,20 @@
           <a:noFill/>
         </p:spPr>
         <p:txBody>
-          <a:bodyPr wrap="square" anchor="t">
+          <a:bodyPr wrap="none">
             <a:spAutoFit/>
           </a:bodyPr>
           <a:lstStyle/>
           <a:p>
             <a:pPr algn="r"/>
             <a:r>
-              <a:rPr sz="1100" b="0" i="0">
+              <a:rPr sz="1100">
                 <a:solidFill>
                   <a:srgbClr val="898781"/>
                 </a:solidFill>
                 <a:latin typeface="Consolas"/>
               </a:rPr>
-              <a:t>19</a:t>
+              <a:t>16</a:t>
             </a:r>
           </a:p>
         </p:txBody>
@@ -7027,14 +6524,13 @@
           <a:noFill/>
         </p:spPr>
         <p:txBody>
-          <a:bodyPr wrap="square" anchor="t">
-            <a:spAutoFit/>
-          </a:bodyPr>
-          <a:lstStyle/>
-          <a:p>
-            <a:pPr algn="l"/>
-            <a:r>
-              <a:rPr sz="1000" b="0" i="0">
+          <a:bodyPr wrap="none">
+            <a:spAutoFit/>
+          </a:bodyPr>
+          <a:lstStyle/>
+          <a:p>
+            <a:r>
+              <a:rPr sz="1000">
                 <a:solidFill>
                   <a:srgbClr val="898781"/>
                 </a:solidFill>
@@ -7045,6 +6541,30 @@
           </a:p>
         </p:txBody>
       </p:sp>
+      <p:pic>
+        <p:nvPicPr>
+          <p:cNvPr id="9" name="Picture 8" descr="shot_calendar2.png"/>
+          <p:cNvPicPr>
+            <a:picLocks noChangeAspect="1"/>
+          </p:cNvPicPr>
+          <p:nvPr/>
+        </p:nvPicPr>
+        <p:blipFill>
+          <a:blip r:embed="rId2"/>
+          <a:stretch>
+            <a:fillRect/>
+          </a:stretch>
+        </p:blipFill>
+        <p:spPr>
+          <a:xfrm>
+            <a:off x="502920" y="1760220"/>
+            <a:ext cx="6949440" cy="4343400"/>
+          </a:xfrm>
+          <a:prstGeom prst="rect">
+            <a:avLst/>
+          </a:prstGeom>
+        </p:spPr>
+      </p:pic>
     </p:spTree>
   </p:cSld>
   <p:clrMapOvr>
@@ -7054,7 +6574,7 @@
 </file>
 
 <file path=ppt/slides/slide17.xml><?xml version="1.0" encoding="utf-8"?>
-<p:sld xmlns:a="http://schemas.openxmlformats.org/drawingml/2006/main" xmlns:r="http://schemas.openxmlformats.org/officeDocument/2006/relationships" xmlns:p="http://schemas.openxmlformats.org/presentationml/2006/main">
+<p:sld xmlns:a="http://schemas.openxmlformats.org/drawingml/2006/main" xmlns:p="http://schemas.openxmlformats.org/presentationml/2006/main" xmlns:r="http://schemas.openxmlformats.org/officeDocument/2006/relationships">
   <p:cSld>
     <p:spTree>
       <p:nvGrpSpPr>
@@ -7062,14 +6582,7 @@
         <p:cNvGrpSpPr/>
         <p:nvPr/>
       </p:nvGrpSpPr>
-      <p:grpSpPr>
-        <a:xfrm>
-          <a:off x="0" y="0"/>
-          <a:ext cx="0" cy="0"/>
-          <a:chOff x="0" y="0"/>
-          <a:chExt cx="0" cy="0"/>
-        </a:xfrm>
-      </p:grpSpPr>
+      <p:grpSpPr/>
       <p:sp>
         <p:nvSpPr>
           <p:cNvPr id="2" name="Rectangle 1"/>
@@ -7111,7 +6624,6 @@
           <a:lstStyle/>
           <a:p>
             <a:pPr algn="ctr"/>
-            <a:endParaRPr/>
           </a:p>
         </p:txBody>
       </p:sp>
@@ -7132,20 +6644,19 @@
           <a:noFill/>
         </p:spPr>
         <p:txBody>
-          <a:bodyPr wrap="square" anchor="t">
-            <a:spAutoFit/>
-          </a:bodyPr>
-          <a:lstStyle/>
-          <a:p>
-            <a:pPr algn="l"/>
-            <a:r>
-              <a:rPr sz="1200" b="1" i="0">
+          <a:bodyPr wrap="none">
+            <a:spAutoFit/>
+          </a:bodyPr>
+          <a:lstStyle/>
+          <a:p>
+            <a:r>
+              <a:rPr sz="1200" b="1">
                 <a:solidFill>
                   <a:srgbClr val="2A78D6"/>
                 </a:solidFill>
                 <a:latin typeface="Consolas"/>
               </a:rPr>
-              <a:t>WHAT WE DELIBERATELY CUT</a:t>
+              <a:t>A CHAT ASSISTANT, GROUNDED IN YOUR DATA</a:t>
             </a:r>
           </a:p>
         </p:txBody>
@@ -7167,20 +6678,19 @@
           <a:noFill/>
         </p:spPr>
         <p:txBody>
-          <a:bodyPr wrap="square" anchor="t">
-            <a:spAutoFit/>
-          </a:bodyPr>
-          <a:lstStyle/>
-          <a:p>
-            <a:pPr algn="l"/>
-            <a:r>
-              <a:rPr sz="3000" b="1" i="0">
+          <a:bodyPr wrap="none">
+            <a:spAutoFit/>
+          </a:bodyPr>
+          <a:lstStyle/>
+          <a:p>
+            <a:r>
+              <a:rPr sz="2800" b="1">
                 <a:solidFill>
                   <a:srgbClr val="0B0B0B"/>
                 </a:solidFill>
                 <a:latin typeface="Calibri"/>
               </a:rPr>
-              <a:t>And why</a:t>
+              <a:t>Ask AI</a:t>
             </a:r>
           </a:p>
         </p:txBody>
@@ -7226,247 +6736,99 @@
           <a:lstStyle/>
           <a:p>
             <a:pPr algn="ctr"/>
-            <a:endParaRPr/>
-          </a:p>
-        </p:txBody>
-      </p:sp>
-      <p:sp>
-        <p:nvSpPr>
-          <p:cNvPr id="6" name="Rectangle 5"/>
-          <p:cNvSpPr/>
-          <p:nvPr/>
-        </p:nvSpPr>
-        <p:spPr>
-          <a:xfrm>
-            <a:off x="502920" y="1828800"/>
-            <a:ext cx="11155680" cy="1463040"/>
-          </a:xfrm>
-          <a:prstGeom prst="rect">
-            <a:avLst/>
-          </a:prstGeom>
-          <a:solidFill>
-            <a:srgbClr val="FFFFFF"/>
-          </a:solidFill>
-          <a:ln w="9525">
-            <a:solidFill>
-              <a:srgbClr val="E1E0D9"/>
-            </a:solidFill>
-          </a:ln>
-          <a:effectLst/>
-        </p:spPr>
-        <p:style>
-          <a:lnRef idx="1">
-            <a:schemeClr val="accent1"/>
-          </a:lnRef>
-          <a:fillRef idx="3">
-            <a:schemeClr val="accent1"/>
-          </a:fillRef>
-          <a:effectRef idx="2">
-            <a:schemeClr val="accent1"/>
-          </a:effectRef>
-          <a:fontRef idx="minor">
-            <a:schemeClr val="lt1"/>
-          </a:fontRef>
-        </p:style>
-        <p:txBody>
-          <a:bodyPr rtlCol="0" anchor="ctr"/>
-          <a:lstStyle/>
-          <a:p>
-            <a:pPr algn="ctr"/>
-            <a:endParaRPr/>
+          </a:p>
+        </p:txBody>
+      </p:sp>
+      <p:sp>
+        <p:nvSpPr>
+          <p:cNvPr id="6" name="TextBox 5"/>
+          <p:cNvSpPr txBox="1"/>
+          <p:nvPr/>
+        </p:nvSpPr>
+        <p:spPr>
+          <a:xfrm>
+            <a:off x="7772400" y="1828800"/>
+            <a:ext cx="3931920" cy="4114800"/>
+          </a:xfrm>
+          <a:prstGeom prst="rect">
+            <a:avLst/>
+          </a:prstGeom>
+          <a:noFill/>
+        </p:spPr>
+        <p:txBody>
+          <a:bodyPr wrap="square">
+            <a:spAutoFit/>
+          </a:bodyPr>
+          <a:lstStyle/>
+          <a:p>
+            <a:pPr>
+              <a:spcAft>
+                <a:spcPts val="1000"/>
+              </a:spcAft>
+            </a:pPr>
+            <a:r>
+              <a:rPr sz="1600">
+                <a:solidFill>
+                  <a:srgbClr val="0B0B0B"/>
+                </a:solidFill>
+                <a:latin typeface="Calibri"/>
+              </a:rPr>
+              <a:t>›  Ask about risk levels, coverage, overdue actions, or a specific student, in plain language.</a:t>
+            </a:r>
+          </a:p>
+          <a:p>
+            <a:pPr>
+              <a:spcAft>
+                <a:spcPts val="1000"/>
+              </a:spcAft>
+            </a:pPr>
+            <a:r>
+              <a:rPr sz="1600">
+                <a:solidFill>
+                  <a:srgbClr val="0B0B0B"/>
+                </a:solidFill>
+                <a:latin typeface="Calibri"/>
+              </a:rPr>
+              <a:t>›  Every answer is built from a live digest of your own roster and intervention data — never a generic knowledge base with no connection to your students.</a:t>
+            </a:r>
+          </a:p>
+          <a:p>
+            <a:pPr>
+              <a:spcAft>
+                <a:spcPts val="1000"/>
+              </a:spcAft>
+            </a:pPr>
+            <a:r>
+              <a:rPr sz="1600">
+                <a:solidFill>
+                  <a:srgbClr val="0B0B0B"/>
+                </a:solidFill>
+                <a:latin typeface="Calibri"/>
+              </a:rPr>
+              <a:t>›  Naming a student pulls in their full record automatically; asking about something the data doesn't cover gets an honest “I don't know,” never a guess.</a:t>
+            </a:r>
+          </a:p>
+          <a:p>
+            <a:pPr>
+              <a:spcAft>
+                <a:spcPts val="1000"/>
+              </a:spcAft>
+            </a:pPr>
+            <a:r>
+              <a:rPr sz="1600">
+                <a:solidFill>
+                  <a:srgbClr val="0B0B0B"/>
+                </a:solidFill>
+                <a:latin typeface="Calibri"/>
+              </a:rPr>
+              <a:t>›  Conversations are saved, renameable, and switchable — pick up where you left off.</a:t>
+            </a:r>
           </a:p>
         </p:txBody>
       </p:sp>
       <p:sp>
         <p:nvSpPr>
           <p:cNvPr id="7" name="TextBox 6"/>
-          <p:cNvSpPr txBox="1"/>
-          <p:nvPr/>
-        </p:nvSpPr>
-        <p:spPr>
-          <a:xfrm>
-            <a:off x="731520" y="1965960"/>
-            <a:ext cx="10698480" cy="365760"/>
-          </a:xfrm>
-          <a:prstGeom prst="rect">
-            <a:avLst/>
-          </a:prstGeom>
-          <a:noFill/>
-        </p:spPr>
-        <p:txBody>
-          <a:bodyPr wrap="square" anchor="t">
-            <a:spAutoFit/>
-          </a:bodyPr>
-          <a:lstStyle/>
-          <a:p>
-            <a:pPr algn="l"/>
-            <a:r>
-              <a:rPr sz="1600" b="1" i="0">
-                <a:solidFill>
-                  <a:srgbClr val="0B0B0B"/>
-                </a:solidFill>
-                <a:latin typeface="Calibri"/>
-              </a:rPr>
-              <a:t>1.  No trained ML model</a:t>
-            </a:r>
-          </a:p>
-        </p:txBody>
-      </p:sp>
-      <p:sp>
-        <p:nvSpPr>
-          <p:cNvPr id="8" name="TextBox 7"/>
-          <p:cNvSpPr txBox="1"/>
-          <p:nvPr/>
-        </p:nvSpPr>
-        <p:spPr>
-          <a:xfrm>
-            <a:off x="731520" y="2377440"/>
-            <a:ext cx="10698480" cy="822960"/>
-          </a:xfrm>
-          <a:prstGeom prst="rect">
-            <a:avLst/>
-          </a:prstGeom>
-          <a:noFill/>
-        </p:spPr>
-        <p:txBody>
-          <a:bodyPr wrap="square" anchor="t">
-            <a:spAutoFit/>
-          </a:bodyPr>
-          <a:lstStyle/>
-          <a:p>
-            <a:pPr algn="l"/>
-            <a:r>
-              <a:rPr sz="1350" b="0" i="0">
-                <a:solidFill>
-                  <a:srgbClr val="52514E"/>
-                </a:solidFill>
-                <a:latin typeface="Calibri"/>
-              </a:rPr>
-              <a:t>Quiz 2 outcome labels don't exist yet — nothing to validate a model against. An auditable rule set is more trustworthy for a facilitator acting on it today.</a:t>
-            </a:r>
-          </a:p>
-        </p:txBody>
-      </p:sp>
-      <p:sp>
-        <p:nvSpPr>
-          <p:cNvPr id="9" name="Rectangle 8"/>
-          <p:cNvSpPr/>
-          <p:nvPr/>
-        </p:nvSpPr>
-        <p:spPr>
-          <a:xfrm>
-            <a:off x="502920" y="3566160"/>
-            <a:ext cx="11155680" cy="1463040"/>
-          </a:xfrm>
-          <a:prstGeom prst="rect">
-            <a:avLst/>
-          </a:prstGeom>
-          <a:solidFill>
-            <a:srgbClr val="FFFFFF"/>
-          </a:solidFill>
-          <a:ln w="9525">
-            <a:solidFill>
-              <a:srgbClr val="E1E0D9"/>
-            </a:solidFill>
-          </a:ln>
-          <a:effectLst/>
-        </p:spPr>
-        <p:style>
-          <a:lnRef idx="1">
-            <a:schemeClr val="accent1"/>
-          </a:lnRef>
-          <a:fillRef idx="3">
-            <a:schemeClr val="accent1"/>
-          </a:fillRef>
-          <a:effectRef idx="2">
-            <a:schemeClr val="accent1"/>
-          </a:effectRef>
-          <a:fontRef idx="minor">
-            <a:schemeClr val="lt1"/>
-          </a:fontRef>
-        </p:style>
-        <p:txBody>
-          <a:bodyPr rtlCol="0" anchor="ctr"/>
-          <a:lstStyle/>
-          <a:p>
-            <a:pPr algn="ctr"/>
-            <a:endParaRPr/>
-          </a:p>
-        </p:txBody>
-      </p:sp>
-      <p:sp>
-        <p:nvSpPr>
-          <p:cNvPr id="10" name="TextBox 9"/>
-          <p:cNvSpPr txBox="1"/>
-          <p:nvPr/>
-        </p:nvSpPr>
-        <p:spPr>
-          <a:xfrm>
-            <a:off x="731520" y="3703320"/>
-            <a:ext cx="10698480" cy="365760"/>
-          </a:xfrm>
-          <a:prstGeom prst="rect">
-            <a:avLst/>
-          </a:prstGeom>
-          <a:noFill/>
-        </p:spPr>
-        <p:txBody>
-          <a:bodyPr wrap="square" anchor="t">
-            <a:spAutoFit/>
-          </a:bodyPr>
-          <a:lstStyle/>
-          <a:p>
-            <a:pPr algn="l"/>
-            <a:r>
-              <a:rPr sz="1600" b="1" i="0">
-                <a:solidFill>
-                  <a:srgbClr val="0B0B0B"/>
-                </a:solidFill>
-                <a:latin typeface="Calibri"/>
-              </a:rPr>
-              <a:t>2.  No uncontrolled automatic parent communication</a:t>
-            </a:r>
-          </a:p>
-        </p:txBody>
-      </p:sp>
-      <p:sp>
-        <p:nvSpPr>
-          <p:cNvPr id="11" name="TextBox 10"/>
-          <p:cNvSpPr txBox="1"/>
-          <p:nvPr/>
-        </p:nvSpPr>
-        <p:spPr>
-          <a:xfrm>
-            <a:off x="731520" y="4114800"/>
-            <a:ext cx="10698480" cy="822960"/>
-          </a:xfrm>
-          <a:prstGeom prst="rect">
-            <a:avLst/>
-          </a:prstGeom>
-          <a:noFill/>
-        </p:spPr>
-        <p:txBody>
-          <a:bodyPr wrap="square" anchor="t">
-            <a:spAutoFit/>
-          </a:bodyPr>
-          <a:lstStyle/>
-          <a:p>
-            <a:pPr algn="l"/>
-            <a:r>
-              <a:rPr sz="1350" b="0" i="0">
-                <a:solidFill>
-                  <a:srgbClr val="52514E"/>
-                </a:solidFill>
-                <a:latin typeface="Calibri"/>
-              </a:rPr>
-              <a:t>57% of sample notes carried an unverified facilitator/student pairing — identity and contact data need human validation first. Every send is a facilitator-reviewed dry run.</a:t>
-            </a:r>
-          </a:p>
-        </p:txBody>
-      </p:sp>
-      <p:sp>
-        <p:nvSpPr>
-          <p:cNvPr id="12" name="TextBox 11"/>
           <p:cNvSpPr txBox="1"/>
           <p:nvPr/>
         </p:nvSpPr>
@@ -7481,27 +6843,27 @@
           <a:noFill/>
         </p:spPr>
         <p:txBody>
-          <a:bodyPr wrap="square" anchor="t">
+          <a:bodyPr wrap="none">
             <a:spAutoFit/>
           </a:bodyPr>
           <a:lstStyle/>
           <a:p>
             <a:pPr algn="r"/>
             <a:r>
-              <a:rPr sz="1100" b="0" i="0">
+              <a:rPr sz="1100">
                 <a:solidFill>
                   <a:srgbClr val="898781"/>
                 </a:solidFill>
                 <a:latin typeface="Consolas"/>
               </a:rPr>
-              <a:t>20</a:t>
-            </a:r>
-          </a:p>
-        </p:txBody>
-      </p:sp>
-      <p:sp>
-        <p:nvSpPr>
-          <p:cNvPr id="13" name="TextBox 12"/>
+              <a:t>17</a:t>
+            </a:r>
+          </a:p>
+        </p:txBody>
+      </p:sp>
+      <p:sp>
+        <p:nvSpPr>
+          <p:cNvPr id="8" name="TextBox 7"/>
           <p:cNvSpPr txBox="1"/>
           <p:nvPr/>
         </p:nvSpPr>
@@ -7516,14 +6878,13 @@
           <a:noFill/>
         </p:spPr>
         <p:txBody>
-          <a:bodyPr wrap="square" anchor="t">
-            <a:spAutoFit/>
-          </a:bodyPr>
-          <a:lstStyle/>
-          <a:p>
-            <a:pPr algn="l"/>
-            <a:r>
-              <a:rPr sz="1000" b="0" i="0">
+          <a:bodyPr wrap="none">
+            <a:spAutoFit/>
+          </a:bodyPr>
+          <a:lstStyle/>
+          <a:p>
+            <a:r>
+              <a:rPr sz="1000">
                 <a:solidFill>
                   <a:srgbClr val="898781"/>
                 </a:solidFill>
@@ -7534,6 +6895,30 @@
           </a:p>
         </p:txBody>
       </p:sp>
+      <p:pic>
+        <p:nvPicPr>
+          <p:cNvPr id="9" name="Picture 8" descr="shot_askai_final.png"/>
+          <p:cNvPicPr>
+            <a:picLocks noChangeAspect="1"/>
+          </p:cNvPicPr>
+          <p:nvPr/>
+        </p:nvPicPr>
+        <p:blipFill>
+          <a:blip r:embed="rId2"/>
+          <a:stretch>
+            <a:fillRect/>
+          </a:stretch>
+        </p:blipFill>
+        <p:spPr>
+          <a:xfrm>
+            <a:off x="502920" y="1760220"/>
+            <a:ext cx="6949440" cy="4343400"/>
+          </a:xfrm>
+          <a:prstGeom prst="rect">
+            <a:avLst/>
+          </a:prstGeom>
+        </p:spPr>
+      </p:pic>
     </p:spTree>
   </p:cSld>
   <p:clrMapOvr>
@@ -7634,7 +7019,7 @@
                 </a:solidFill>
                 <a:latin typeface="Consolas"/>
               </a:rPr>
-              <a:t>WHAT'S NEXT</a:t>
+              <a:t>DESIGN SYSTEM</a:t>
             </a:r>
           </a:p>
         </p:txBody>
@@ -7669,7 +7054,7 @@
                 </a:solidFill>
                 <a:latin typeface="Calibri"/>
               </a:rPr>
-              <a:t>Closing the loop</a:t>
+              <a:t>Analyzed, adapted, not copied</a:t>
             </a:r>
           </a:p>
         </p:txBody>
@@ -7721,25 +7106,128 @@
       </p:sp>
       <p:sp>
         <p:nvSpPr>
-          <p:cNvPr id="6" name="Rectangle 5"/>
+          <p:cNvPr id="6" name="TextBox 5"/>
+          <p:cNvSpPr txBox="1"/>
+          <p:nvPr/>
+        </p:nvSpPr>
+        <p:spPr>
+          <a:xfrm>
+            <a:off x="502920" y="1783080"/>
+            <a:ext cx="11155680" cy="2926080"/>
+          </a:xfrm>
+          <a:prstGeom prst="rect">
+            <a:avLst/>
+          </a:prstGeom>
+          <a:noFill/>
+        </p:spPr>
+        <p:txBody>
+          <a:bodyPr wrap="square">
+            <a:spAutoFit/>
+          </a:bodyPr>
+          <a:lstStyle/>
+          <a:p>
+            <a:pPr>
+              <a:spcAft>
+                <a:spcPts val="800"/>
+              </a:spcAft>
+            </a:pPr>
+            <a:r>
+              <a:rPr sz="1600" b="1">
+                <a:solidFill>
+                  <a:srgbClr val="0B0B0B"/>
+                </a:solidFill>
+                <a:latin typeface="Calibri"/>
+              </a:rPr>
+              <a:t>›  Real computed styles extracted from motion.dev</a:t>
+            </a:r>
+            <a:r>
+              <a:rPr sz="1600">
+                <a:solidFill>
+                  <a:srgbClr val="0B0B0B"/>
+                </a:solidFill>
+                <a:latin typeface="Calibri"/>
+              </a:rPr>
+              <a:t>— colors, fonts, spacing, not guesswork.</a:t>
+            </a:r>
+          </a:p>
+          <a:p>
+            <a:pPr>
+              <a:spcAft>
+                <a:spcPts val="800"/>
+              </a:spcAft>
+            </a:pPr>
+            <a:r>
+              <a:rPr sz="1600" b="0">
+                <a:solidFill>
+                  <a:srgbClr val="0B0B0B"/>
+                </a:solidFill>
+                <a:latin typeface="Calibri"/>
+              </a:rPr>
+              <a:t>›  Warm near-black charcoal base, monospace technical labels, hairline dividers, accent-square section markers.</a:t>
+            </a:r>
+          </a:p>
+          <a:p>
+            <a:pPr>
+              <a:spcAft>
+                <a:spcPts val="800"/>
+              </a:spcAft>
+            </a:pPr>
+            <a:r>
+              <a:rPr sz="1600" b="1">
+                <a:solidFill>
+                  <a:srgbClr val="0B0B0B"/>
+                </a:solidFill>
+                <a:latin typeface="Calibri"/>
+              </a:rPr>
+              <a:t>›  Kept our own validated blue accent</a:t>
+            </a:r>
+            <a:r>
+              <a:rPr sz="1600">
+                <a:solidFill>
+                  <a:srgbClr val="0B0B0B"/>
+                </a:solidFill>
+                <a:latin typeface="Calibri"/>
+              </a:rPr>
+              <a:t>— reusing their signature yellow would collide with our own "Medium risk = yellow" status color.</a:t>
+            </a:r>
+          </a:p>
+          <a:p>
+            <a:pPr>
+              <a:spcAft>
+                <a:spcPts val="800"/>
+              </a:spcAft>
+            </a:pPr>
+            <a:r>
+              <a:rPr sz="1600" b="0">
+                <a:solidFill>
+                  <a:srgbClr val="0B0B0B"/>
+                </a:solidFill>
+                <a:latin typeface="Calibri"/>
+              </a:rPr>
+              <a:t>›  One shared token set (src/config.py) — the live app, the exported reports, and this deck all draw from it.</a:t>
+            </a:r>
+          </a:p>
+        </p:txBody>
+      </p:sp>
+      <p:sp>
+        <p:nvSpPr>
+          <p:cNvPr id="7" name="Rectangle 6"/>
           <p:cNvSpPr/>
           <p:nvPr/>
         </p:nvSpPr>
         <p:spPr>
           <a:xfrm>
-            <a:off x="502920" y="2103120"/>
-            <a:ext cx="1920240" cy="1051560"/>
+            <a:off x="502920" y="4937760"/>
+            <a:ext cx="1828800" cy="822960"/>
           </a:xfrm>
           <a:prstGeom prst="rect">
             <a:avLst/>
           </a:prstGeom>
           <a:solidFill>
-            <a:srgbClr val="FFFFFF"/>
+            <a:srgbClr val="D03B3B"/>
           </a:solidFill>
-          <a:ln w="22225">
-            <a:solidFill>
-              <a:srgbClr val="2A78D6"/>
-            </a:solidFill>
+          <a:ln>
+            <a:noFill/>
           </a:ln>
           <a:effectLst/>
         </p:spPr>
@@ -7768,82 +7256,35 @@
       </p:sp>
       <p:sp>
         <p:nvSpPr>
-          <p:cNvPr id="7" name="TextBox 6"/>
-          <p:cNvSpPr txBox="1"/>
-          <p:nvPr/>
-        </p:nvSpPr>
-        <p:spPr>
-          <a:xfrm>
-            <a:off x="502920" y="2240280"/>
-            <a:ext cx="1920240" cy="777240"/>
-          </a:xfrm>
-          <a:prstGeom prst="rect">
-            <a:avLst/>
-          </a:prstGeom>
-          <a:noFill/>
-        </p:spPr>
-        <p:txBody>
-          <a:bodyPr wrap="square" anchor="ctr">
+          <p:cNvPr id="8" name="TextBox 7"/>
+          <p:cNvSpPr txBox="1"/>
+          <p:nvPr/>
+        </p:nvSpPr>
+        <p:spPr>
+          <a:xfrm>
+            <a:off x="502920" y="5806440"/>
+            <a:ext cx="1828800" cy="320040"/>
+          </a:xfrm>
+          <a:prstGeom prst="rect">
+            <a:avLst/>
+          </a:prstGeom>
+          <a:noFill/>
+        </p:spPr>
+        <p:txBody>
+          <a:bodyPr wrap="square" anchor="t">
             <a:spAutoFit/>
           </a:bodyPr>
           <a:lstStyle/>
           <a:p>
             <a:pPr algn="ctr"/>
             <a:r>
-              <a:rPr sz="1300" b="1" i="0">
-                <a:solidFill>
-                  <a:srgbClr val="0B0B0B"/>
-                </a:solidFill>
-                <a:latin typeface="Calibri"/>
-              </a:rPr>
-              <a:t>Recommended</a:t>
-            </a:r>
-          </a:p>
-          <a:p>
-            <a:pPr algn="ctr"/>
-            <a:r>
-              <a:rPr sz="1300" b="1" i="0">
-                <a:solidFill>
-                  <a:srgbClr val="0B0B0B"/>
-                </a:solidFill>
-                <a:latin typeface="Calibri"/>
-              </a:rPr>
-              <a:t>intervention</a:t>
-            </a:r>
-          </a:p>
-        </p:txBody>
-      </p:sp>
-      <p:sp>
-        <p:nvSpPr>
-          <p:cNvPr id="8" name="TextBox 7"/>
-          <p:cNvSpPr txBox="1"/>
-          <p:nvPr/>
-        </p:nvSpPr>
-        <p:spPr>
-          <a:xfrm>
-            <a:off x="2423160" y="2331720"/>
-            <a:ext cx="388620" cy="640080"/>
-          </a:xfrm>
-          <a:prstGeom prst="rect">
-            <a:avLst/>
-          </a:prstGeom>
-          <a:noFill/>
-        </p:spPr>
-        <p:txBody>
-          <a:bodyPr wrap="square" anchor="t">
-            <a:spAutoFit/>
-          </a:bodyPr>
-          <a:lstStyle/>
-          <a:p>
-            <a:pPr algn="ctr"/>
-            <a:r>
-              <a:rPr sz="2000" b="0" i="0">
-                <a:solidFill>
-                  <a:srgbClr val="898781"/>
-                </a:solidFill>
-                <a:latin typeface="Calibri"/>
-              </a:rPr>
-              <a:t>→</a:t>
+              <a:rPr sz="1200" b="0" i="0">
+                <a:solidFill>
+                  <a:srgbClr val="52514E"/>
+                </a:solidFill>
+                <a:latin typeface="Calibri"/>
+              </a:rPr>
+              <a:t>Critical</a:t>
             </a:r>
           </a:p>
         </p:txBody>
@@ -7856,19 +7297,17 @@
         </p:nvSpPr>
         <p:spPr>
           <a:xfrm>
-            <a:off x="2811780" y="2103120"/>
-            <a:ext cx="1920240" cy="1051560"/>
+            <a:off x="2468880" y="4937760"/>
+            <a:ext cx="1828800" cy="822960"/>
           </a:xfrm>
           <a:prstGeom prst="rect">
             <a:avLst/>
           </a:prstGeom>
           <a:solidFill>
-            <a:srgbClr val="FFFFFF"/>
+            <a:srgbClr val="EC835A"/>
           </a:solidFill>
-          <a:ln w="22225">
-            <a:solidFill>
-              <a:srgbClr val="2A78D6"/>
-            </a:solidFill>
+          <a:ln>
+            <a:noFill/>
           </a:ln>
           <a:effectLst/>
         </p:spPr>
@@ -7903,101 +7342,52 @@
         </p:nvSpPr>
         <p:spPr>
           <a:xfrm>
-            <a:off x="2811780" y="2240280"/>
-            <a:ext cx="1920240" cy="777240"/>
-          </a:xfrm>
-          <a:prstGeom prst="rect">
-            <a:avLst/>
-          </a:prstGeom>
-          <a:noFill/>
-        </p:spPr>
-        <p:txBody>
-          <a:bodyPr wrap="square" anchor="ctr">
+            <a:off x="2468880" y="5806440"/>
+            <a:ext cx="1828800" cy="320040"/>
+          </a:xfrm>
+          <a:prstGeom prst="rect">
+            <a:avLst/>
+          </a:prstGeom>
+          <a:noFill/>
+        </p:spPr>
+        <p:txBody>
+          <a:bodyPr wrap="square" anchor="t">
             <a:spAutoFit/>
           </a:bodyPr>
           <a:lstStyle/>
           <a:p>
             <a:pPr algn="ctr"/>
             <a:r>
-              <a:rPr sz="1300" b="1" i="0">
-                <a:solidFill>
-                  <a:srgbClr val="0B0B0B"/>
-                </a:solidFill>
-                <a:latin typeface="Calibri"/>
-              </a:rPr>
-              <a:t>Completed</a:t>
-            </a:r>
-          </a:p>
-          <a:p>
-            <a:pPr algn="ctr"/>
-            <a:r>
-              <a:rPr sz="1300" b="1" i="0">
-                <a:solidFill>
-                  <a:srgbClr val="0B0B0B"/>
-                </a:solidFill>
-                <a:latin typeface="Calibri"/>
-              </a:rPr>
-              <a:t>intervention</a:t>
-            </a:r>
-          </a:p>
-        </p:txBody>
-      </p:sp>
-      <p:sp>
-        <p:nvSpPr>
-          <p:cNvPr id="11" name="TextBox 10"/>
-          <p:cNvSpPr txBox="1"/>
-          <p:nvPr/>
-        </p:nvSpPr>
-        <p:spPr>
-          <a:xfrm>
-            <a:off x="4732020" y="2331720"/>
-            <a:ext cx="388620" cy="640080"/>
-          </a:xfrm>
-          <a:prstGeom prst="rect">
-            <a:avLst/>
-          </a:prstGeom>
-          <a:noFill/>
-        </p:spPr>
-        <p:txBody>
-          <a:bodyPr wrap="square" anchor="t">
-            <a:spAutoFit/>
-          </a:bodyPr>
-          <a:lstStyle/>
-          <a:p>
-            <a:pPr algn="ctr"/>
-            <a:r>
-              <a:rPr sz="2000" b="0" i="0">
-                <a:solidFill>
-                  <a:srgbClr val="898781"/>
-                </a:solidFill>
-                <a:latin typeface="Calibri"/>
-              </a:rPr>
-              <a:t>→</a:t>
-            </a:r>
-          </a:p>
-        </p:txBody>
-      </p:sp>
-      <p:sp>
-        <p:nvSpPr>
-          <p:cNvPr id="12" name="Rectangle 11"/>
+              <a:rPr sz="1200" b="0" i="0">
+                <a:solidFill>
+                  <a:srgbClr val="52514E"/>
+                </a:solidFill>
+                <a:latin typeface="Calibri"/>
+              </a:rPr>
+              <a:t>High</a:t>
+            </a:r>
+          </a:p>
+        </p:txBody>
+      </p:sp>
+      <p:sp>
+        <p:nvSpPr>
+          <p:cNvPr id="11" name="Rectangle 10"/>
           <p:cNvSpPr/>
           <p:nvPr/>
         </p:nvSpPr>
         <p:spPr>
           <a:xfrm>
-            <a:off x="5120640" y="2103120"/>
-            <a:ext cx="1920240" cy="1051560"/>
+            <a:off x="4434840" y="4937760"/>
+            <a:ext cx="1828800" cy="822960"/>
           </a:xfrm>
           <a:prstGeom prst="rect">
             <a:avLst/>
           </a:prstGeom>
           <a:solidFill>
-            <a:srgbClr val="FFFFFF"/>
+            <a:srgbClr val="FAB219"/>
           </a:solidFill>
-          <a:ln w="22225">
-            <a:solidFill>
-              <a:srgbClr val="2A78D6"/>
-            </a:solidFill>
+          <a:ln>
+            <a:noFill/>
           </a:ln>
           <a:effectLst/>
         </p:spPr>
@@ -8026,95 +7416,58 @@
       </p:sp>
       <p:sp>
         <p:nvSpPr>
-          <p:cNvPr id="13" name="TextBox 12"/>
-          <p:cNvSpPr txBox="1"/>
-          <p:nvPr/>
-        </p:nvSpPr>
-        <p:spPr>
-          <a:xfrm>
-            <a:off x="5120640" y="2240280"/>
-            <a:ext cx="1920240" cy="777240"/>
-          </a:xfrm>
-          <a:prstGeom prst="rect">
-            <a:avLst/>
-          </a:prstGeom>
-          <a:noFill/>
-        </p:spPr>
-        <p:txBody>
-          <a:bodyPr wrap="square" anchor="ctr">
+          <p:cNvPr id="12" name="TextBox 11"/>
+          <p:cNvSpPr txBox="1"/>
+          <p:nvPr/>
+        </p:nvSpPr>
+        <p:spPr>
+          <a:xfrm>
+            <a:off x="4434840" y="5806440"/>
+            <a:ext cx="1828800" cy="320040"/>
+          </a:xfrm>
+          <a:prstGeom prst="rect">
+            <a:avLst/>
+          </a:prstGeom>
+          <a:noFill/>
+        </p:spPr>
+        <p:txBody>
+          <a:bodyPr wrap="square" anchor="t">
             <a:spAutoFit/>
           </a:bodyPr>
           <a:lstStyle/>
           <a:p>
             <a:pPr algn="ctr"/>
             <a:r>
-              <a:rPr sz="1300" b="1" i="0">
-                <a:solidFill>
-                  <a:srgbClr val="0B0B0B"/>
-                </a:solidFill>
-                <a:latin typeface="Calibri"/>
-              </a:rPr>
-              <a:t>Outcome</a:t>
-            </a:r>
-          </a:p>
-        </p:txBody>
-      </p:sp>
-      <p:sp>
-        <p:nvSpPr>
-          <p:cNvPr id="14" name="TextBox 13"/>
-          <p:cNvSpPr txBox="1"/>
-          <p:nvPr/>
-        </p:nvSpPr>
-        <p:spPr>
-          <a:xfrm>
-            <a:off x="7040880" y="2331720"/>
-            <a:ext cx="388620" cy="640080"/>
-          </a:xfrm>
-          <a:prstGeom prst="rect">
-            <a:avLst/>
-          </a:prstGeom>
-          <a:noFill/>
-        </p:spPr>
-        <p:txBody>
-          <a:bodyPr wrap="square" anchor="t">
-            <a:spAutoFit/>
-          </a:bodyPr>
-          <a:lstStyle/>
-          <a:p>
-            <a:pPr algn="ctr"/>
-            <a:r>
-              <a:rPr sz="2000" b="0" i="0">
-                <a:solidFill>
-                  <a:srgbClr val="898781"/>
-                </a:solidFill>
-                <a:latin typeface="Calibri"/>
-              </a:rPr>
-              <a:t>→</a:t>
-            </a:r>
-          </a:p>
-        </p:txBody>
-      </p:sp>
-      <p:sp>
-        <p:nvSpPr>
-          <p:cNvPr id="15" name="Rectangle 14"/>
+              <a:rPr sz="1200" b="0" i="0">
+                <a:solidFill>
+                  <a:srgbClr val="52514E"/>
+                </a:solidFill>
+                <a:latin typeface="Calibri"/>
+              </a:rPr>
+              <a:t>Medium</a:t>
+            </a:r>
+          </a:p>
+        </p:txBody>
+      </p:sp>
+      <p:sp>
+        <p:nvSpPr>
+          <p:cNvPr id="13" name="Rectangle 12"/>
           <p:cNvSpPr/>
           <p:nvPr/>
         </p:nvSpPr>
         <p:spPr>
           <a:xfrm>
-            <a:off x="7429500" y="2103120"/>
-            <a:ext cx="1920240" cy="1051560"/>
+            <a:off x="6400800" y="4937760"/>
+            <a:ext cx="1828800" cy="822960"/>
           </a:xfrm>
           <a:prstGeom prst="rect">
             <a:avLst/>
           </a:prstGeom>
           <a:solidFill>
-            <a:srgbClr val="FFFFFF"/>
+            <a:srgbClr val="0CA30C"/>
           </a:solidFill>
-          <a:ln w="22225">
-            <a:solidFill>
-              <a:srgbClr val="2A78D6"/>
-            </a:solidFill>
+          <a:ln>
+            <a:noFill/>
           </a:ln>
           <a:effectLst/>
         </p:spPr>
@@ -8143,107 +7496,58 @@
       </p:sp>
       <p:sp>
         <p:nvSpPr>
-          <p:cNvPr id="16" name="TextBox 15"/>
-          <p:cNvSpPr txBox="1"/>
-          <p:nvPr/>
-        </p:nvSpPr>
-        <p:spPr>
-          <a:xfrm>
-            <a:off x="7429500" y="2240280"/>
-            <a:ext cx="1920240" cy="777240"/>
-          </a:xfrm>
-          <a:prstGeom prst="rect">
-            <a:avLst/>
-          </a:prstGeom>
-          <a:noFill/>
-        </p:spPr>
-        <p:txBody>
-          <a:bodyPr wrap="square" anchor="ctr">
+          <p:cNvPr id="14" name="TextBox 13"/>
+          <p:cNvSpPr txBox="1"/>
+          <p:nvPr/>
+        </p:nvSpPr>
+        <p:spPr>
+          <a:xfrm>
+            <a:off x="6400800" y="5806440"/>
+            <a:ext cx="1828800" cy="320040"/>
+          </a:xfrm>
+          <a:prstGeom prst="rect">
+            <a:avLst/>
+          </a:prstGeom>
+          <a:noFill/>
+        </p:spPr>
+        <p:txBody>
+          <a:bodyPr wrap="square" anchor="t">
             <a:spAutoFit/>
           </a:bodyPr>
           <a:lstStyle/>
           <a:p>
             <a:pPr algn="ctr"/>
             <a:r>
-              <a:rPr sz="1300" b="1" i="0">
-                <a:solidFill>
-                  <a:srgbClr val="0B0B0B"/>
-                </a:solidFill>
-                <a:latin typeface="Calibri"/>
-              </a:rPr>
-              <a:t>Behavior</a:t>
-            </a:r>
-          </a:p>
-          <a:p>
-            <a:pPr algn="ctr"/>
-            <a:r>
-              <a:rPr sz="1300" b="1" i="0">
-                <a:solidFill>
-                  <a:srgbClr val="0B0B0B"/>
-                </a:solidFill>
-                <a:latin typeface="Calibri"/>
-              </a:rPr>
-              <a:t>change</a:t>
-            </a:r>
-          </a:p>
-        </p:txBody>
-      </p:sp>
-      <p:sp>
-        <p:nvSpPr>
-          <p:cNvPr id="17" name="TextBox 16"/>
-          <p:cNvSpPr txBox="1"/>
-          <p:nvPr/>
-        </p:nvSpPr>
-        <p:spPr>
-          <a:xfrm>
-            <a:off x="9349740" y="2331720"/>
-            <a:ext cx="388620" cy="640080"/>
-          </a:xfrm>
-          <a:prstGeom prst="rect">
-            <a:avLst/>
-          </a:prstGeom>
-          <a:noFill/>
-        </p:spPr>
-        <p:txBody>
-          <a:bodyPr wrap="square" anchor="t">
-            <a:spAutoFit/>
-          </a:bodyPr>
-          <a:lstStyle/>
-          <a:p>
-            <a:pPr algn="ctr"/>
-            <a:r>
-              <a:rPr sz="2000" b="0" i="0">
-                <a:solidFill>
-                  <a:srgbClr val="898781"/>
-                </a:solidFill>
-                <a:latin typeface="Calibri"/>
-              </a:rPr>
-              <a:t>→</a:t>
-            </a:r>
-          </a:p>
-        </p:txBody>
-      </p:sp>
-      <p:sp>
-        <p:nvSpPr>
-          <p:cNvPr id="18" name="Rectangle 17"/>
+              <a:rPr sz="1200" b="0" i="0">
+                <a:solidFill>
+                  <a:srgbClr val="52514E"/>
+                </a:solidFill>
+                <a:latin typeface="Calibri"/>
+              </a:rPr>
+              <a:t>Low</a:t>
+            </a:r>
+          </a:p>
+        </p:txBody>
+      </p:sp>
+      <p:sp>
+        <p:nvSpPr>
+          <p:cNvPr id="15" name="Rectangle 14"/>
           <p:cNvSpPr/>
           <p:nvPr/>
         </p:nvSpPr>
         <p:spPr>
           <a:xfrm>
-            <a:off x="9738360" y="2103120"/>
-            <a:ext cx="1920240" cy="1051560"/>
+            <a:off x="8366760" y="4937760"/>
+            <a:ext cx="1828800" cy="822960"/>
           </a:xfrm>
           <a:prstGeom prst="rect">
             <a:avLst/>
           </a:prstGeom>
           <a:solidFill>
-            <a:srgbClr val="FFFFFF"/>
+            <a:srgbClr val="2A78D6"/>
           </a:solidFill>
-          <a:ln w="22225">
-            <a:solidFill>
-              <a:srgbClr val="2A78D6"/>
-            </a:solidFill>
+          <a:ln>
+            <a:noFill/>
           </a:ln>
           <a:effectLst/>
         </p:spPr>
@@ -8272,134 +7576,42 @@
       </p:sp>
       <p:sp>
         <p:nvSpPr>
-          <p:cNvPr id="19" name="TextBox 18"/>
-          <p:cNvSpPr txBox="1"/>
-          <p:nvPr/>
-        </p:nvSpPr>
-        <p:spPr>
-          <a:xfrm>
-            <a:off x="9738360" y="2240280"/>
-            <a:ext cx="1920240" cy="777240"/>
-          </a:xfrm>
-          <a:prstGeom prst="rect">
-            <a:avLst/>
-          </a:prstGeom>
-          <a:noFill/>
-        </p:spPr>
-        <p:txBody>
-          <a:bodyPr wrap="square" anchor="ctr">
+          <p:cNvPr id="16" name="TextBox 15"/>
+          <p:cNvSpPr txBox="1"/>
+          <p:nvPr/>
+        </p:nvSpPr>
+        <p:spPr>
+          <a:xfrm>
+            <a:off x="8366760" y="5806440"/>
+            <a:ext cx="1828800" cy="320040"/>
+          </a:xfrm>
+          <a:prstGeom prst="rect">
+            <a:avLst/>
+          </a:prstGeom>
+          <a:noFill/>
+        </p:spPr>
+        <p:txBody>
+          <a:bodyPr wrap="square" anchor="t">
             <a:spAutoFit/>
           </a:bodyPr>
           <a:lstStyle/>
           <a:p>
             <a:pPr algn="ctr"/>
             <a:r>
-              <a:rPr sz="1300" b="1" i="0">
-                <a:solidFill>
-                  <a:srgbClr val="0B0B0B"/>
-                </a:solidFill>
-                <a:latin typeface="Calibri"/>
-              </a:rPr>
-              <a:t>Next quiz</a:t>
-            </a:r>
-          </a:p>
-          <a:p>
-            <a:pPr algn="ctr"/>
-            <a:r>
-              <a:rPr sz="1300" b="1" i="0">
-                <a:solidFill>
-                  <a:srgbClr val="0B0B0B"/>
-                </a:solidFill>
-                <a:latin typeface="Calibri"/>
-              </a:rPr>
-              <a:t>result</a:t>
-            </a:r>
-          </a:p>
-        </p:txBody>
-      </p:sp>
-      <p:sp>
-        <p:nvSpPr>
-          <p:cNvPr id="20" name="TextBox 19"/>
-          <p:cNvSpPr txBox="1"/>
-          <p:nvPr/>
-        </p:nvSpPr>
-        <p:spPr>
-          <a:xfrm>
-            <a:off x="502920" y="3749039"/>
-            <a:ext cx="11155680" cy="2194560"/>
-          </a:xfrm>
-          <a:prstGeom prst="rect">
-            <a:avLst/>
-          </a:prstGeom>
-          <a:noFill/>
-        </p:spPr>
-        <p:txBody>
-          <a:bodyPr wrap="square">
-            <a:spAutoFit/>
-          </a:bodyPr>
-          <a:lstStyle/>
-          <a:p>
-            <a:pPr>
-              <a:spcAft>
-                <a:spcPts val="800"/>
-              </a:spcAft>
-            </a:pPr>
-            <a:r>
-              <a:rPr sz="1600" b="0">
-                <a:solidFill>
-                  <a:srgbClr val="0B0B0B"/>
-                </a:solidFill>
-                <a:latin typeface="Calibri"/>
-              </a:rPr>
-              <a:t>›  Today, the system measures whether an action was completed — not yet whether it worked.</a:t>
-            </a:r>
-          </a:p>
-          <a:p>
-            <a:pPr>
-              <a:spcAft>
-                <a:spcPts val="800"/>
-              </a:spcAft>
-            </a:pPr>
-            <a:r>
-              <a:rPr sz="1600" b="0">
-                <a:solidFill>
-                  <a:srgbClr val="0B0B0B"/>
-                </a:solidFill>
-                <a:latin typeface="Calibri"/>
-              </a:rPr>
-              <a:t>›  Once Quiz 2 results land, each completed intervention becomes a labeled example.</a:t>
-            </a:r>
-          </a:p>
-          <a:p>
-            <a:pPr>
-              <a:spcAft>
-                <a:spcPts val="800"/>
-              </a:spcAft>
-            </a:pPr>
-            <a:r>
-              <a:rPr sz="1600" b="1">
-                <a:solidFill>
-                  <a:srgbClr val="0B0B0B"/>
-                </a:solidFill>
-                <a:latin typeface="Calibri"/>
-              </a:rPr>
-              <a:t>›  That's exactly the training data a real predictive model would need</a:t>
-            </a:r>
-            <a:r>
-              <a:rPr sz="1600">
-                <a:solidFill>
-                  <a:srgbClr val="0B0B0B"/>
-                </a:solidFill>
-                <a:latin typeface="Calibri"/>
-              </a:rPr>
-              <a:t>— and only then would training one be justified.</a:t>
-            </a:r>
-          </a:p>
-        </p:txBody>
-      </p:sp>
-      <p:sp>
-        <p:nvSpPr>
-          <p:cNvPr id="21" name="TextBox 20"/>
+              <a:rPr sz="1200" b="0" i="0">
+                <a:solidFill>
+                  <a:srgbClr val="52514E"/>
+                </a:solidFill>
+                <a:latin typeface="Calibri"/>
+              </a:rPr>
+              <a:t>Brand</a:t>
+            </a:r>
+          </a:p>
+        </p:txBody>
+      </p:sp>
+      <p:sp>
+        <p:nvSpPr>
+          <p:cNvPr id="17" name="TextBox 16"/>
           <p:cNvSpPr txBox="1"/>
           <p:nvPr/>
         </p:nvSpPr>
@@ -8427,14 +7639,14 @@
                 </a:solidFill>
                 <a:latin typeface="Consolas"/>
               </a:rPr>
-              <a:t>21</a:t>
-            </a:r>
-          </a:p>
-        </p:txBody>
-      </p:sp>
-      <p:sp>
-        <p:nvSpPr>
-          <p:cNvPr id="22" name="TextBox 21"/>
+              <a:t>18</a:t>
+            </a:r>
+          </a:p>
+        </p:txBody>
+      </p:sp>
+      <p:sp>
+        <p:nvSpPr>
+          <p:cNvPr id="18" name="TextBox 17"/>
           <p:cNvSpPr txBox="1"/>
           <p:nvPr/>
         </p:nvSpPr>
@@ -8507,7 +7719,7 @@
             <a:avLst/>
           </a:prstGeom>
           <a:solidFill>
-            <a:srgbClr val="0B0F0E"/>
+            <a:srgbClr val="FCFCFB"/>
           </a:solidFill>
           <a:ln>
             <a:noFill/>
@@ -8545,8 +7757,8 @@
         </p:nvSpPr>
         <p:spPr>
           <a:xfrm>
-            <a:off x="502920" y="2560320"/>
-            <a:ext cx="7315200" cy="914400"/>
+            <a:off x="502920" y="365760"/>
+            <a:ext cx="8229600" cy="320040"/>
           </a:xfrm>
           <a:prstGeom prst="rect">
             <a:avLst/>
@@ -8561,13 +7773,13 @@
           <a:p>
             <a:pPr algn="l"/>
             <a:r>
-              <a:rPr sz="4400" b="1" i="0">
-                <a:solidFill>
-                  <a:srgbClr val="EDEDEC"/>
-                </a:solidFill>
-                <a:latin typeface="Calibri"/>
-              </a:rPr>
-              <a:t>Thank you.</a:t>
+              <a:rPr sz="1200" b="1" i="0">
+                <a:solidFill>
+                  <a:srgbClr val="2A78D6"/>
+                </a:solidFill>
+                <a:latin typeface="Consolas"/>
+              </a:rPr>
+              <a:t>RELIABILITY</a:t>
             </a:r>
           </a:p>
         </p:txBody>
@@ -8580,8 +7792,8 @@
         </p:nvSpPr>
         <p:spPr>
           <a:xfrm>
-            <a:off x="502920" y="3383280"/>
-            <a:ext cx="8229600" cy="548640"/>
+            <a:off x="502920" y="658368"/>
+            <a:ext cx="11155680" cy="822960"/>
           </a:xfrm>
           <a:prstGeom prst="rect">
             <a:avLst/>
@@ -8596,13 +7808,301 @@
           <a:p>
             <a:pPr algn="l"/>
             <a:r>
-              <a:rPr sz="1800" b="0" i="0">
-                <a:solidFill>
-                  <a:srgbClr val="958D82"/>
-                </a:solidFill>
-                <a:latin typeface="Calibri"/>
-              </a:rPr>
-              <a:t>Boon Academy Intervention Command Center</a:t>
+              <a:rPr sz="3000" b="1" i="0">
+                <a:solidFill>
+                  <a:srgbClr val="0B0B0B"/>
+                </a:solidFill>
+                <a:latin typeface="Calibri"/>
+              </a:rPr>
+              <a:t>32 tests, all passing in under a second</a:t>
+            </a:r>
+          </a:p>
+        </p:txBody>
+      </p:sp>
+      <p:sp>
+        <p:nvSpPr>
+          <p:cNvPr id="5" name="Rectangle 4"/>
+          <p:cNvSpPr/>
+          <p:nvPr/>
+        </p:nvSpPr>
+        <p:spPr>
+          <a:xfrm>
+            <a:off x="502920" y="1371600"/>
+            <a:ext cx="502920" cy="50800"/>
+          </a:xfrm>
+          <a:prstGeom prst="rect">
+            <a:avLst/>
+          </a:prstGeom>
+          <a:solidFill>
+            <a:srgbClr val="2A78D6"/>
+          </a:solidFill>
+          <a:ln>
+            <a:noFill/>
+          </a:ln>
+          <a:effectLst/>
+        </p:spPr>
+        <p:style>
+          <a:lnRef idx="1">
+            <a:schemeClr val="accent1"/>
+          </a:lnRef>
+          <a:fillRef idx="3">
+            <a:schemeClr val="accent1"/>
+          </a:fillRef>
+          <a:effectRef idx="2">
+            <a:schemeClr val="accent1"/>
+          </a:effectRef>
+          <a:fontRef idx="minor">
+            <a:schemeClr val="lt1"/>
+          </a:fontRef>
+        </p:style>
+        <p:txBody>
+          <a:bodyPr rtlCol="0" anchor="ctr"/>
+          <a:lstStyle/>
+          <a:p>
+            <a:pPr algn="ctr"/>
+            <a:endParaRPr/>
+          </a:p>
+        </p:txBody>
+      </p:sp>
+      <p:sp>
+        <p:nvSpPr>
+          <p:cNvPr id="6" name="TextBox 5"/>
+          <p:cNvSpPr txBox="1"/>
+          <p:nvPr/>
+        </p:nvSpPr>
+        <p:spPr>
+          <a:xfrm>
+            <a:off x="502920" y="1783080"/>
+            <a:ext cx="11155680" cy="4114800"/>
+          </a:xfrm>
+          <a:prstGeom prst="rect">
+            <a:avLst/>
+          </a:prstGeom>
+          <a:noFill/>
+        </p:spPr>
+        <p:txBody>
+          <a:bodyPr wrap="square">
+            <a:spAutoFit/>
+          </a:bodyPr>
+          <a:lstStyle/>
+          <a:p>
+            <a:pPr>
+              <a:spcAft>
+                <a:spcPts val="800"/>
+              </a:spcAft>
+            </a:pPr>
+            <a:r>
+              <a:rPr sz="1600" b="1">
+                <a:solidFill>
+                  <a:srgbClr val="0B0B0B"/>
+                </a:solidFill>
+                <a:latin typeface="Calibri"/>
+              </a:rPr>
+              <a:t>›  Validation</a:t>
+            </a:r>
+            <a:r>
+              <a:rPr sz="1600">
+                <a:solidFill>
+                  <a:srgbClr val="0B0B0B"/>
+                </a:solidFill>
+                <a:latin typeface="Calibri"/>
+              </a:rPr>
+              <a:t>— missing attendance stays missing, ownership mismatches are flagged not dropped.</a:t>
+            </a:r>
+          </a:p>
+          <a:p>
+            <a:pPr>
+              <a:spcAft>
+                <a:spcPts val="800"/>
+              </a:spcAft>
+            </a:pPr>
+            <a:r>
+              <a:rPr sz="1600" b="1">
+                <a:solidFill>
+                  <a:srgbClr val="0B0B0B"/>
+                </a:solidFill>
+                <a:latin typeface="Calibri"/>
+              </a:rPr>
+              <a:t>›  Patterns</a:t>
+            </a:r>
+            <a:r>
+              <a:rPr sz="1600">
+                <a:solidFill>
+                  <a:srgbClr val="0B0B0B"/>
+                </a:solidFill>
+                <a:latin typeface="Calibri"/>
+              </a:rPr>
+              <a:t>— each rule fires (and doesn't false-fire) against hand-built scenarios.</a:t>
+            </a:r>
+          </a:p>
+          <a:p>
+            <a:pPr>
+              <a:spcAft>
+                <a:spcPts val="800"/>
+              </a:spcAft>
+            </a:pPr>
+            <a:r>
+              <a:rPr sz="1600" b="1">
+                <a:solidFill>
+                  <a:srgbClr val="0B0B0B"/>
+                </a:solidFill>
+                <a:latin typeface="Calibri"/>
+              </a:rPr>
+              <a:t>›  Risk</a:t>
+            </a:r>
+            <a:r>
+              <a:rPr sz="1600">
+                <a:solidFill>
+                  <a:srgbClr val="0B0B0B"/>
+                </a:solidFill>
+                <a:latin typeface="Calibri"/>
+              </a:rPr>
+              <a:t>— a severe dropout always outranks a stable student; score always stays in [0,100].</a:t>
+            </a:r>
+          </a:p>
+          <a:p>
+            <a:pPr>
+              <a:spcAft>
+                <a:spcPts val="800"/>
+              </a:spcAft>
+            </a:pPr>
+            <a:r>
+              <a:rPr sz="1600" b="1">
+                <a:solidFill>
+                  <a:srgbClr val="0B0B0B"/>
+                </a:solidFill>
+                <a:latin typeface="Calibri"/>
+              </a:rPr>
+              <a:t>›  Coverage math</a:t>
+            </a:r>
+            <a:r>
+              <a:rPr sz="1600">
+                <a:solidFill>
+                  <a:srgbClr val="0B0B0B"/>
+                </a:solidFill>
+                <a:latin typeface="Calibri"/>
+              </a:rPr>
+              <a:t>— a recommendation or a no-answer call never counts as success.</a:t>
+            </a:r>
+          </a:p>
+          <a:p>
+            <a:pPr>
+              <a:spcAft>
+                <a:spcPts val="800"/>
+              </a:spcAft>
+            </a:pPr>
+            <a:r>
+              <a:rPr sz="1600" b="1">
+                <a:solidFill>
+                  <a:srgbClr val="0B0B0B"/>
+                </a:solidFill>
+                <a:latin typeface="Calibri"/>
+              </a:rPr>
+              <a:t>›  LLM</a:t>
+            </a:r>
+            <a:r>
+              <a:rPr sz="1600">
+                <a:solidFill>
+                  <a:srgbClr val="0B0B0B"/>
+                </a:solidFill>
+                <a:latin typeface="Calibri"/>
+              </a:rPr>
+              <a:t>— mocked end-to-end: valid response, retry-then-succeed, fallback-after-two-failures.</a:t>
+            </a:r>
+          </a:p>
+          <a:p>
+            <a:pPr>
+              <a:spcAft>
+                <a:spcPts val="800"/>
+              </a:spcAft>
+            </a:pPr>
+            <a:r>
+              <a:rPr sz="1600" b="1">
+                <a:solidFill>
+                  <a:srgbClr val="0B0B0B"/>
+                </a:solidFill>
+                <a:latin typeface="Calibri"/>
+              </a:rPr>
+              <a:t>›  Access control</a:t>
+            </a:r>
+            <a:r>
+              <a:rPr sz="1600">
+                <a:solidFill>
+                  <a:srgbClr val="0B0B0B"/>
+                </a:solidFill>
+                <a:latin typeface="Calibri"/>
+              </a:rPr>
+              <a:t>— a facilitator's query never returns another facilitator's students.</a:t>
+            </a:r>
+          </a:p>
+        </p:txBody>
+      </p:sp>
+      <p:sp>
+        <p:nvSpPr>
+          <p:cNvPr id="7" name="TextBox 6"/>
+          <p:cNvSpPr txBox="1"/>
+          <p:nvPr/>
+        </p:nvSpPr>
+        <p:spPr>
+          <a:xfrm>
+            <a:off x="11368735" y="6355080"/>
+            <a:ext cx="548640" cy="320040"/>
+          </a:xfrm>
+          <a:prstGeom prst="rect">
+            <a:avLst/>
+          </a:prstGeom>
+          <a:noFill/>
+        </p:spPr>
+        <p:txBody>
+          <a:bodyPr wrap="square" anchor="t">
+            <a:spAutoFit/>
+          </a:bodyPr>
+          <a:lstStyle/>
+          <a:p>
+            <a:pPr algn="r"/>
+            <a:r>
+              <a:rPr sz="1100" b="0" i="0">
+                <a:solidFill>
+                  <a:srgbClr val="898781"/>
+                </a:solidFill>
+                <a:latin typeface="Consolas"/>
+              </a:rPr>
+              <a:t>19</a:t>
+            </a:r>
+          </a:p>
+        </p:txBody>
+      </p:sp>
+      <p:sp>
+        <p:nvSpPr>
+          <p:cNvPr id="8" name="TextBox 7"/>
+          <p:cNvSpPr txBox="1"/>
+          <p:nvPr/>
+        </p:nvSpPr>
+        <p:spPr>
+          <a:xfrm>
+            <a:off x="502920" y="6355080"/>
+            <a:ext cx="2743200" cy="320040"/>
+          </a:xfrm>
+          <a:prstGeom prst="rect">
+            <a:avLst/>
+          </a:prstGeom>
+          <a:noFill/>
+        </p:spPr>
+        <p:txBody>
+          <a:bodyPr wrap="square" anchor="t">
+            <a:spAutoFit/>
+          </a:bodyPr>
+          <a:lstStyle/>
+          <a:p>
+            <a:pPr algn="l"/>
+            <a:r>
+              <a:rPr sz="1000" b="0" i="0">
+                <a:solidFill>
+                  <a:srgbClr val="898781"/>
+                </a:solidFill>
+                <a:latin typeface="Consolas"/>
+              </a:rPr>
+              <a:t>BOON ACADEMY</a:t>
             </a:r>
           </a:p>
         </p:txBody>
@@ -9446,7 +8946,7 @@
 </file>
 
 <file path=ppt/slides/slide20.xml><?xml version="1.0" encoding="utf-8"?>
-<p:sld xmlns:a="http://schemas.openxmlformats.org/drawingml/2006/main" xmlns:p="http://schemas.openxmlformats.org/presentationml/2006/main" xmlns:r="http://schemas.openxmlformats.org/officeDocument/2006/relationships">
+<p:sld xmlns:a="http://schemas.openxmlformats.org/drawingml/2006/main" xmlns:r="http://schemas.openxmlformats.org/officeDocument/2006/relationships" xmlns:p="http://schemas.openxmlformats.org/presentationml/2006/main">
   <p:cSld>
     <p:spTree>
       <p:nvGrpSpPr>
@@ -9454,7 +8954,14 @@
         <p:cNvGrpSpPr/>
         <p:nvPr/>
       </p:nvGrpSpPr>
-      <p:grpSpPr/>
+      <p:grpSpPr>
+        <a:xfrm>
+          <a:off x="0" y="0"/>
+          <a:ext cx="0" cy="0"/>
+          <a:chOff x="0" y="0"/>
+          <a:chExt cx="0" cy="0"/>
+        </a:xfrm>
+      </p:grpSpPr>
       <p:sp>
         <p:nvSpPr>
           <p:cNvPr id="2" name="Rectangle 1"/>
@@ -9496,6 +9003,7 @@
           <a:lstStyle/>
           <a:p>
             <a:pPr algn="ctr"/>
+            <a:endParaRPr/>
           </a:p>
         </p:txBody>
       </p:sp>
@@ -9516,19 +9024,20 @@
           <a:noFill/>
         </p:spPr>
         <p:txBody>
-          <a:bodyPr wrap="none">
-            <a:spAutoFit/>
-          </a:bodyPr>
-          <a:lstStyle/>
-          <a:p>
-            <a:r>
-              <a:rPr sz="1200" b="1">
+          <a:bodyPr wrap="square" anchor="t">
+            <a:spAutoFit/>
+          </a:bodyPr>
+          <a:lstStyle/>
+          <a:p>
+            <a:pPr algn="l"/>
+            <a:r>
+              <a:rPr sz="1200" b="1" i="0">
                 <a:solidFill>
                   <a:srgbClr val="2A78D6"/>
                 </a:solidFill>
                 <a:latin typeface="Consolas"/>
               </a:rPr>
-              <a:t>SELF-SERVICE, NOT JUST AUTOMATION</a:t>
+              <a:t>WHAT WE DELIBERATELY CUT</a:t>
             </a:r>
           </a:p>
         </p:txBody>
@@ -9550,19 +9059,20 @@
           <a:noFill/>
         </p:spPr>
         <p:txBody>
-          <a:bodyPr wrap="none">
-            <a:spAutoFit/>
-          </a:bodyPr>
-          <a:lstStyle/>
-          <a:p>
-            <a:r>
-              <a:rPr sz="2800" b="1">
+          <a:bodyPr wrap="square" anchor="t">
+            <a:spAutoFit/>
+          </a:bodyPr>
+          <a:lstStyle/>
+          <a:p>
+            <a:pPr algn="l"/>
+            <a:r>
+              <a:rPr sz="3000" b="1" i="0">
                 <a:solidFill>
                   <a:srgbClr val="0B0B0B"/>
                 </a:solidFill>
                 <a:latin typeface="Calibri"/>
               </a:rPr>
-              <a:t>Taking Action, Your Way</a:t>
+              <a:t>And why</a:t>
             </a:r>
           </a:p>
         </p:txBody>
@@ -9608,99 +9118,247 @@
           <a:lstStyle/>
           <a:p>
             <a:pPr algn="ctr"/>
-          </a:p>
-        </p:txBody>
-      </p:sp>
-      <p:sp>
-        <p:nvSpPr>
-          <p:cNvPr id="6" name="TextBox 5"/>
-          <p:cNvSpPr txBox="1"/>
+            <a:endParaRPr/>
+          </a:p>
+        </p:txBody>
+      </p:sp>
+      <p:sp>
+        <p:nvSpPr>
+          <p:cNvPr id="6" name="Rectangle 5"/>
+          <p:cNvSpPr/>
           <p:nvPr/>
         </p:nvSpPr>
         <p:spPr>
           <a:xfrm>
             <a:off x="502920" y="1828800"/>
-            <a:ext cx="10789920" cy="3600000"/>
-          </a:xfrm>
-          <a:prstGeom prst="rect">
-            <a:avLst/>
-          </a:prstGeom>
-          <a:noFill/>
-        </p:spPr>
-        <p:txBody>
-          <a:bodyPr wrap="square">
-            <a:spAutoFit/>
-          </a:bodyPr>
-          <a:lstStyle/>
-          <a:p>
-            <a:pPr>
-              <a:spcAft>
-                <a:spcPts val="1000"/>
-              </a:spcAft>
-            </a:pPr>
-            <a:r>
-              <a:rPr sz="1600">
+            <a:ext cx="11155680" cy="1463040"/>
+          </a:xfrm>
+          <a:prstGeom prst="rect">
+            <a:avLst/>
+          </a:prstGeom>
+          <a:solidFill>
+            <a:srgbClr val="FFFFFF"/>
+          </a:solidFill>
+          <a:ln w="9525">
+            <a:solidFill>
+              <a:srgbClr val="E1E0D9"/>
+            </a:solidFill>
+          </a:ln>
+          <a:effectLst/>
+        </p:spPr>
+        <p:style>
+          <a:lnRef idx="1">
+            <a:schemeClr val="accent1"/>
+          </a:lnRef>
+          <a:fillRef idx="3">
+            <a:schemeClr val="accent1"/>
+          </a:fillRef>
+          <a:effectRef idx="2">
+            <a:schemeClr val="accent1"/>
+          </a:effectRef>
+          <a:fontRef idx="minor">
+            <a:schemeClr val="lt1"/>
+          </a:fontRef>
+        </p:style>
+        <p:txBody>
+          <a:bodyPr rtlCol="0" anchor="ctr"/>
+          <a:lstStyle/>
+          <a:p>
+            <a:pPr algn="ctr"/>
+            <a:endParaRPr/>
+          </a:p>
+        </p:txBody>
+      </p:sp>
+      <p:sp>
+        <p:nvSpPr>
+          <p:cNvPr id="7" name="TextBox 6"/>
+          <p:cNvSpPr txBox="1"/>
+          <p:nvPr/>
+        </p:nvSpPr>
+        <p:spPr>
+          <a:xfrm>
+            <a:off x="731520" y="1965960"/>
+            <a:ext cx="10698480" cy="365760"/>
+          </a:xfrm>
+          <a:prstGeom prst="rect">
+            <a:avLst/>
+          </a:prstGeom>
+          <a:noFill/>
+        </p:spPr>
+        <p:txBody>
+          <a:bodyPr wrap="square" anchor="t">
+            <a:spAutoFit/>
+          </a:bodyPr>
+          <a:lstStyle/>
+          <a:p>
+            <a:pPr algn="l"/>
+            <a:r>
+              <a:rPr sz="1600" b="1" i="0">
                 <a:solidFill>
                   <a:srgbClr val="0B0B0B"/>
                 </a:solidFill>
                 <a:latin typeface="Calibri"/>
               </a:rPr>
-              <a:t>›  Every priority card has an ✉️ Edit button — override the recommended action, due date, and why, without ever touching the risk score itself.</a:t>
-            </a:r>
-          </a:p>
-          <a:p>
-            <a:pPr>
-              <a:spcAft>
-                <a:spcPts val="1000"/>
-              </a:spcAft>
-            </a:pPr>
-            <a:r>
-              <a:rPr sz="1600">
+              <a:t>1.  No trained ML model</a:t>
+            </a:r>
+          </a:p>
+        </p:txBody>
+      </p:sp>
+      <p:sp>
+        <p:nvSpPr>
+          <p:cNvPr id="8" name="TextBox 7"/>
+          <p:cNvSpPr txBox="1"/>
+          <p:nvPr/>
+        </p:nvSpPr>
+        <p:spPr>
+          <a:xfrm>
+            <a:off x="731520" y="2377440"/>
+            <a:ext cx="10698480" cy="822960"/>
+          </a:xfrm>
+          <a:prstGeom prst="rect">
+            <a:avLst/>
+          </a:prstGeom>
+          <a:noFill/>
+        </p:spPr>
+        <p:txBody>
+          <a:bodyPr wrap="square" anchor="t">
+            <a:spAutoFit/>
+          </a:bodyPr>
+          <a:lstStyle/>
+          <a:p>
+            <a:pPr algn="l"/>
+            <a:r>
+              <a:rPr sz="1350" b="0" i="0">
+                <a:solidFill>
+                  <a:srgbClr val="52514E"/>
+                </a:solidFill>
+                <a:latin typeface="Calibri"/>
+              </a:rPr>
+              <a:t>Quiz 2 outcome labels don't exist yet — nothing to validate a model against. An auditable rule set is more trustworthy for a facilitator acting on it today.</a:t>
+            </a:r>
+          </a:p>
+        </p:txBody>
+      </p:sp>
+      <p:sp>
+        <p:nvSpPr>
+          <p:cNvPr id="9" name="Rectangle 8"/>
+          <p:cNvSpPr/>
+          <p:nvPr/>
+        </p:nvSpPr>
+        <p:spPr>
+          <a:xfrm>
+            <a:off x="502920" y="3566160"/>
+            <a:ext cx="11155680" cy="1463040"/>
+          </a:xfrm>
+          <a:prstGeom prst="rect">
+            <a:avLst/>
+          </a:prstGeom>
+          <a:solidFill>
+            <a:srgbClr val="FFFFFF"/>
+          </a:solidFill>
+          <a:ln w="9525">
+            <a:solidFill>
+              <a:srgbClr val="E1E0D9"/>
+            </a:solidFill>
+          </a:ln>
+          <a:effectLst/>
+        </p:spPr>
+        <p:style>
+          <a:lnRef idx="1">
+            <a:schemeClr val="accent1"/>
+          </a:lnRef>
+          <a:fillRef idx="3">
+            <a:schemeClr val="accent1"/>
+          </a:fillRef>
+          <a:effectRef idx="2">
+            <a:schemeClr val="accent1"/>
+          </a:effectRef>
+          <a:fontRef idx="minor">
+            <a:schemeClr val="lt1"/>
+          </a:fontRef>
+        </p:style>
+        <p:txBody>
+          <a:bodyPr rtlCol="0" anchor="ctr"/>
+          <a:lstStyle/>
+          <a:p>
+            <a:pPr algn="ctr"/>
+            <a:endParaRPr/>
+          </a:p>
+        </p:txBody>
+      </p:sp>
+      <p:sp>
+        <p:nvSpPr>
+          <p:cNvPr id="10" name="TextBox 9"/>
+          <p:cNvSpPr txBox="1"/>
+          <p:nvPr/>
+        </p:nvSpPr>
+        <p:spPr>
+          <a:xfrm>
+            <a:off x="731520" y="3703320"/>
+            <a:ext cx="10698480" cy="365760"/>
+          </a:xfrm>
+          <a:prstGeom prst="rect">
+            <a:avLst/>
+          </a:prstGeom>
+          <a:noFill/>
+        </p:spPr>
+        <p:txBody>
+          <a:bodyPr wrap="square" anchor="t">
+            <a:spAutoFit/>
+          </a:bodyPr>
+          <a:lstStyle/>
+          <a:p>
+            <a:pPr algn="l"/>
+            <a:r>
+              <a:rPr sz="1600" b="1" i="0">
                 <a:solidFill>
                   <a:srgbClr val="0B0B0B"/>
                 </a:solidFill>
                 <a:latin typeface="Calibri"/>
               </a:rPr>
-              <a:t>›  ➕ Add a custom priority card puts any student on today's list with your own reason — even one the system hasn't flagged.</a:t>
-            </a:r>
-          </a:p>
-          <a:p>
-            <a:pPr>
-              <a:spcAft>
-                <a:spcPts val="1000"/>
-              </a:spcAft>
-            </a:pPr>
-            <a:r>
-              <a:rPr sz="1600">
-                <a:solidFill>
-                  <a:srgbClr val="0B0B0B"/>
-                </a:solidFill>
-                <a:latin typeface="Calibri"/>
-              </a:rPr>
-              <a:t>›  ➕ Log an action you took yourself records anything done outside the system's queue — an extra call, a booked session, tomorrow's work pulled forward.</a:t>
-            </a:r>
-          </a:p>
-          <a:p>
-            <a:pPr>
-              <a:spcAft>
-                <a:spcPts val="1000"/>
-              </a:spcAft>
-            </a:pPr>
-            <a:r>
-              <a:rPr sz="1600">
-                <a:solidFill>
-                  <a:srgbClr val="0B0B0B"/>
-                </a:solidFill>
-                <a:latin typeface="Calibri"/>
-              </a:rPr>
-              <a:t>›  Every action can be edited or deleted afterward — nothing the system recommends is locked in.</a:t>
-            </a:r>
-          </a:p>
-        </p:txBody>
-      </p:sp>
-      <p:sp>
-        <p:nvSpPr>
-          <p:cNvPr id="7" name="TextBox 6"/>
+              <a:t>2.  No uncontrolled automatic parent communication</a:t>
+            </a:r>
+          </a:p>
+        </p:txBody>
+      </p:sp>
+      <p:sp>
+        <p:nvSpPr>
+          <p:cNvPr id="11" name="TextBox 10"/>
+          <p:cNvSpPr txBox="1"/>
+          <p:nvPr/>
+        </p:nvSpPr>
+        <p:spPr>
+          <a:xfrm>
+            <a:off x="731520" y="4114800"/>
+            <a:ext cx="10698480" cy="822960"/>
+          </a:xfrm>
+          <a:prstGeom prst="rect">
+            <a:avLst/>
+          </a:prstGeom>
+          <a:noFill/>
+        </p:spPr>
+        <p:txBody>
+          <a:bodyPr wrap="square" anchor="t">
+            <a:spAutoFit/>
+          </a:bodyPr>
+          <a:lstStyle/>
+          <a:p>
+            <a:pPr algn="l"/>
+            <a:r>
+              <a:rPr sz="1350" b="0" i="0">
+                <a:solidFill>
+                  <a:srgbClr val="52514E"/>
+                </a:solidFill>
+                <a:latin typeface="Calibri"/>
+              </a:rPr>
+              <a:t>57% of sample notes carried an unverified facilitator/student pairing — identity and contact data need human validation first. Every send is a facilitator-reviewed dry run.</a:t>
+            </a:r>
+          </a:p>
+        </p:txBody>
+      </p:sp>
+      <p:sp>
+        <p:nvSpPr>
+          <p:cNvPr id="12" name="TextBox 11"/>
           <p:cNvSpPr txBox="1"/>
           <p:nvPr/>
         </p:nvSpPr>
@@ -9715,27 +9373,27 @@
           <a:noFill/>
         </p:spPr>
         <p:txBody>
-          <a:bodyPr wrap="none">
+          <a:bodyPr wrap="square" anchor="t">
             <a:spAutoFit/>
           </a:bodyPr>
           <a:lstStyle/>
           <a:p>
             <a:pPr algn="r"/>
             <a:r>
-              <a:rPr sz="1100">
+              <a:rPr sz="1100" b="0" i="0">
                 <a:solidFill>
                   <a:srgbClr val="898781"/>
                 </a:solidFill>
                 <a:latin typeface="Consolas"/>
               </a:rPr>
-              <a:t>15</a:t>
-            </a:r>
-          </a:p>
-        </p:txBody>
-      </p:sp>
-      <p:sp>
-        <p:nvSpPr>
-          <p:cNvPr id="8" name="TextBox 7"/>
+              <a:t>20</a:t>
+            </a:r>
+          </a:p>
+        </p:txBody>
+      </p:sp>
+      <p:sp>
+        <p:nvSpPr>
+          <p:cNvPr id="13" name="TextBox 12"/>
           <p:cNvSpPr txBox="1"/>
           <p:nvPr/>
         </p:nvSpPr>
@@ -9750,13 +9408,14 @@
           <a:noFill/>
         </p:spPr>
         <p:txBody>
-          <a:bodyPr wrap="none">
-            <a:spAutoFit/>
-          </a:bodyPr>
-          <a:lstStyle/>
-          <a:p>
-            <a:r>
-              <a:rPr sz="1000">
+          <a:bodyPr wrap="square" anchor="t">
+            <a:spAutoFit/>
+          </a:bodyPr>
+          <a:lstStyle/>
+          <a:p>
+            <a:pPr algn="l"/>
+            <a:r>
+              <a:rPr sz="1000" b="0" i="0">
                 <a:solidFill>
                   <a:srgbClr val="898781"/>
                 </a:solidFill>
@@ -9776,7 +9435,7 @@
 </file>
 
 <file path=ppt/slides/slide21.xml><?xml version="1.0" encoding="utf-8"?>
-<p:sld xmlns:a="http://schemas.openxmlformats.org/drawingml/2006/main" xmlns:p="http://schemas.openxmlformats.org/presentationml/2006/main" xmlns:r="http://schemas.openxmlformats.org/officeDocument/2006/relationships">
+<p:sld xmlns:a="http://schemas.openxmlformats.org/drawingml/2006/main" xmlns:r="http://schemas.openxmlformats.org/officeDocument/2006/relationships" xmlns:p="http://schemas.openxmlformats.org/presentationml/2006/main">
   <p:cSld>
     <p:spTree>
       <p:nvGrpSpPr>
@@ -9784,7 +9443,14 @@
         <p:cNvGrpSpPr/>
         <p:nvPr/>
       </p:nvGrpSpPr>
-      <p:grpSpPr/>
+      <p:grpSpPr>
+        <a:xfrm>
+          <a:off x="0" y="0"/>
+          <a:ext cx="0" cy="0"/>
+          <a:chOff x="0" y="0"/>
+          <a:chExt cx="0" cy="0"/>
+        </a:xfrm>
+      </p:grpSpPr>
       <p:sp>
         <p:nvSpPr>
           <p:cNvPr id="2" name="Rectangle 1"/>
@@ -9826,6 +9492,7 @@
           <a:lstStyle/>
           <a:p>
             <a:pPr algn="ctr"/>
+            <a:endParaRPr/>
           </a:p>
         </p:txBody>
       </p:sp>
@@ -9846,19 +9513,20 @@
           <a:noFill/>
         </p:spPr>
         <p:txBody>
-          <a:bodyPr wrap="none">
-            <a:spAutoFit/>
-          </a:bodyPr>
-          <a:lstStyle/>
-          <a:p>
-            <a:r>
-              <a:rPr sz="1200" b="1">
+          <a:bodyPr wrap="square" anchor="t">
+            <a:spAutoFit/>
+          </a:bodyPr>
+          <a:lstStyle/>
+          <a:p>
+            <a:pPr algn="l"/>
+            <a:r>
+              <a:rPr sz="1200" b="1" i="0">
                 <a:solidFill>
                   <a:srgbClr val="2A78D6"/>
                 </a:solidFill>
                 <a:latin typeface="Consolas"/>
               </a:rPr>
-              <a:t>BOOKING &amp; SCHEDULING</a:t>
+              <a:t>WHAT'S NEXT</a:t>
             </a:r>
           </a:p>
         </p:txBody>
@@ -9880,19 +9548,20 @@
           <a:noFill/>
         </p:spPr>
         <p:txBody>
-          <a:bodyPr wrap="none">
-            <a:spAutoFit/>
-          </a:bodyPr>
-          <a:lstStyle/>
-          <a:p>
-            <a:r>
-              <a:rPr sz="2800" b="1">
+          <a:bodyPr wrap="square" anchor="t">
+            <a:spAutoFit/>
+          </a:bodyPr>
+          <a:lstStyle/>
+          <a:p>
+            <a:pPr algn="l"/>
+            <a:r>
+              <a:rPr sz="3000" b="1" i="0">
                 <a:solidFill>
                   <a:srgbClr val="0B0B0B"/>
                 </a:solidFill>
                 <a:latin typeface="Calibri"/>
               </a:rPr>
-              <a:t>A Calendar, Built Like One</a:t>
+              <a:t>Closing the loop</a:t>
             </a:r>
           </a:p>
         </p:txBody>
@@ -9938,19 +9607,618 @@
           <a:lstStyle/>
           <a:p>
             <a:pPr algn="ctr"/>
-          </a:p>
-        </p:txBody>
-      </p:sp>
-      <p:sp>
-        <p:nvSpPr>
-          <p:cNvPr id="6" name="TextBox 5"/>
-          <p:cNvSpPr txBox="1"/>
-          <p:nvPr/>
-        </p:nvSpPr>
-        <p:spPr>
-          <a:xfrm>
-            <a:off x="502920" y="1828800"/>
-            <a:ext cx="10789920" cy="3600000"/>
+            <a:endParaRPr/>
+          </a:p>
+        </p:txBody>
+      </p:sp>
+      <p:sp>
+        <p:nvSpPr>
+          <p:cNvPr id="6" name="Rectangle 5"/>
+          <p:cNvSpPr/>
+          <p:nvPr/>
+        </p:nvSpPr>
+        <p:spPr>
+          <a:xfrm>
+            <a:off x="502920" y="2103120"/>
+            <a:ext cx="1920240" cy="1051560"/>
+          </a:xfrm>
+          <a:prstGeom prst="rect">
+            <a:avLst/>
+          </a:prstGeom>
+          <a:solidFill>
+            <a:srgbClr val="FFFFFF"/>
+          </a:solidFill>
+          <a:ln w="22225">
+            <a:solidFill>
+              <a:srgbClr val="2A78D6"/>
+            </a:solidFill>
+          </a:ln>
+          <a:effectLst/>
+        </p:spPr>
+        <p:style>
+          <a:lnRef idx="1">
+            <a:schemeClr val="accent1"/>
+          </a:lnRef>
+          <a:fillRef idx="3">
+            <a:schemeClr val="accent1"/>
+          </a:fillRef>
+          <a:effectRef idx="2">
+            <a:schemeClr val="accent1"/>
+          </a:effectRef>
+          <a:fontRef idx="minor">
+            <a:schemeClr val="lt1"/>
+          </a:fontRef>
+        </p:style>
+        <p:txBody>
+          <a:bodyPr rtlCol="0" anchor="ctr"/>
+          <a:lstStyle/>
+          <a:p>
+            <a:pPr algn="ctr"/>
+            <a:endParaRPr/>
+          </a:p>
+        </p:txBody>
+      </p:sp>
+      <p:sp>
+        <p:nvSpPr>
+          <p:cNvPr id="7" name="TextBox 6"/>
+          <p:cNvSpPr txBox="1"/>
+          <p:nvPr/>
+        </p:nvSpPr>
+        <p:spPr>
+          <a:xfrm>
+            <a:off x="502920" y="2240280"/>
+            <a:ext cx="1920240" cy="777240"/>
+          </a:xfrm>
+          <a:prstGeom prst="rect">
+            <a:avLst/>
+          </a:prstGeom>
+          <a:noFill/>
+        </p:spPr>
+        <p:txBody>
+          <a:bodyPr wrap="square" anchor="ctr">
+            <a:spAutoFit/>
+          </a:bodyPr>
+          <a:lstStyle/>
+          <a:p>
+            <a:pPr algn="ctr"/>
+            <a:r>
+              <a:rPr sz="1300" b="1" i="0">
+                <a:solidFill>
+                  <a:srgbClr val="0B0B0B"/>
+                </a:solidFill>
+                <a:latin typeface="Calibri"/>
+              </a:rPr>
+              <a:t>Recommended</a:t>
+            </a:r>
+          </a:p>
+          <a:p>
+            <a:pPr algn="ctr"/>
+            <a:r>
+              <a:rPr sz="1300" b="1" i="0">
+                <a:solidFill>
+                  <a:srgbClr val="0B0B0B"/>
+                </a:solidFill>
+                <a:latin typeface="Calibri"/>
+              </a:rPr>
+              <a:t>intervention</a:t>
+            </a:r>
+          </a:p>
+        </p:txBody>
+      </p:sp>
+      <p:sp>
+        <p:nvSpPr>
+          <p:cNvPr id="8" name="TextBox 7"/>
+          <p:cNvSpPr txBox="1"/>
+          <p:nvPr/>
+        </p:nvSpPr>
+        <p:spPr>
+          <a:xfrm>
+            <a:off x="2423160" y="2331720"/>
+            <a:ext cx="388620" cy="640080"/>
+          </a:xfrm>
+          <a:prstGeom prst="rect">
+            <a:avLst/>
+          </a:prstGeom>
+          <a:noFill/>
+        </p:spPr>
+        <p:txBody>
+          <a:bodyPr wrap="square" anchor="t">
+            <a:spAutoFit/>
+          </a:bodyPr>
+          <a:lstStyle/>
+          <a:p>
+            <a:pPr algn="ctr"/>
+            <a:r>
+              <a:rPr sz="2000" b="0" i="0">
+                <a:solidFill>
+                  <a:srgbClr val="898781"/>
+                </a:solidFill>
+                <a:latin typeface="Calibri"/>
+              </a:rPr>
+              <a:t>→</a:t>
+            </a:r>
+          </a:p>
+        </p:txBody>
+      </p:sp>
+      <p:sp>
+        <p:nvSpPr>
+          <p:cNvPr id="9" name="Rectangle 8"/>
+          <p:cNvSpPr/>
+          <p:nvPr/>
+        </p:nvSpPr>
+        <p:spPr>
+          <a:xfrm>
+            <a:off x="2811780" y="2103120"/>
+            <a:ext cx="1920240" cy="1051560"/>
+          </a:xfrm>
+          <a:prstGeom prst="rect">
+            <a:avLst/>
+          </a:prstGeom>
+          <a:solidFill>
+            <a:srgbClr val="FFFFFF"/>
+          </a:solidFill>
+          <a:ln w="22225">
+            <a:solidFill>
+              <a:srgbClr val="2A78D6"/>
+            </a:solidFill>
+          </a:ln>
+          <a:effectLst/>
+        </p:spPr>
+        <p:style>
+          <a:lnRef idx="1">
+            <a:schemeClr val="accent1"/>
+          </a:lnRef>
+          <a:fillRef idx="3">
+            <a:schemeClr val="accent1"/>
+          </a:fillRef>
+          <a:effectRef idx="2">
+            <a:schemeClr val="accent1"/>
+          </a:effectRef>
+          <a:fontRef idx="minor">
+            <a:schemeClr val="lt1"/>
+          </a:fontRef>
+        </p:style>
+        <p:txBody>
+          <a:bodyPr rtlCol="0" anchor="ctr"/>
+          <a:lstStyle/>
+          <a:p>
+            <a:pPr algn="ctr"/>
+            <a:endParaRPr/>
+          </a:p>
+        </p:txBody>
+      </p:sp>
+      <p:sp>
+        <p:nvSpPr>
+          <p:cNvPr id="10" name="TextBox 9"/>
+          <p:cNvSpPr txBox="1"/>
+          <p:nvPr/>
+        </p:nvSpPr>
+        <p:spPr>
+          <a:xfrm>
+            <a:off x="2811780" y="2240280"/>
+            <a:ext cx="1920240" cy="777240"/>
+          </a:xfrm>
+          <a:prstGeom prst="rect">
+            <a:avLst/>
+          </a:prstGeom>
+          <a:noFill/>
+        </p:spPr>
+        <p:txBody>
+          <a:bodyPr wrap="square" anchor="ctr">
+            <a:spAutoFit/>
+          </a:bodyPr>
+          <a:lstStyle/>
+          <a:p>
+            <a:pPr algn="ctr"/>
+            <a:r>
+              <a:rPr sz="1300" b="1" i="0">
+                <a:solidFill>
+                  <a:srgbClr val="0B0B0B"/>
+                </a:solidFill>
+                <a:latin typeface="Calibri"/>
+              </a:rPr>
+              <a:t>Completed</a:t>
+            </a:r>
+          </a:p>
+          <a:p>
+            <a:pPr algn="ctr"/>
+            <a:r>
+              <a:rPr sz="1300" b="1" i="0">
+                <a:solidFill>
+                  <a:srgbClr val="0B0B0B"/>
+                </a:solidFill>
+                <a:latin typeface="Calibri"/>
+              </a:rPr>
+              <a:t>intervention</a:t>
+            </a:r>
+          </a:p>
+        </p:txBody>
+      </p:sp>
+      <p:sp>
+        <p:nvSpPr>
+          <p:cNvPr id="11" name="TextBox 10"/>
+          <p:cNvSpPr txBox="1"/>
+          <p:nvPr/>
+        </p:nvSpPr>
+        <p:spPr>
+          <a:xfrm>
+            <a:off x="4732020" y="2331720"/>
+            <a:ext cx="388620" cy="640080"/>
+          </a:xfrm>
+          <a:prstGeom prst="rect">
+            <a:avLst/>
+          </a:prstGeom>
+          <a:noFill/>
+        </p:spPr>
+        <p:txBody>
+          <a:bodyPr wrap="square" anchor="t">
+            <a:spAutoFit/>
+          </a:bodyPr>
+          <a:lstStyle/>
+          <a:p>
+            <a:pPr algn="ctr"/>
+            <a:r>
+              <a:rPr sz="2000" b="0" i="0">
+                <a:solidFill>
+                  <a:srgbClr val="898781"/>
+                </a:solidFill>
+                <a:latin typeface="Calibri"/>
+              </a:rPr>
+              <a:t>→</a:t>
+            </a:r>
+          </a:p>
+        </p:txBody>
+      </p:sp>
+      <p:sp>
+        <p:nvSpPr>
+          <p:cNvPr id="12" name="Rectangle 11"/>
+          <p:cNvSpPr/>
+          <p:nvPr/>
+        </p:nvSpPr>
+        <p:spPr>
+          <a:xfrm>
+            <a:off x="5120640" y="2103120"/>
+            <a:ext cx="1920240" cy="1051560"/>
+          </a:xfrm>
+          <a:prstGeom prst="rect">
+            <a:avLst/>
+          </a:prstGeom>
+          <a:solidFill>
+            <a:srgbClr val="FFFFFF"/>
+          </a:solidFill>
+          <a:ln w="22225">
+            <a:solidFill>
+              <a:srgbClr val="2A78D6"/>
+            </a:solidFill>
+          </a:ln>
+          <a:effectLst/>
+        </p:spPr>
+        <p:style>
+          <a:lnRef idx="1">
+            <a:schemeClr val="accent1"/>
+          </a:lnRef>
+          <a:fillRef idx="3">
+            <a:schemeClr val="accent1"/>
+          </a:fillRef>
+          <a:effectRef idx="2">
+            <a:schemeClr val="accent1"/>
+          </a:effectRef>
+          <a:fontRef idx="minor">
+            <a:schemeClr val="lt1"/>
+          </a:fontRef>
+        </p:style>
+        <p:txBody>
+          <a:bodyPr rtlCol="0" anchor="ctr"/>
+          <a:lstStyle/>
+          <a:p>
+            <a:pPr algn="ctr"/>
+            <a:endParaRPr/>
+          </a:p>
+        </p:txBody>
+      </p:sp>
+      <p:sp>
+        <p:nvSpPr>
+          <p:cNvPr id="13" name="TextBox 12"/>
+          <p:cNvSpPr txBox="1"/>
+          <p:nvPr/>
+        </p:nvSpPr>
+        <p:spPr>
+          <a:xfrm>
+            <a:off x="5120640" y="2240280"/>
+            <a:ext cx="1920240" cy="777240"/>
+          </a:xfrm>
+          <a:prstGeom prst="rect">
+            <a:avLst/>
+          </a:prstGeom>
+          <a:noFill/>
+        </p:spPr>
+        <p:txBody>
+          <a:bodyPr wrap="square" anchor="ctr">
+            <a:spAutoFit/>
+          </a:bodyPr>
+          <a:lstStyle/>
+          <a:p>
+            <a:pPr algn="ctr"/>
+            <a:r>
+              <a:rPr sz="1300" b="1" i="0">
+                <a:solidFill>
+                  <a:srgbClr val="0B0B0B"/>
+                </a:solidFill>
+                <a:latin typeface="Calibri"/>
+              </a:rPr>
+              <a:t>Outcome</a:t>
+            </a:r>
+          </a:p>
+        </p:txBody>
+      </p:sp>
+      <p:sp>
+        <p:nvSpPr>
+          <p:cNvPr id="14" name="TextBox 13"/>
+          <p:cNvSpPr txBox="1"/>
+          <p:nvPr/>
+        </p:nvSpPr>
+        <p:spPr>
+          <a:xfrm>
+            <a:off x="7040880" y="2331720"/>
+            <a:ext cx="388620" cy="640080"/>
+          </a:xfrm>
+          <a:prstGeom prst="rect">
+            <a:avLst/>
+          </a:prstGeom>
+          <a:noFill/>
+        </p:spPr>
+        <p:txBody>
+          <a:bodyPr wrap="square" anchor="t">
+            <a:spAutoFit/>
+          </a:bodyPr>
+          <a:lstStyle/>
+          <a:p>
+            <a:pPr algn="ctr"/>
+            <a:r>
+              <a:rPr sz="2000" b="0" i="0">
+                <a:solidFill>
+                  <a:srgbClr val="898781"/>
+                </a:solidFill>
+                <a:latin typeface="Calibri"/>
+              </a:rPr>
+              <a:t>→</a:t>
+            </a:r>
+          </a:p>
+        </p:txBody>
+      </p:sp>
+      <p:sp>
+        <p:nvSpPr>
+          <p:cNvPr id="15" name="Rectangle 14"/>
+          <p:cNvSpPr/>
+          <p:nvPr/>
+        </p:nvSpPr>
+        <p:spPr>
+          <a:xfrm>
+            <a:off x="7429500" y="2103120"/>
+            <a:ext cx="1920240" cy="1051560"/>
+          </a:xfrm>
+          <a:prstGeom prst="rect">
+            <a:avLst/>
+          </a:prstGeom>
+          <a:solidFill>
+            <a:srgbClr val="FFFFFF"/>
+          </a:solidFill>
+          <a:ln w="22225">
+            <a:solidFill>
+              <a:srgbClr val="2A78D6"/>
+            </a:solidFill>
+          </a:ln>
+          <a:effectLst/>
+        </p:spPr>
+        <p:style>
+          <a:lnRef idx="1">
+            <a:schemeClr val="accent1"/>
+          </a:lnRef>
+          <a:fillRef idx="3">
+            <a:schemeClr val="accent1"/>
+          </a:fillRef>
+          <a:effectRef idx="2">
+            <a:schemeClr val="accent1"/>
+          </a:effectRef>
+          <a:fontRef idx="minor">
+            <a:schemeClr val="lt1"/>
+          </a:fontRef>
+        </p:style>
+        <p:txBody>
+          <a:bodyPr rtlCol="0" anchor="ctr"/>
+          <a:lstStyle/>
+          <a:p>
+            <a:pPr algn="ctr"/>
+            <a:endParaRPr/>
+          </a:p>
+        </p:txBody>
+      </p:sp>
+      <p:sp>
+        <p:nvSpPr>
+          <p:cNvPr id="16" name="TextBox 15"/>
+          <p:cNvSpPr txBox="1"/>
+          <p:nvPr/>
+        </p:nvSpPr>
+        <p:spPr>
+          <a:xfrm>
+            <a:off x="7429500" y="2240280"/>
+            <a:ext cx="1920240" cy="777240"/>
+          </a:xfrm>
+          <a:prstGeom prst="rect">
+            <a:avLst/>
+          </a:prstGeom>
+          <a:noFill/>
+        </p:spPr>
+        <p:txBody>
+          <a:bodyPr wrap="square" anchor="ctr">
+            <a:spAutoFit/>
+          </a:bodyPr>
+          <a:lstStyle/>
+          <a:p>
+            <a:pPr algn="ctr"/>
+            <a:r>
+              <a:rPr sz="1300" b="1" i="0">
+                <a:solidFill>
+                  <a:srgbClr val="0B0B0B"/>
+                </a:solidFill>
+                <a:latin typeface="Calibri"/>
+              </a:rPr>
+              <a:t>Behavior</a:t>
+            </a:r>
+          </a:p>
+          <a:p>
+            <a:pPr algn="ctr"/>
+            <a:r>
+              <a:rPr sz="1300" b="1" i="0">
+                <a:solidFill>
+                  <a:srgbClr val="0B0B0B"/>
+                </a:solidFill>
+                <a:latin typeface="Calibri"/>
+              </a:rPr>
+              <a:t>change</a:t>
+            </a:r>
+          </a:p>
+        </p:txBody>
+      </p:sp>
+      <p:sp>
+        <p:nvSpPr>
+          <p:cNvPr id="17" name="TextBox 16"/>
+          <p:cNvSpPr txBox="1"/>
+          <p:nvPr/>
+        </p:nvSpPr>
+        <p:spPr>
+          <a:xfrm>
+            <a:off x="9349740" y="2331720"/>
+            <a:ext cx="388620" cy="640080"/>
+          </a:xfrm>
+          <a:prstGeom prst="rect">
+            <a:avLst/>
+          </a:prstGeom>
+          <a:noFill/>
+        </p:spPr>
+        <p:txBody>
+          <a:bodyPr wrap="square" anchor="t">
+            <a:spAutoFit/>
+          </a:bodyPr>
+          <a:lstStyle/>
+          <a:p>
+            <a:pPr algn="ctr"/>
+            <a:r>
+              <a:rPr sz="2000" b="0" i="0">
+                <a:solidFill>
+                  <a:srgbClr val="898781"/>
+                </a:solidFill>
+                <a:latin typeface="Calibri"/>
+              </a:rPr>
+              <a:t>→</a:t>
+            </a:r>
+          </a:p>
+        </p:txBody>
+      </p:sp>
+      <p:sp>
+        <p:nvSpPr>
+          <p:cNvPr id="18" name="Rectangle 17"/>
+          <p:cNvSpPr/>
+          <p:nvPr/>
+        </p:nvSpPr>
+        <p:spPr>
+          <a:xfrm>
+            <a:off x="9738360" y="2103120"/>
+            <a:ext cx="1920240" cy="1051560"/>
+          </a:xfrm>
+          <a:prstGeom prst="rect">
+            <a:avLst/>
+          </a:prstGeom>
+          <a:solidFill>
+            <a:srgbClr val="FFFFFF"/>
+          </a:solidFill>
+          <a:ln w="22225">
+            <a:solidFill>
+              <a:srgbClr val="2A78D6"/>
+            </a:solidFill>
+          </a:ln>
+          <a:effectLst/>
+        </p:spPr>
+        <p:style>
+          <a:lnRef idx="1">
+            <a:schemeClr val="accent1"/>
+          </a:lnRef>
+          <a:fillRef idx="3">
+            <a:schemeClr val="accent1"/>
+          </a:fillRef>
+          <a:effectRef idx="2">
+            <a:schemeClr val="accent1"/>
+          </a:effectRef>
+          <a:fontRef idx="minor">
+            <a:schemeClr val="lt1"/>
+          </a:fontRef>
+        </p:style>
+        <p:txBody>
+          <a:bodyPr rtlCol="0" anchor="ctr"/>
+          <a:lstStyle/>
+          <a:p>
+            <a:pPr algn="ctr"/>
+            <a:endParaRPr/>
+          </a:p>
+        </p:txBody>
+      </p:sp>
+      <p:sp>
+        <p:nvSpPr>
+          <p:cNvPr id="19" name="TextBox 18"/>
+          <p:cNvSpPr txBox="1"/>
+          <p:nvPr/>
+        </p:nvSpPr>
+        <p:spPr>
+          <a:xfrm>
+            <a:off x="9738360" y="2240280"/>
+            <a:ext cx="1920240" cy="777240"/>
+          </a:xfrm>
+          <a:prstGeom prst="rect">
+            <a:avLst/>
+          </a:prstGeom>
+          <a:noFill/>
+        </p:spPr>
+        <p:txBody>
+          <a:bodyPr wrap="square" anchor="ctr">
+            <a:spAutoFit/>
+          </a:bodyPr>
+          <a:lstStyle/>
+          <a:p>
+            <a:pPr algn="ctr"/>
+            <a:r>
+              <a:rPr sz="1300" b="1" i="0">
+                <a:solidFill>
+                  <a:srgbClr val="0B0B0B"/>
+                </a:solidFill>
+                <a:latin typeface="Calibri"/>
+              </a:rPr>
+              <a:t>Next quiz</a:t>
+            </a:r>
+          </a:p>
+          <a:p>
+            <a:pPr algn="ctr"/>
+            <a:r>
+              <a:rPr sz="1300" b="1" i="0">
+                <a:solidFill>
+                  <a:srgbClr val="0B0B0B"/>
+                </a:solidFill>
+                <a:latin typeface="Calibri"/>
+              </a:rPr>
+              <a:t>result</a:t>
+            </a:r>
+          </a:p>
+        </p:txBody>
+      </p:sp>
+      <p:sp>
+        <p:nvSpPr>
+          <p:cNvPr id="20" name="TextBox 19"/>
+          <p:cNvSpPr txBox="1"/>
+          <p:nvPr/>
+        </p:nvSpPr>
+        <p:spPr>
+          <a:xfrm>
+            <a:off x="502920" y="3749039"/>
+            <a:ext cx="11155680" cy="2194560"/>
           </a:xfrm>
           <a:prstGeom prst="rect">
             <a:avLst/>
@@ -9965,72 +10233,65 @@
           <a:p>
             <a:pPr>
               <a:spcAft>
-                <a:spcPts val="1000"/>
+                <a:spcPts val="800"/>
               </a:spcAft>
             </a:pPr>
             <a:r>
-              <a:rPr sz="1600">
+              <a:rPr sz="1600" b="0">
                 <a:solidFill>
                   <a:srgbClr val="0B0B0B"/>
                 </a:solidFill>
                 <a:latin typeface="Calibri"/>
               </a:rPr>
-              <a:t>›  A real month grid — Prev/Next navigation, today highlighted, laid out like a familiar calendar app.</a:t>
+              <a:t>›  Today, the system measures whether an action was completed — not yet whether it worked.</a:t>
             </a:r>
           </a:p>
           <a:p>
             <a:pPr>
               <a:spcAft>
-                <a:spcPts val="1000"/>
+                <a:spcPts val="800"/>
               </a:spcAft>
             </a:pPr>
             <a:r>
-              <a:rPr sz="1600">
+              <a:rPr sz="1600" b="0">
                 <a:solidFill>
                   <a:srgbClr val="0B0B0B"/>
                 </a:solidFill>
                 <a:latin typeface="Calibri"/>
               </a:rPr>
-              <a:t>›  Shows only approved sessions: booked and completed — pending time options never clutter the view.</a:t>
+              <a:t>›  Once Quiz 2 results land, each completed intervention becomes a labeled example.</a:t>
             </a:r>
           </a:p>
           <a:p>
             <a:pPr>
               <a:spcAft>
-                <a:spcPts val="1000"/>
+                <a:spcPts val="800"/>
               </a:spcAft>
             </a:pPr>
             <a:r>
+              <a:rPr sz="1600" b="1">
+                <a:solidFill>
+                  <a:srgbClr val="0B0B0B"/>
+                </a:solidFill>
+                <a:latin typeface="Calibri"/>
+              </a:rPr>
+              <a:t>›  That's exactly the training data a real predictive model would need</a:t>
+            </a:r>
+            <a:r>
               <a:rPr sz="1600">
                 <a:solidFill>
                   <a:srgbClr val="0B0B0B"/>
                 </a:solidFill>
                 <a:latin typeface="Calibri"/>
               </a:rPr>
-              <a:t>›  Proposing time options creates a tracked intervention immediately, before a student even confirms one.</a:t>
-            </a:r>
-          </a:p>
-          <a:p>
-            <a:pPr>
-              <a:spcAft>
-                <a:spcPts val="1000"/>
-              </a:spcAft>
-            </a:pPr>
-            <a:r>
-              <a:rPr sz="1600">
-                <a:solidFill>
-                  <a:srgbClr val="0B0B0B"/>
-                </a:solidFill>
-                <a:latin typeface="Calibri"/>
-              </a:rPr>
-              <a:t>›  Mark a session done, reschedule it, or cancel it — all from the same page.</a:t>
-            </a:r>
-          </a:p>
-        </p:txBody>
-      </p:sp>
-      <p:sp>
-        <p:nvSpPr>
-          <p:cNvPr id="7" name="TextBox 6"/>
+              <a:t>— and only then would training one be justified.</a:t>
+            </a:r>
+          </a:p>
+        </p:txBody>
+      </p:sp>
+      <p:sp>
+        <p:nvSpPr>
+          <p:cNvPr id="21" name="TextBox 20"/>
           <p:cNvSpPr txBox="1"/>
           <p:nvPr/>
         </p:nvSpPr>
@@ -10045,27 +10306,27 @@
           <a:noFill/>
         </p:spPr>
         <p:txBody>
-          <a:bodyPr wrap="none">
+          <a:bodyPr wrap="square" anchor="t">
             <a:spAutoFit/>
           </a:bodyPr>
           <a:lstStyle/>
           <a:p>
             <a:pPr algn="r"/>
             <a:r>
-              <a:rPr sz="1100">
+              <a:rPr sz="1100" b="0" i="0">
                 <a:solidFill>
                   <a:srgbClr val="898781"/>
                 </a:solidFill>
                 <a:latin typeface="Consolas"/>
               </a:rPr>
-              <a:t>16</a:t>
-            </a:r>
-          </a:p>
-        </p:txBody>
-      </p:sp>
-      <p:sp>
-        <p:nvSpPr>
-          <p:cNvPr id="8" name="TextBox 7"/>
+              <a:t>21</a:t>
+            </a:r>
+          </a:p>
+        </p:txBody>
+      </p:sp>
+      <p:sp>
+        <p:nvSpPr>
+          <p:cNvPr id="22" name="TextBox 21"/>
           <p:cNvSpPr txBox="1"/>
           <p:nvPr/>
         </p:nvSpPr>
@@ -10080,13 +10341,14 @@
           <a:noFill/>
         </p:spPr>
         <p:txBody>
-          <a:bodyPr wrap="none">
-            <a:spAutoFit/>
-          </a:bodyPr>
-          <a:lstStyle/>
-          <a:p>
-            <a:r>
-              <a:rPr sz="1000">
+          <a:bodyPr wrap="square" anchor="t">
+            <a:spAutoFit/>
+          </a:bodyPr>
+          <a:lstStyle/>
+          <a:p>
+            <a:pPr algn="l"/>
+            <a:r>
+              <a:rPr sz="1000" b="0" i="0">
                 <a:solidFill>
                   <a:srgbClr val="898781"/>
                 </a:solidFill>
@@ -10106,7 +10368,7 @@
 </file>
 
 <file path=ppt/slides/slide22.xml><?xml version="1.0" encoding="utf-8"?>
-<p:sld xmlns:a="http://schemas.openxmlformats.org/drawingml/2006/main" xmlns:p="http://schemas.openxmlformats.org/presentationml/2006/main" xmlns:r="http://schemas.openxmlformats.org/officeDocument/2006/relationships">
+<p:sld xmlns:a="http://schemas.openxmlformats.org/drawingml/2006/main" xmlns:r="http://schemas.openxmlformats.org/officeDocument/2006/relationships" xmlns:p="http://schemas.openxmlformats.org/presentationml/2006/main">
   <p:cSld>
     <p:spTree>
       <p:nvGrpSpPr>
@@ -10114,7 +10376,14 @@
         <p:cNvGrpSpPr/>
         <p:nvPr/>
       </p:nvGrpSpPr>
-      <p:grpSpPr/>
+      <p:grpSpPr>
+        <a:xfrm>
+          <a:off x="0" y="0"/>
+          <a:ext cx="0" cy="0"/>
+          <a:chOff x="0" y="0"/>
+          <a:chExt cx="0" cy="0"/>
+        </a:xfrm>
+      </p:grpSpPr>
       <p:sp>
         <p:nvSpPr>
           <p:cNvPr id="2" name="Rectangle 1"/>
@@ -10130,7 +10399,7 @@
             <a:avLst/>
           </a:prstGeom>
           <a:solidFill>
-            <a:srgbClr val="FCFCFB"/>
+            <a:srgbClr val="0B0F0E"/>
           </a:solidFill>
           <a:ln>
             <a:noFill/>
@@ -10156,6 +10425,7 @@
           <a:lstStyle/>
           <a:p>
             <a:pPr algn="ctr"/>
+            <a:endParaRPr/>
           </a:p>
         </p:txBody>
       </p:sp>
@@ -10167,28 +10437,29 @@
         </p:nvSpPr>
         <p:spPr>
           <a:xfrm>
-            <a:off x="502920" y="365760"/>
-            <a:ext cx="8229600" cy="320040"/>
-          </a:xfrm>
-          <a:prstGeom prst="rect">
-            <a:avLst/>
-          </a:prstGeom>
-          <a:noFill/>
-        </p:spPr>
-        <p:txBody>
-          <a:bodyPr wrap="none">
-            <a:spAutoFit/>
-          </a:bodyPr>
-          <a:lstStyle/>
-          <a:p>
-            <a:r>
-              <a:rPr sz="1200" b="1">
-                <a:solidFill>
-                  <a:srgbClr val="2A78D6"/>
-                </a:solidFill>
-                <a:latin typeface="Consolas"/>
-              </a:rPr>
-              <a:t>A CHAT ASSISTANT, GROUNDED IN YOUR DATA</a:t>
+            <a:off x="502920" y="2560320"/>
+            <a:ext cx="7315200" cy="914400"/>
+          </a:xfrm>
+          <a:prstGeom prst="rect">
+            <a:avLst/>
+          </a:prstGeom>
+          <a:noFill/>
+        </p:spPr>
+        <p:txBody>
+          <a:bodyPr wrap="square" anchor="t">
+            <a:spAutoFit/>
+          </a:bodyPr>
+          <a:lstStyle/>
+          <a:p>
+            <a:pPr algn="l"/>
+            <a:r>
+              <a:rPr sz="4400" b="1" i="0">
+                <a:solidFill>
+                  <a:srgbClr val="EDEDEC"/>
+                </a:solidFill>
+                <a:latin typeface="Calibri"/>
+              </a:rPr>
+              <a:t>Thank you.</a:t>
             </a:r>
           </a:p>
         </p:txBody>
@@ -10201,228 +10472,29 @@
         </p:nvSpPr>
         <p:spPr>
           <a:xfrm>
-            <a:off x="502920" y="658368"/>
-            <a:ext cx="11155680" cy="822960"/>
-          </a:xfrm>
-          <a:prstGeom prst="rect">
-            <a:avLst/>
-          </a:prstGeom>
-          <a:noFill/>
-        </p:spPr>
-        <p:txBody>
-          <a:bodyPr wrap="none">
-            <a:spAutoFit/>
-          </a:bodyPr>
-          <a:lstStyle/>
-          <a:p>
-            <a:r>
-              <a:rPr sz="2800" b="1">
-                <a:solidFill>
-                  <a:srgbClr val="0B0B0B"/>
-                </a:solidFill>
-                <a:latin typeface="Calibri"/>
-              </a:rPr>
-              <a:t>Ask AI</a:t>
-            </a:r>
-          </a:p>
-        </p:txBody>
-      </p:sp>
-      <p:sp>
-        <p:nvSpPr>
-          <p:cNvPr id="5" name="Rectangle 4"/>
-          <p:cNvSpPr/>
-          <p:nvPr/>
-        </p:nvSpPr>
-        <p:spPr>
-          <a:xfrm>
-            <a:off x="502920" y="1371600"/>
-            <a:ext cx="502920" cy="50800"/>
-          </a:xfrm>
-          <a:prstGeom prst="rect">
-            <a:avLst/>
-          </a:prstGeom>
-          <a:solidFill>
-            <a:srgbClr val="2A78D6"/>
-          </a:solidFill>
-          <a:ln>
-            <a:noFill/>
-          </a:ln>
-          <a:effectLst/>
-        </p:spPr>
-        <p:style>
-          <a:lnRef idx="1">
-            <a:schemeClr val="accent1"/>
-          </a:lnRef>
-          <a:fillRef idx="3">
-            <a:schemeClr val="accent1"/>
-          </a:fillRef>
-          <a:effectRef idx="2">
-            <a:schemeClr val="accent1"/>
-          </a:effectRef>
-          <a:fontRef idx="minor">
-            <a:schemeClr val="lt1"/>
-          </a:fontRef>
-        </p:style>
-        <p:txBody>
-          <a:bodyPr rtlCol="0" anchor="ctr"/>
-          <a:lstStyle/>
-          <a:p>
-            <a:pPr algn="ctr"/>
-          </a:p>
-        </p:txBody>
-      </p:sp>
-      <p:sp>
-        <p:nvSpPr>
-          <p:cNvPr id="6" name="TextBox 5"/>
-          <p:cNvSpPr txBox="1"/>
-          <p:nvPr/>
-        </p:nvSpPr>
-        <p:spPr>
-          <a:xfrm>
-            <a:off x="502920" y="1828800"/>
-            <a:ext cx="10789920" cy="3600000"/>
-          </a:xfrm>
-          <a:prstGeom prst="rect">
-            <a:avLst/>
-          </a:prstGeom>
-          <a:noFill/>
-        </p:spPr>
-        <p:txBody>
-          <a:bodyPr wrap="square">
-            <a:spAutoFit/>
-          </a:bodyPr>
-          <a:lstStyle/>
-          <a:p>
-            <a:pPr>
-              <a:spcAft>
-                <a:spcPts val="1000"/>
-              </a:spcAft>
-            </a:pPr>
-            <a:r>
-              <a:rPr sz="1600">
-                <a:solidFill>
-                  <a:srgbClr val="0B0B0B"/>
-                </a:solidFill>
-                <a:latin typeface="Calibri"/>
-              </a:rPr>
-              <a:t>›  Ask about risk levels, coverage, overdue actions, or a specific student, in plain language.</a:t>
-            </a:r>
-          </a:p>
-          <a:p>
-            <a:pPr>
-              <a:spcAft>
-                <a:spcPts val="1000"/>
-              </a:spcAft>
-            </a:pPr>
-            <a:r>
-              <a:rPr sz="1600">
-                <a:solidFill>
-                  <a:srgbClr val="0B0B0B"/>
-                </a:solidFill>
-                <a:latin typeface="Calibri"/>
-              </a:rPr>
-              <a:t>›  Every answer is built from a live digest of your own roster and intervention data — never a generic knowledge base with no connection to your students.</a:t>
-            </a:r>
-          </a:p>
-          <a:p>
-            <a:pPr>
-              <a:spcAft>
-                <a:spcPts val="1000"/>
-              </a:spcAft>
-            </a:pPr>
-            <a:r>
-              <a:rPr sz="1600">
-                <a:solidFill>
-                  <a:srgbClr val="0B0B0B"/>
-                </a:solidFill>
-                <a:latin typeface="Calibri"/>
-              </a:rPr>
-              <a:t>›  Naming a student pulls in their full record automatically; asking about something the data doesn't cover gets an honest “I don't know,” never a guess.</a:t>
-            </a:r>
-          </a:p>
-          <a:p>
-            <a:pPr>
-              <a:spcAft>
-                <a:spcPts val="1000"/>
-              </a:spcAft>
-            </a:pPr>
-            <a:r>
-              <a:rPr sz="1600">
-                <a:solidFill>
-                  <a:srgbClr val="0B0B0B"/>
-                </a:solidFill>
-                <a:latin typeface="Calibri"/>
-              </a:rPr>
-              <a:t>›  Conversations are saved, renameable, and switchable — pick up where you left off.</a:t>
-            </a:r>
-          </a:p>
-        </p:txBody>
-      </p:sp>
-      <p:sp>
-        <p:nvSpPr>
-          <p:cNvPr id="7" name="TextBox 6"/>
-          <p:cNvSpPr txBox="1"/>
-          <p:nvPr/>
-        </p:nvSpPr>
-        <p:spPr>
-          <a:xfrm>
-            <a:off x="11368735" y="6355080"/>
-            <a:ext cx="548640" cy="320040"/>
-          </a:xfrm>
-          <a:prstGeom prst="rect">
-            <a:avLst/>
-          </a:prstGeom>
-          <a:noFill/>
-        </p:spPr>
-        <p:txBody>
-          <a:bodyPr wrap="none">
-            <a:spAutoFit/>
-          </a:bodyPr>
-          <a:lstStyle/>
-          <a:p>
-            <a:pPr algn="r"/>
-            <a:r>
-              <a:rPr sz="1100">
-                <a:solidFill>
-                  <a:srgbClr val="898781"/>
-                </a:solidFill>
-                <a:latin typeface="Consolas"/>
-              </a:rPr>
-              <a:t>17</a:t>
-            </a:r>
-          </a:p>
-        </p:txBody>
-      </p:sp>
-      <p:sp>
-        <p:nvSpPr>
-          <p:cNvPr id="8" name="TextBox 7"/>
-          <p:cNvSpPr txBox="1"/>
-          <p:nvPr/>
-        </p:nvSpPr>
-        <p:spPr>
-          <a:xfrm>
-            <a:off x="502920" y="6355080"/>
-            <a:ext cx="2743200" cy="320040"/>
-          </a:xfrm>
-          <a:prstGeom prst="rect">
-            <a:avLst/>
-          </a:prstGeom>
-          <a:noFill/>
-        </p:spPr>
-        <p:txBody>
-          <a:bodyPr wrap="none">
-            <a:spAutoFit/>
-          </a:bodyPr>
-          <a:lstStyle/>
-          <a:p>
-            <a:r>
-              <a:rPr sz="1000">
-                <a:solidFill>
-                  <a:srgbClr val="898781"/>
-                </a:solidFill>
-                <a:latin typeface="Consolas"/>
-              </a:rPr>
-              <a:t>BOON ACADEMY</a:t>
+            <a:off x="502920" y="3383280"/>
+            <a:ext cx="8229600" cy="548640"/>
+          </a:xfrm>
+          <a:prstGeom prst="rect">
+            <a:avLst/>
+          </a:prstGeom>
+          <a:noFill/>
+        </p:spPr>
+        <p:txBody>
+          <a:bodyPr wrap="square" anchor="t">
+            <a:spAutoFit/>
+          </a:bodyPr>
+          <a:lstStyle/>
+          <a:p>
+            <a:pPr algn="l"/>
+            <a:r>
+              <a:rPr sz="1800" b="0" i="0">
+                <a:solidFill>
+                  <a:srgbClr val="958D82"/>
+                </a:solidFill>
+                <a:latin typeface="Calibri"/>
+              </a:rPr>
+              <a:t>Boon Academy Intervention Command Center</a:t>
             </a:r>
           </a:p>
         </p:txBody>
